--- a/docs/pitch/Acheron_Plain_Explainer.pptx
+++ b/docs/pitch/Acheron_Plain_Explainer.pptx
@@ -16,9 +16,10 @@
     <p:sldId id="264" r:id="rId10"/>
     <p:sldId id="265" r:id="rId11"/>
     <p:sldId id="266" r:id="rId12"/>
+    <p:sldId id="267" r:id="rId13"/>
   </p:sldIdLst>
   <p:notesMasterIdLst>
-    <p:notesMasterId r:id="rId13"/>
+    <p:notesMasterId r:id="rId14"/>
   </p:notesMasterIdLst>
   <p:sldSz cx="12192000" cy="6858000"/>
   <p:notesSz cx="6858000" cy="12192000"/>
@@ -600,7 +601,7 @@
           <a:p>
             <a:r>
               <a:rPr lang="en-US" dirty="0"/>
-              <a:t>NSF SBIR figures from seedfund.nsf.gov. BioCompute total from Inc42. Catalog Series B from its own 2021 announcement.</a:t>
+              <a:t>Illustrative application areas. No customer relationship exists.</a:t>
             </a:r>
             <a:endParaRPr lang="en-US" dirty="0"/>
           </a:p>
@@ -688,7 +689,7 @@
           <a:p>
             <a:r>
               <a:rPr lang="en-US" dirty="0"/>
-              <a:t>Closing slide.</a:t>
+              <a:t>NSF SBIR figures from seedfund.nsf.gov. BioCompute total from Inc42. Catalog Series B from its own 2021 announcement.</a:t>
             </a:r>
             <a:endParaRPr lang="en-US" dirty="0"/>
           </a:p>
@@ -712,6 +713,94 @@
             <a:fld id="{F7021451-1387-4CA6-816F-3879F97B5CBC}" type="slidenum">
               <a:rPr lang="en-US"/>
               <a:t>11</a:t>
+            </a:fld>
+            <a:endParaRPr lang="en-US"/>
+          </a:p>
+        </p:txBody>
+      </p:sp>
+    </p:spTree>
+    <p:extLst>
+      <p:ext uri="{BB962C8B-B14F-4D97-AF65-F5344CB8AC3E}">
+        <p14:creationId xmlns:p14="http://schemas.microsoft.com/office/powerpoint/2010/main" val="1024086991"/>
+      </p:ext>
+    </p:extLst>
+  </p:cSld>
+  <p:clrMapOvr>
+    <a:masterClrMapping/>
+  </p:clrMapOvr>
+</p:notes>
+</file>
+
+<file path=ppt/notesSlides/notesSlide12.xml><?xml version="1.0" encoding="utf-8"?>
+<p:notes xmlns:a="http://schemas.openxmlformats.org/drawingml/2006/main" xmlns:r="http://schemas.openxmlformats.org/officeDocument/2006/relationships" xmlns:p="http://schemas.openxmlformats.org/presentationml/2006/main">
+  <p:cSld>
+    <p:spTree>
+      <p:nvGrpSpPr>
+        <p:cNvPr id="1" name=""/>
+        <p:cNvGrpSpPr/>
+        <p:nvPr/>
+      </p:nvGrpSpPr>
+      <p:grpSpPr>
+        <a:xfrm>
+          <a:off x="0" y="0"/>
+          <a:ext cx="0" cy="0"/>
+          <a:chOff x="0" y="0"/>
+          <a:chExt cx="0" cy="0"/>
+        </a:xfrm>
+      </p:grpSpPr>
+      <p:sp>
+        <p:nvSpPr>
+          <p:cNvPr id="2" name="Slide Image Placeholder 1"/>
+          <p:cNvSpPr>
+            <a:spLocks noGrp="1" noRot="1" noChangeAspect="1"/>
+          </p:cNvSpPr>
+          <p:nvPr>
+            <p:ph type="sldImg"/>
+          </p:nvPr>
+        </p:nvSpPr>
+        <p:spPr/>
+      </p:sp>
+      <p:sp>
+        <p:nvSpPr>
+          <p:cNvPr id="3" name="Notes Placeholder 2"/>
+          <p:cNvSpPr>
+            <a:spLocks noGrp="1"/>
+          </p:cNvSpPr>
+          <p:nvPr>
+            <p:ph type="body" idx="1"/>
+          </p:nvPr>
+        </p:nvSpPr>
+        <p:spPr/>
+        <p:txBody>
+          <a:bodyPr/>
+          <a:lstStyle/>
+          <a:p>
+            <a:r>
+              <a:rPr lang="en-US" dirty="0"/>
+              <a:t>Closing slide.</a:t>
+            </a:r>
+            <a:endParaRPr lang="en-US" dirty="0"/>
+          </a:p>
+        </p:txBody>
+      </p:sp>
+      <p:sp>
+        <p:nvSpPr>
+          <p:cNvPr id="4" name="Slide Number Placeholder 3"/>
+          <p:cNvSpPr>
+            <a:spLocks noGrp="1"/>
+          </p:cNvSpPr>
+          <p:nvPr>
+            <p:ph type="sldNum" sz="quarter" idx="10"/>
+          </p:nvPr>
+        </p:nvSpPr>
+        <p:spPr/>
+        <p:txBody>
+          <a:bodyPr/>
+          <a:lstStyle/>
+          <a:p>
+            <a:fld id="{F7021451-1387-4CA6-816F-3879F97B5CBC}" type="slidenum">
+              <a:rPr lang="en-US"/>
+              <a:t>12</a:t>
             </a:fld>
             <a:endParaRPr lang="en-US"/>
           </a:p>
@@ -776,7 +865,7 @@
           <a:p>
             <a:r>
               <a:rPr lang="en-US" dirty="0"/>
-              <a:t>Sentences 1 to 3 of nine.</a:t>
+              <a:t>The core slide. If the reader only sees one page, this is the one.</a:t>
             </a:r>
             <a:endParaRPr lang="en-US" dirty="0"/>
           </a:p>
@@ -864,7 +953,7 @@
           <a:p>
             <a:r>
               <a:rPr lang="en-US" dirty="0"/>
-              <a:t>Sentences 4 to 6 of nine.</a:t>
+              <a:t>Sentences 1 to 3 of nine.</a:t>
             </a:r>
             <a:endParaRPr lang="en-US" dirty="0"/>
           </a:p>
@@ -952,7 +1041,7 @@
           <a:p>
             <a:r>
               <a:rPr lang="en-US" dirty="0"/>
-              <a:t>Sentences 7 to 9 of nine.</a:t>
+              <a:t>Sentences 4 to 6 of nine.</a:t>
             </a:r>
             <a:endParaRPr lang="en-US" dirty="0"/>
           </a:p>
@@ -1040,7 +1129,7 @@
           <a:p>
             <a:r>
               <a:rPr lang="en-US" dirty="0"/>
-              <a:t>The switch and its readout. Colour is the answer.</a:t>
+              <a:t>Sentences 7 to 9 of nine.</a:t>
             </a:r>
             <a:endParaRPr lang="en-US" dirty="0"/>
           </a:p>
@@ -1128,7 +1217,7 @@
           <a:p>
             <a:r>
               <a:rPr lang="en-US" dirty="0"/>
-              <a:t>Regrowth from survivors. The dots are illustrative, not to scale.</a:t>
+              <a:t>The switch and its readout. Colour is the answer.</a:t>
             </a:r>
             <a:endParaRPr lang="en-US" dirty="0"/>
           </a:p>
@@ -1216,7 +1305,7 @@
           <a:p>
             <a:r>
               <a:rPr lang="en-US" dirty="0"/>
-              <a:t>Source: simulations/bsubtilis_07_colony_regrowth.py and bsubtilis_13_reporter_colony_regrowth.py, re-run 21 September 2026.</a:t>
+              <a:t>Regrowth from survivors. The dots are illustrative, not to scale.</a:t>
             </a:r>
             <a:endParaRPr lang="en-US" dirty="0"/>
           </a:p>
@@ -1304,7 +1393,7 @@
           <a:p>
             <a:r>
               <a:rPr lang="en-US" dirty="0"/>
-              <a:t>Levin framing per docs/SCIENTIFIC_AUDIT_2026.md Part 3 and Part 4.</a:t>
+              <a:t>Source: simulations/bsubtilis_07_colony_regrowth.py and bsubtilis_13_reporter_colony_regrowth.py, re-run 21 September 2026.</a:t>
             </a:r>
             <a:endParaRPr lang="en-US" dirty="0"/>
           </a:p>
@@ -1392,7 +1481,7 @@
           <a:p>
             <a:r>
               <a:rPr lang="en-US" dirty="0"/>
-              <a:t>Illustrative application areas. No customer relationship exists.</a:t>
+              <a:t>Organism-agnostic framing, per the founder's own statement of the goal, 21 September 2026. Levin detail per docs/SCIENTIFIC_AUDIT_2026.md Parts 3 and 4.</a:t>
             </a:r>
             <a:endParaRPr lang="en-US" dirty="0"/>
           </a:p>
@@ -1798,7 +1887,7 @@
                 <a:ea typeface="Cambria" pitchFamily="34" charset="-122"/>
                 <a:cs typeface="Cambria" pitchFamily="34" charset="-120"/>
               </a:rPr>
-              <a:t>The germs that remember</a:t>
+              <a:t>Data that heals itself</a:t>
             </a:r>
             <a:endParaRPr lang="en-US" sz="5000" dirty="0"/>
           </a:p>
@@ -1837,7 +1926,7 @@
                 <a:ea typeface="Calibri" pitchFamily="34" charset="-122"/>
                 <a:cs typeface="Calibri" pitchFamily="34" charset="-120"/>
               </a:rPr>
-              <a:t>Acheron, explained in nine sentences</a:t>
+              <a:t>Acheron, the whole idea in four steps</a:t>
             </a:r>
             <a:endParaRPr lang="en-US" sz="1900" dirty="0"/>
           </a:p>
@@ -1879,7 +1968,7 @@
                 <a:ea typeface="Calibri" pitchFamily="34" charset="-122"/>
                 <a:cs typeface="Calibri" pitchFamily="34" charset="-120"/>
               </a:rPr>
-              <a:t>Written for Jacqueline. Nothing here needs a science background. If you stop after the nine sentences, you already know enough to talk about it.</a:t>
+              <a:t>Written for Jacqueline. Nothing here needs a science background. If you only read the next slide, you already know enough to talk about it.</a:t>
             </a:r>
             <a:endParaRPr lang="en-US" sz="1350" dirty="0"/>
           </a:p>
@@ -2050,7 +2139,7 @@
                 <a:ea typeface="Cambria" pitchFamily="34" charset="-122"/>
                 <a:cs typeface="Cambria" pitchFamily="34" charset="-120"/>
               </a:rPr>
-              <a:t>How much this can actually make</a:t>
+              <a:t>Where it could be used, if it works</a:t>
             </a:r>
             <a:endParaRPr lang="en-US" sz="2300" dirty="0"/>
           </a:p>
@@ -2089,7 +2178,7 @@
                 <a:ea typeface="Calibri" pitchFamily="34" charset="-122"/>
                 <a:cs typeface="Calibri" pitchFamily="34" charset="-120"/>
               </a:rPr>
-              <a:t>Four real figures. None of them invented, all of them checkable.</a:t>
+              <a:t>Places people would plausibly want this. None of them is a customer, a deal, or a promise.</a:t>
             </a:r>
             <a:endParaRPr lang="en-US" sz="1400" dirty="0"/>
           </a:p>
@@ -2103,12 +2192,12 @@
         </p:nvSpPr>
         <p:spPr>
           <a:xfrm>
-            <a:off x="640080" y="1645920"/>
-            <a:ext cx="2606040" cy="2240280"/>
+            <a:off x="640080" y="1691640"/>
+            <a:ext cx="5349240" cy="1691640"/>
           </a:xfrm>
           <a:prstGeom prst="roundRect">
             <a:avLst>
-              <a:gd name="adj" fmla="val 4082"/>
+              <a:gd name="adj" fmla="val 5405"/>
             </a:avLst>
           </a:prstGeom>
           <a:solidFill>
@@ -2124,72 +2213,97 @@
       </p:sp>
       <p:sp>
         <p:nvSpPr>
-          <p:cNvPr id="6" name="Text 4"/>
-          <p:cNvSpPr txBox="1"/>
-          <p:nvPr/>
-        </p:nvSpPr>
-        <p:spPr>
-          <a:xfrm>
-            <a:off x="859536" y="1847088"/>
-            <a:ext cx="2167128" cy="713232"/>
-          </a:xfrm>
-          <a:prstGeom prst="rect">
-            <a:avLst/>
-          </a:prstGeom>
-          <a:noFill/>
-          <a:ln/>
-        </p:spPr>
-        <p:txBody>
-          <a:bodyPr wrap="square" lIns="0" tIns="0" rIns="0" bIns="0" rtlCol="0" anchor="ctr"/>
-          <a:lstStyle/>
-          <a:p>
-            <a:pPr indent="0" marL="0">
-              <a:buNone/>
-            </a:pPr>
-            <a:r>
-              <a:rPr lang="en-US" sz="3400" b="1" dirty="0">
-                <a:solidFill>
-                  <a:srgbClr val="1F8B5F"/>
+          <p:cNvPr id="6" name="Shape 4"/>
+          <p:cNvSpPr/>
+          <p:nvPr/>
+        </p:nvSpPr>
+        <p:spPr>
+          <a:xfrm>
+            <a:off x="914400" y="1984248"/>
+            <a:ext cx="146304" cy="146304"/>
+          </a:xfrm>
+          <a:prstGeom prst="ellipse">
+            <a:avLst/>
+          </a:prstGeom>
+          <a:solidFill>
+            <a:srgbClr val="1F8B5F"/>
+          </a:solidFill>
+          <a:ln w="12700">
+            <a:solidFill>
+              <a:srgbClr val="1F8B5F"/>
+            </a:solidFill>
+            <a:prstDash val="solid"/>
+          </a:ln>
+        </p:spPr>
+      </p:sp>
+      <p:sp>
+        <p:nvSpPr>
+          <p:cNvPr id="7" name="Text 5"/>
+          <p:cNvSpPr txBox="1"/>
+          <p:nvPr/>
+        </p:nvSpPr>
+        <p:spPr>
+          <a:xfrm>
+            <a:off x="1188720" y="1892808"/>
+            <a:ext cx="4572000" cy="347472"/>
+          </a:xfrm>
+          <a:prstGeom prst="rect">
+            <a:avLst/>
+          </a:prstGeom>
+          <a:noFill/>
+          <a:ln/>
+        </p:spPr>
+        <p:txBody>
+          <a:bodyPr wrap="square" lIns="0" tIns="0" rIns="0" bIns="0" rtlCol="0" anchor="ctr"/>
+          <a:lstStyle/>
+          <a:p>
+            <a:pPr indent="0" marL="0">
+              <a:buNone/>
+            </a:pPr>
+            <a:r>
+              <a:rPr lang="en-US" sz="1700" b="1" dirty="0">
+                <a:solidFill>
+                  <a:srgbClr val="132018"/>
                 </a:solidFill>
                 <a:latin typeface="Cambria" pitchFamily="34" charset="0"/>
                 <a:ea typeface="Cambria" pitchFamily="34" charset="-122"/>
                 <a:cs typeface="Cambria" pitchFamily="34" charset="-120"/>
               </a:rPr>
-              <a:t>$305,000</a:t>
-            </a:r>
-            <a:endParaRPr lang="en-US" sz="3400" dirty="0"/>
-          </a:p>
-        </p:txBody>
-      </p:sp>
-      <p:sp>
-        <p:nvSpPr>
-          <p:cNvPr id="7" name="Text 5"/>
-          <p:cNvSpPr txBox="1"/>
-          <p:nvPr/>
-        </p:nvSpPr>
-        <p:spPr>
-          <a:xfrm>
-            <a:off x="859536" y="2560320"/>
-            <a:ext cx="2167128" cy="1143000"/>
-          </a:xfrm>
-          <a:prstGeom prst="rect">
-            <a:avLst/>
-          </a:prstGeom>
-          <a:noFill/>
-          <a:ln/>
-        </p:spPr>
-        <p:txBody>
-          <a:bodyPr wrap="square" lIns="0" tIns="0" rIns="0" bIns="0" rtlCol="0" anchor="t"/>
+              <a:t>Long-term archives</a:t>
+            </a:r>
+            <a:endParaRPr lang="en-US" sz="1700" dirty="0"/>
+          </a:p>
+        </p:txBody>
+      </p:sp>
+      <p:sp>
+        <p:nvSpPr>
+          <p:cNvPr id="8" name="Text 6"/>
+          <p:cNvSpPr txBox="1"/>
+          <p:nvPr/>
+        </p:nvSpPr>
+        <p:spPr>
+          <a:xfrm>
+            <a:off x="1188720" y="2313432"/>
+            <a:ext cx="4572000" cy="868680"/>
+          </a:xfrm>
+          <a:prstGeom prst="rect">
+            <a:avLst/>
+          </a:prstGeom>
+          <a:noFill/>
+          <a:ln/>
+        </p:spPr>
+        <p:txBody>
+          <a:bodyPr wrap="square" lIns="0" tIns="0" rIns="0" bIns="0" rtlCol="0" anchor="ctr"/>
           <a:lstStyle/>
           <a:p>
             <a:pPr indent="0" marL="0">
               <a:lnSpc>
-                <a:spcPct val="105000"/>
+                <a:spcPct val="110000"/>
               </a:lnSpc>
               <a:buNone/>
             </a:pPr>
             <a:r>
-              <a:rPr lang="en-US" sz="1250" dirty="0">
+              <a:rPr lang="en-US" sz="1350" dirty="0">
                 <a:solidFill>
                   <a:srgbClr val="5F6F66"/>
                 </a:solidFill>
@@ -2197,26 +2311,26 @@
                 <a:ea typeface="Calibri" pitchFamily="34" charset="-122"/>
                 <a:cs typeface="Calibri" pitchFamily="34" charset="-120"/>
               </a:rPr>
-              <a:t>The most one US government grant gives for a first phase, over 6 to 18 months. Up to $1.25M more after that. This money does not cost you part of the company.</a:t>
-            </a:r>
-            <a:endParaRPr lang="en-US" sz="1250" dirty="0"/>
-          </a:p>
-        </p:txBody>
-      </p:sp>
-      <p:sp>
-        <p:nvSpPr>
-          <p:cNvPr id="8" name="Shape 6"/>
+              <a:t>Things meant to last centuries, where every storage format we have today dies first.</a:t>
+            </a:r>
+            <a:endParaRPr lang="en-US" sz="1350" dirty="0"/>
+          </a:p>
+        </p:txBody>
+      </p:sp>
+      <p:sp>
+        <p:nvSpPr>
+          <p:cNvPr id="9" name="Shape 7"/>
           <p:cNvSpPr/>
           <p:nvPr/>
         </p:nvSpPr>
         <p:spPr>
           <a:xfrm>
-            <a:off x="3429000" y="1645920"/>
-            <a:ext cx="2606040" cy="2240280"/>
+            <a:off x="6172200" y="1691640"/>
+            <a:ext cx="5349240" cy="1691640"/>
           </a:xfrm>
           <a:prstGeom prst="roundRect">
             <a:avLst>
-              <a:gd name="adj" fmla="val 4082"/>
+              <a:gd name="adj" fmla="val 5405"/>
             </a:avLst>
           </a:prstGeom>
           <a:solidFill>
@@ -2232,30 +2346,55 @@
       </p:sp>
       <p:sp>
         <p:nvSpPr>
-          <p:cNvPr id="9" name="Text 7"/>
-          <p:cNvSpPr txBox="1"/>
-          <p:nvPr/>
-        </p:nvSpPr>
-        <p:spPr>
-          <a:xfrm>
-            <a:off x="3648456" y="1847088"/>
-            <a:ext cx="2167128" cy="713232"/>
-          </a:xfrm>
-          <a:prstGeom prst="rect">
-            <a:avLst/>
-          </a:prstGeom>
-          <a:noFill/>
-          <a:ln/>
-        </p:spPr>
-        <p:txBody>
-          <a:bodyPr wrap="square" lIns="0" tIns="0" rIns="0" bIns="0" rtlCol="0" anchor="ctr"/>
-          <a:lstStyle/>
-          <a:p>
-            <a:pPr indent="0" marL="0">
-              <a:buNone/>
-            </a:pPr>
-            <a:r>
-              <a:rPr lang="en-US" sz="3400" b="1" dirty="0">
+          <p:cNvPr id="10" name="Shape 8"/>
+          <p:cNvSpPr/>
+          <p:nvPr/>
+        </p:nvSpPr>
+        <p:spPr>
+          <a:xfrm>
+            <a:off x="6446520" y="1984248"/>
+            <a:ext cx="146304" cy="146304"/>
+          </a:xfrm>
+          <a:prstGeom prst="ellipse">
+            <a:avLst/>
+          </a:prstGeom>
+          <a:solidFill>
+            <a:srgbClr val="1F8B5F"/>
+          </a:solidFill>
+          <a:ln w="12700">
+            <a:solidFill>
+              <a:srgbClr val="1F8B5F"/>
+            </a:solidFill>
+            <a:prstDash val="solid"/>
+          </a:ln>
+        </p:spPr>
+      </p:sp>
+      <p:sp>
+        <p:nvSpPr>
+          <p:cNvPr id="11" name="Text 9"/>
+          <p:cNvSpPr txBox="1"/>
+          <p:nvPr/>
+        </p:nvSpPr>
+        <p:spPr>
+          <a:xfrm>
+            <a:off x="6720840" y="1892808"/>
+            <a:ext cx="4572000" cy="347472"/>
+          </a:xfrm>
+          <a:prstGeom prst="rect">
+            <a:avLst/>
+          </a:prstGeom>
+          <a:noFill/>
+          <a:ln/>
+        </p:spPr>
+        <p:txBody>
+          <a:bodyPr wrap="square" lIns="0" tIns="0" rIns="0" bIns="0" rtlCol="0" anchor="ctr"/>
+          <a:lstStyle/>
+          <a:p>
+            <a:pPr indent="0" marL="0">
+              <a:buNone/>
+            </a:pPr>
+            <a:r>
+              <a:rPr lang="en-US" sz="1700" b="1" dirty="0">
                 <a:solidFill>
                   <a:srgbClr val="132018"/>
                 </a:solidFill>
@@ -2263,41 +2402,41 @@
                 <a:ea typeface="Cambria" pitchFamily="34" charset="-122"/>
                 <a:cs typeface="Cambria" pitchFamily="34" charset="-120"/>
               </a:rPr>
-              <a:t>$37,700</a:t>
-            </a:r>
-            <a:endParaRPr lang="en-US" sz="3400" dirty="0"/>
-          </a:p>
-        </p:txBody>
-      </p:sp>
-      <p:sp>
-        <p:nvSpPr>
-          <p:cNvPr id="10" name="Text 8"/>
-          <p:cNvSpPr txBox="1"/>
-          <p:nvPr/>
-        </p:nvSpPr>
-        <p:spPr>
-          <a:xfrm>
-            <a:off x="3648456" y="2560320"/>
-            <a:ext cx="2167128" cy="1143000"/>
-          </a:xfrm>
-          <a:prstGeom prst="rect">
-            <a:avLst/>
-          </a:prstGeom>
-          <a:noFill/>
-          <a:ln/>
-        </p:spPr>
-        <p:txBody>
-          <a:bodyPr wrap="square" lIns="0" tIns="0" rIns="0" bIns="0" rtlCol="0" anchor="t"/>
+              <a:t>Space</a:t>
+            </a:r>
+            <a:endParaRPr lang="en-US" sz="1700" dirty="0"/>
+          </a:p>
+        </p:txBody>
+      </p:sp>
+      <p:sp>
+        <p:nvSpPr>
+          <p:cNvPr id="12" name="Text 10"/>
+          <p:cNvSpPr txBox="1"/>
+          <p:nvPr/>
+        </p:nvSpPr>
+        <p:spPr>
+          <a:xfrm>
+            <a:off x="6720840" y="2313432"/>
+            <a:ext cx="4572000" cy="868680"/>
+          </a:xfrm>
+          <a:prstGeom prst="rect">
+            <a:avLst/>
+          </a:prstGeom>
+          <a:noFill/>
+          <a:ln/>
+        </p:spPr>
+        <p:txBody>
+          <a:bodyPr wrap="square" lIns="0" tIns="0" rIns="0" bIns="0" rtlCol="0" anchor="ctr"/>
           <a:lstStyle/>
           <a:p>
             <a:pPr indent="0" marL="0">
               <a:lnSpc>
-                <a:spcPct val="105000"/>
+                <a:spcPct val="110000"/>
               </a:lnSpc>
               <a:buNone/>
             </a:pPr>
             <a:r>
-              <a:rPr lang="en-US" sz="1250" dirty="0">
+              <a:rPr lang="en-US" sz="1350" dirty="0">
                 <a:solidFill>
                   <a:srgbClr val="5F6F66"/>
                 </a:solidFill>
@@ -2305,26 +2444,26 @@
                 <a:ea typeface="Calibri" pitchFamily="34" charset="-122"/>
                 <a:cs typeface="Calibri" pitchFamily="34" charset="-120"/>
               </a:rPr>
-              <a:t>Total raised so far by BioCompute, a company doing almost the same thing with bacteria. This is what this stage really looks like.</a:t>
-            </a:r>
-            <a:endParaRPr lang="en-US" sz="1250" dirty="0"/>
-          </a:p>
-        </p:txBody>
-      </p:sp>
-      <p:sp>
-        <p:nvSpPr>
-          <p:cNvPr id="11" name="Shape 9"/>
+              <a:t>Radiation destroys electronics. A colony that regrows from survivors behaves differently.</a:t>
+            </a:r>
+            <a:endParaRPr lang="en-US" sz="1350" dirty="0"/>
+          </a:p>
+        </p:txBody>
+      </p:sp>
+      <p:sp>
+        <p:nvSpPr>
+          <p:cNvPr id="13" name="Shape 11"/>
           <p:cNvSpPr/>
           <p:nvPr/>
         </p:nvSpPr>
         <p:spPr>
           <a:xfrm>
-            <a:off x="6217920" y="1645920"/>
-            <a:ext cx="2606040" cy="2240280"/>
+            <a:off x="640080" y="3657600"/>
+            <a:ext cx="5349240" cy="1691640"/>
           </a:xfrm>
           <a:prstGeom prst="roundRect">
             <a:avLst>
-              <a:gd name="adj" fmla="val 4082"/>
+              <a:gd name="adj" fmla="val 5405"/>
             </a:avLst>
           </a:prstGeom>
           <a:solidFill>
@@ -2340,30 +2479,55 @@
       </p:sp>
       <p:sp>
         <p:nvSpPr>
-          <p:cNvPr id="12" name="Text 10"/>
-          <p:cNvSpPr txBox="1"/>
-          <p:nvPr/>
-        </p:nvSpPr>
-        <p:spPr>
-          <a:xfrm>
-            <a:off x="6437376" y="1847088"/>
-            <a:ext cx="2167128" cy="713232"/>
-          </a:xfrm>
-          <a:prstGeom prst="rect">
-            <a:avLst/>
-          </a:prstGeom>
-          <a:noFill/>
-          <a:ln/>
-        </p:spPr>
-        <p:txBody>
-          <a:bodyPr wrap="square" lIns="0" tIns="0" rIns="0" bIns="0" rtlCol="0" anchor="ctr"/>
-          <a:lstStyle/>
-          <a:p>
-            <a:pPr indent="0" marL="0">
-              <a:buNone/>
-            </a:pPr>
-            <a:r>
-              <a:rPr lang="en-US" sz="2800" b="1" dirty="0">
+          <p:cNvPr id="14" name="Shape 12"/>
+          <p:cNvSpPr/>
+          <p:nvPr/>
+        </p:nvSpPr>
+        <p:spPr>
+          <a:xfrm>
+            <a:off x="914400" y="3950208"/>
+            <a:ext cx="146304" cy="146304"/>
+          </a:xfrm>
+          <a:prstGeom prst="ellipse">
+            <a:avLst/>
+          </a:prstGeom>
+          <a:solidFill>
+            <a:srgbClr val="1F8B5F"/>
+          </a:solidFill>
+          <a:ln w="12700">
+            <a:solidFill>
+              <a:srgbClr val="1F8B5F"/>
+            </a:solidFill>
+            <a:prstDash val="solid"/>
+          </a:ln>
+        </p:spPr>
+      </p:sp>
+      <p:sp>
+        <p:nvSpPr>
+          <p:cNvPr id="15" name="Text 13"/>
+          <p:cNvSpPr txBox="1"/>
+          <p:nvPr/>
+        </p:nvSpPr>
+        <p:spPr>
+          <a:xfrm>
+            <a:off x="1188720" y="3858768"/>
+            <a:ext cx="4572000" cy="347472"/>
+          </a:xfrm>
+          <a:prstGeom prst="rect">
+            <a:avLst/>
+          </a:prstGeom>
+          <a:noFill/>
+          <a:ln/>
+        </p:spPr>
+        <p:txBody>
+          <a:bodyPr wrap="square" lIns="0" tIns="0" rIns="0" bIns="0" rtlCol="0" anchor="ctr"/>
+          <a:lstStyle/>
+          <a:p>
+            <a:pPr indent="0" marL="0">
+              <a:buNone/>
+            </a:pPr>
+            <a:r>
+              <a:rPr lang="en-US" sz="1700" b="1" dirty="0">
                 <a:solidFill>
                   <a:srgbClr val="132018"/>
                 </a:solidFill>
@@ -2371,41 +2535,41 @@
                 <a:ea typeface="Cambria" pitchFamily="34" charset="-122"/>
                 <a:cs typeface="Cambria" pitchFamily="34" charset="-120"/>
               </a:rPr>
-              <a:t>$35 million</a:t>
-            </a:r>
-            <a:endParaRPr lang="en-US" sz="2800" dirty="0"/>
-          </a:p>
-        </p:txBody>
-      </p:sp>
-      <p:sp>
-        <p:nvSpPr>
-          <p:cNvPr id="13" name="Text 11"/>
-          <p:cNvSpPr txBox="1"/>
-          <p:nvPr/>
-        </p:nvSpPr>
-        <p:spPr>
-          <a:xfrm>
-            <a:off x="6437376" y="2560320"/>
-            <a:ext cx="2167128" cy="1143000"/>
-          </a:xfrm>
-          <a:prstGeom prst="rect">
-            <a:avLst/>
-          </a:prstGeom>
-          <a:noFill/>
-          <a:ln/>
-        </p:spPr>
-        <p:txBody>
-          <a:bodyPr wrap="square" lIns="0" tIns="0" rIns="0" bIns="0" rtlCol="0" anchor="t"/>
+              <a:t>Labelling living material</a:t>
+            </a:r>
+            <a:endParaRPr lang="en-US" sz="1700" dirty="0"/>
+          </a:p>
+        </p:txBody>
+      </p:sp>
+      <p:sp>
+        <p:nvSpPr>
+          <p:cNvPr id="16" name="Text 14"/>
+          <p:cNvSpPr txBox="1"/>
+          <p:nvPr/>
+        </p:nvSpPr>
+        <p:spPr>
+          <a:xfrm>
+            <a:off x="1188720" y="4279392"/>
+            <a:ext cx="4572000" cy="868680"/>
+          </a:xfrm>
+          <a:prstGeom prst="rect">
+            <a:avLst/>
+          </a:prstGeom>
+          <a:noFill/>
+          <a:ln/>
+        </p:spPr>
+        <p:txBody>
+          <a:bodyPr wrap="square" lIns="0" tIns="0" rIns="0" bIns="0" rtlCol="0" anchor="ctr"/>
           <a:lstStyle/>
           <a:p>
             <a:pPr indent="0" marL="0">
               <a:lnSpc>
-                <a:spcPct val="105000"/>
+                <a:spcPct val="110000"/>
               </a:lnSpc>
               <a:buNone/>
             </a:pPr>
             <a:r>
-              <a:rPr lang="en-US" sz="1250" dirty="0">
+              <a:rPr lang="en-US" sz="1350" dirty="0">
                 <a:solidFill>
                   <a:srgbClr val="5F6F66"/>
                 </a:solidFill>
@@ -2413,26 +2577,26 @@
                 <a:ea typeface="Calibri" pitchFamily="34" charset="-122"/>
                 <a:cs typeface="Calibri" pitchFamily="34" charset="-120"/>
               </a:rPr>
-              <a:t>Raised in one round by Catalog, a DNA storage company with real machines. Roughly the ceiling of this field, after years of work.</a:t>
-            </a:r>
-            <a:endParaRPr lang="en-US" sz="1250" dirty="0"/>
-          </a:p>
-        </p:txBody>
-      </p:sp>
-      <p:sp>
-        <p:nvSpPr>
-          <p:cNvPr id="14" name="Shape 12"/>
+              <a:t>Seeds, cultures and samples that carry their own identity and keep it as they grow.</a:t>
+            </a:r>
+            <a:endParaRPr lang="en-US" sz="1350" dirty="0"/>
+          </a:p>
+        </p:txBody>
+      </p:sp>
+      <p:sp>
+        <p:nvSpPr>
+          <p:cNvPr id="17" name="Shape 15"/>
           <p:cNvSpPr/>
           <p:nvPr/>
         </p:nvSpPr>
         <p:spPr>
           <a:xfrm>
-            <a:off x="9006840" y="1645920"/>
-            <a:ext cx="2606040" cy="2240280"/>
+            <a:off x="6172200" y="3657600"/>
+            <a:ext cx="5349240" cy="1691640"/>
           </a:xfrm>
           <a:prstGeom prst="roundRect">
             <a:avLst>
-              <a:gd name="adj" fmla="val 4082"/>
+              <a:gd name="adj" fmla="val 5405"/>
             </a:avLst>
           </a:prstGeom>
           <a:solidFill>
@@ -2448,72 +2612,97 @@
       </p:sp>
       <p:sp>
         <p:nvSpPr>
-          <p:cNvPr id="15" name="Text 13"/>
-          <p:cNvSpPr txBox="1"/>
-          <p:nvPr/>
-        </p:nvSpPr>
-        <p:spPr>
-          <a:xfrm>
-            <a:off x="9226296" y="1847088"/>
-            <a:ext cx="2167128" cy="713232"/>
-          </a:xfrm>
-          <a:prstGeom prst="rect">
-            <a:avLst/>
-          </a:prstGeom>
-          <a:noFill/>
-          <a:ln/>
-        </p:spPr>
-        <p:txBody>
-          <a:bodyPr wrap="square" lIns="0" tIns="0" rIns="0" bIns="0" rtlCol="0" anchor="ctr"/>
-          <a:lstStyle/>
-          <a:p>
-            <a:pPr indent="0" marL="0">
-              <a:buNone/>
-            </a:pPr>
-            <a:r>
-              <a:rPr lang="en-US" sz="3400" b="1" dirty="0">
-                <a:solidFill>
-                  <a:srgbClr val="C8453C"/>
+          <p:cNvPr id="18" name="Shape 16"/>
+          <p:cNvSpPr/>
+          <p:nvPr/>
+        </p:nvSpPr>
+        <p:spPr>
+          <a:xfrm>
+            <a:off x="6446520" y="3950208"/>
+            <a:ext cx="146304" cy="146304"/>
+          </a:xfrm>
+          <a:prstGeom prst="ellipse">
+            <a:avLst/>
+          </a:prstGeom>
+          <a:solidFill>
+            <a:srgbClr val="1F8B5F"/>
+          </a:solidFill>
+          <a:ln w="12700">
+            <a:solidFill>
+              <a:srgbClr val="1F8B5F"/>
+            </a:solidFill>
+            <a:prstDash val="solid"/>
+          </a:ln>
+        </p:spPr>
+      </p:sp>
+      <p:sp>
+        <p:nvSpPr>
+          <p:cNvPr id="19" name="Text 17"/>
+          <p:cNvSpPr txBox="1"/>
+          <p:nvPr/>
+        </p:nvSpPr>
+        <p:spPr>
+          <a:xfrm>
+            <a:off x="6720840" y="3858768"/>
+            <a:ext cx="4572000" cy="347472"/>
+          </a:xfrm>
+          <a:prstGeom prst="rect">
+            <a:avLst/>
+          </a:prstGeom>
+          <a:noFill/>
+          <a:ln/>
+        </p:spPr>
+        <p:txBody>
+          <a:bodyPr wrap="square" lIns="0" tIns="0" rIns="0" bIns="0" rtlCol="0" anchor="ctr"/>
+          <a:lstStyle/>
+          <a:p>
+            <a:pPr indent="0" marL="0">
+              <a:buNone/>
+            </a:pPr>
+            <a:r>
+              <a:rPr lang="en-US" sz="1700" b="1" dirty="0">
+                <a:solidFill>
+                  <a:srgbClr val="132018"/>
                 </a:solidFill>
                 <a:latin typeface="Cambria" pitchFamily="34" charset="0"/>
                 <a:ea typeface="Cambria" pitchFamily="34" charset="-122"/>
                 <a:cs typeface="Cambria" pitchFamily="34" charset="-120"/>
               </a:rPr>
-              <a:t>$0</a:t>
-            </a:r>
-            <a:endParaRPr lang="en-US" sz="3400" dirty="0"/>
-          </a:p>
-        </p:txBody>
-      </p:sp>
-      <p:sp>
-        <p:nvSpPr>
-          <p:cNvPr id="16" name="Text 14"/>
-          <p:cNvSpPr txBox="1"/>
-          <p:nvPr/>
-        </p:nvSpPr>
-        <p:spPr>
-          <a:xfrm>
-            <a:off x="9226296" y="2560320"/>
-            <a:ext cx="2167128" cy="1143000"/>
-          </a:xfrm>
-          <a:prstGeom prst="rect">
-            <a:avLst/>
-          </a:prstGeom>
-          <a:noFill/>
-          <a:ln/>
-        </p:spPr>
-        <p:txBody>
-          <a:bodyPr wrap="square" lIns="0" tIns="0" rIns="0" bIns="0" rtlCol="0" anchor="t"/>
+              <a:t>Anti-counterfeiting</a:t>
+            </a:r>
+            <a:endParaRPr lang="en-US" sz="1700" dirty="0"/>
+          </a:p>
+        </p:txBody>
+      </p:sp>
+      <p:sp>
+        <p:nvSpPr>
+          <p:cNvPr id="20" name="Text 18"/>
+          <p:cNvSpPr txBox="1"/>
+          <p:nvPr/>
+        </p:nvSpPr>
+        <p:spPr>
+          <a:xfrm>
+            <a:off x="6720840" y="4279392"/>
+            <a:ext cx="4572000" cy="868680"/>
+          </a:xfrm>
+          <a:prstGeom prst="rect">
+            <a:avLst/>
+          </a:prstGeom>
+          <a:noFill/>
+          <a:ln/>
+        </p:spPr>
+        <p:txBody>
+          <a:bodyPr wrap="square" lIns="0" tIns="0" rIns="0" bIns="0" rtlCol="0" anchor="ctr"/>
           <a:lstStyle/>
           <a:p>
             <a:pPr indent="0" marL="0">
               <a:lnSpc>
-                <a:spcPct val="105000"/>
+                <a:spcPct val="110000"/>
               </a:lnSpc>
               <a:buNone/>
             </a:pPr>
             <a:r>
-              <a:rPr lang="en-US" sz="1250" dirty="0">
+              <a:rPr lang="en-US" sz="1350" dirty="0">
                 <a:solidFill>
                   <a:srgbClr val="5F6F66"/>
                 </a:solidFill>
@@ -2521,117 +2710,9 @@
                 <a:ea typeface="Calibri" pitchFamily="34" charset="-122"/>
                 <a:cs typeface="Calibri" pitchFamily="34" charset="-120"/>
               </a:rPr>
-              <a:t>Sales in this field today, a decade after the first demonstrations. Anyone who quotes you revenue is selling you something.</a:t>
-            </a:r>
-            <a:endParaRPr lang="en-US" sz="1250" dirty="0"/>
-          </a:p>
-        </p:txBody>
-      </p:sp>
-      <p:sp>
-        <p:nvSpPr>
-          <p:cNvPr id="17" name="Shape 15"/>
-          <p:cNvSpPr/>
-          <p:nvPr/>
-        </p:nvSpPr>
-        <p:spPr>
-          <a:xfrm>
-            <a:off x="640080" y="4160520"/>
-            <a:ext cx="10881360" cy="1417320"/>
-          </a:xfrm>
-          <a:prstGeom prst="roundRect">
-            <a:avLst>
-              <a:gd name="adj" fmla="val 6452"/>
-            </a:avLst>
-          </a:prstGeom>
-          <a:solidFill>
-            <a:srgbClr val="132018"/>
-          </a:solidFill>
-          <a:ln w="12700">
-            <a:solidFill>
-              <a:srgbClr val="132018"/>
-            </a:solidFill>
-            <a:prstDash val="solid"/>
-          </a:ln>
-        </p:spPr>
-      </p:sp>
-      <p:sp>
-        <p:nvSpPr>
-          <p:cNvPr id="18" name="Text 16"/>
-          <p:cNvSpPr txBox="1"/>
-          <p:nvPr/>
-        </p:nvSpPr>
-        <p:spPr>
-          <a:xfrm>
-            <a:off x="960120" y="4343400"/>
-            <a:ext cx="10241280" cy="320040"/>
-          </a:xfrm>
-          <a:prstGeom prst="rect">
-            <a:avLst/>
-          </a:prstGeom>
-          <a:noFill/>
-          <a:ln/>
-        </p:spPr>
-        <p:txBody>
-          <a:bodyPr wrap="square" lIns="0" tIns="0" rIns="0" bIns="0" rtlCol="0" anchor="ctr"/>
-          <a:lstStyle/>
-          <a:p>
-            <a:pPr indent="0" marL="0">
-              <a:buNone/>
-            </a:pPr>
-            <a:r>
-              <a:rPr lang="en-US" sz="1100" b="1" spc="140" kern="0" dirty="0">
-                <a:solidFill>
-                  <a:srgbClr val="1F8B5F"/>
-                </a:solidFill>
-                <a:latin typeface="Calibri" pitchFamily="34" charset="0"/>
-                <a:ea typeface="Calibri" pitchFamily="34" charset="-122"/>
-                <a:cs typeface="Calibri" pitchFamily="34" charset="-120"/>
-              </a:rPr>
-              <a:t>The number to hold in your head</a:t>
-            </a:r>
-            <a:endParaRPr lang="en-US" sz="1100" dirty="0"/>
-          </a:p>
-        </p:txBody>
-      </p:sp>
-      <p:sp>
-        <p:nvSpPr>
-          <p:cNvPr id="19" name="Text 17"/>
-          <p:cNvSpPr txBox="1"/>
-          <p:nvPr/>
-        </p:nvSpPr>
-        <p:spPr>
-          <a:xfrm>
-            <a:off x="960120" y="4681728"/>
-            <a:ext cx="10241280" cy="777240"/>
-          </a:xfrm>
-          <a:prstGeom prst="rect">
-            <a:avLst/>
-          </a:prstGeom>
-          <a:noFill/>
-          <a:ln/>
-        </p:spPr>
-        <p:txBody>
-          <a:bodyPr wrap="square" lIns="0" tIns="0" rIns="0" bIns="0" rtlCol="0" anchor="ctr"/>
-          <a:lstStyle/>
-          <a:p>
-            <a:pPr indent="0" marL="0">
-              <a:lnSpc>
-                <a:spcPct val="112000"/>
-              </a:lnSpc>
-              <a:buNone/>
-            </a:pPr>
-            <a:r>
-              <a:rPr lang="en-US" sz="1400" dirty="0">
-                <a:solidFill>
-                  <a:srgbClr val="FFFFFF"/>
-                </a:solidFill>
-                <a:latin typeface="Calibri" pitchFamily="34" charset="0"/>
-                <a:ea typeface="Calibri" pitchFamily="34" charset="-122"/>
-                <a:cs typeface="Calibri" pitchFamily="34" charset="-120"/>
-              </a:rPr>
-              <a:t>Over the next two to three years, a good outcome is $300,000 to $2 million, almost all of it from grants, and nothing from sales. Millions in revenue is not on the table until the lab test comes back positive and somebody builds a real device.</a:t>
-            </a:r>
-            <a:endParaRPr lang="en-US" sz="1400" dirty="0"/>
+              <a:t>A mark that is very hard to copy, because copying it means copying life.</a:t>
+            </a:r>
+            <a:endParaRPr lang="en-US" sz="1350" dirty="0"/>
           </a:p>
         </p:txBody>
       </p:sp>
@@ -2646,6 +2727,681 @@
 <file path=ppt/slides/slide11.xml><?xml version="1.0" encoding="utf-8"?>
 <p:sld xmlns:a="http://schemas.openxmlformats.org/drawingml/2006/main" xmlns:r="http://schemas.openxmlformats.org/officeDocument/2006/relationships" xmlns:p="http://schemas.openxmlformats.org/presentationml/2006/main">
   <p:cSld name="Slide 11">
+    <p:bg>
+      <p:bgPr>
+        <a:solidFill>
+          <a:srgbClr val="FFFFFF"/>
+        </a:solidFill>
+      </p:bgPr>
+    </p:bg>
+    <p:spTree>
+      <p:nvGrpSpPr>
+        <p:cNvPr id="1" name=""/>
+        <p:cNvGrpSpPr/>
+        <p:nvPr/>
+      </p:nvGrpSpPr>
+      <p:grpSpPr>
+        <a:xfrm>
+          <a:off x="0" y="0"/>
+          <a:ext cx="0" cy="0"/>
+          <a:chOff x="0" y="0"/>
+          <a:chExt cx="0" cy="0"/>
+        </a:xfrm>
+      </p:grpSpPr>
+      <p:sp>
+        <p:nvSpPr>
+          <p:cNvPr id="2" name="Shape 0"/>
+          <p:cNvSpPr/>
+          <p:nvPr/>
+        </p:nvSpPr>
+        <p:spPr>
+          <a:xfrm>
+            <a:off x="640080" y="603504"/>
+            <a:ext cx="155448" cy="155448"/>
+          </a:xfrm>
+          <a:prstGeom prst="ellipse">
+            <a:avLst/>
+          </a:prstGeom>
+          <a:solidFill>
+            <a:srgbClr val="1F8B5F"/>
+          </a:solidFill>
+          <a:ln w="12700">
+            <a:solidFill>
+              <a:srgbClr val="1F8B5F"/>
+            </a:solidFill>
+            <a:prstDash val="solid"/>
+          </a:ln>
+        </p:spPr>
+      </p:sp>
+      <p:sp>
+        <p:nvSpPr>
+          <p:cNvPr id="3" name="Text 1"/>
+          <p:cNvSpPr txBox="1"/>
+          <p:nvPr/>
+        </p:nvSpPr>
+        <p:spPr>
+          <a:xfrm>
+            <a:off x="932688" y="502920"/>
+            <a:ext cx="10588752" cy="384048"/>
+          </a:xfrm>
+          <a:prstGeom prst="rect">
+            <a:avLst/>
+          </a:prstGeom>
+          <a:noFill/>
+          <a:ln/>
+        </p:spPr>
+        <p:txBody>
+          <a:bodyPr wrap="square" lIns="0" tIns="0" rIns="0" bIns="0" rtlCol="0" anchor="ctr"/>
+          <a:lstStyle/>
+          <a:p>
+            <a:pPr indent="0" marL="0">
+              <a:buNone/>
+            </a:pPr>
+            <a:r>
+              <a:rPr lang="en-US" sz="2300" b="1" dirty="0">
+                <a:solidFill>
+                  <a:srgbClr val="132018"/>
+                </a:solidFill>
+                <a:latin typeface="Cambria" pitchFamily="34" charset="0"/>
+                <a:ea typeface="Cambria" pitchFamily="34" charset="-122"/>
+                <a:cs typeface="Cambria" pitchFamily="34" charset="-120"/>
+              </a:rPr>
+              <a:t>How much this can actually make</a:t>
+            </a:r>
+            <a:endParaRPr lang="en-US" sz="2300" dirty="0"/>
+          </a:p>
+        </p:txBody>
+      </p:sp>
+      <p:sp>
+        <p:nvSpPr>
+          <p:cNvPr id="4" name="Text 2"/>
+          <p:cNvSpPr txBox="1"/>
+          <p:nvPr/>
+        </p:nvSpPr>
+        <p:spPr>
+          <a:xfrm>
+            <a:off x="640080" y="1097280"/>
+            <a:ext cx="10881360" cy="365760"/>
+          </a:xfrm>
+          <a:prstGeom prst="rect">
+            <a:avLst/>
+          </a:prstGeom>
+          <a:noFill/>
+          <a:ln/>
+        </p:spPr>
+        <p:txBody>
+          <a:bodyPr wrap="square" lIns="0" tIns="0" rIns="0" bIns="0" rtlCol="0" anchor="ctr"/>
+          <a:lstStyle/>
+          <a:p>
+            <a:pPr indent="0" marL="0">
+              <a:buNone/>
+            </a:pPr>
+            <a:r>
+              <a:rPr lang="en-US" sz="1400" i="1" dirty="0">
+                <a:solidFill>
+                  <a:srgbClr val="5F6F66"/>
+                </a:solidFill>
+                <a:latin typeface="Calibri" pitchFamily="34" charset="0"/>
+                <a:ea typeface="Calibri" pitchFamily="34" charset="-122"/>
+                <a:cs typeface="Calibri" pitchFamily="34" charset="-120"/>
+              </a:rPr>
+              <a:t>Four real figures. None of them invented, all of them checkable.</a:t>
+            </a:r>
+            <a:endParaRPr lang="en-US" sz="1400" dirty="0"/>
+          </a:p>
+        </p:txBody>
+      </p:sp>
+      <p:sp>
+        <p:nvSpPr>
+          <p:cNvPr id="5" name="Shape 3"/>
+          <p:cNvSpPr/>
+          <p:nvPr/>
+        </p:nvSpPr>
+        <p:spPr>
+          <a:xfrm>
+            <a:off x="640080" y="1645920"/>
+            <a:ext cx="2606040" cy="2240280"/>
+          </a:xfrm>
+          <a:prstGeom prst="roundRect">
+            <a:avLst>
+              <a:gd name="adj" fmla="val 4082"/>
+            </a:avLst>
+          </a:prstGeom>
+          <a:solidFill>
+            <a:srgbClr val="EDF2EE"/>
+          </a:solidFill>
+          <a:ln w="12700">
+            <a:solidFill>
+              <a:srgbClr val="EDF2EE"/>
+            </a:solidFill>
+            <a:prstDash val="solid"/>
+          </a:ln>
+        </p:spPr>
+      </p:sp>
+      <p:sp>
+        <p:nvSpPr>
+          <p:cNvPr id="6" name="Text 4"/>
+          <p:cNvSpPr txBox="1"/>
+          <p:nvPr/>
+        </p:nvSpPr>
+        <p:spPr>
+          <a:xfrm>
+            <a:off x="859536" y="1847088"/>
+            <a:ext cx="2167128" cy="713232"/>
+          </a:xfrm>
+          <a:prstGeom prst="rect">
+            <a:avLst/>
+          </a:prstGeom>
+          <a:noFill/>
+          <a:ln/>
+        </p:spPr>
+        <p:txBody>
+          <a:bodyPr wrap="square" lIns="0" tIns="0" rIns="0" bIns="0" rtlCol="0" anchor="ctr"/>
+          <a:lstStyle/>
+          <a:p>
+            <a:pPr indent="0" marL="0">
+              <a:buNone/>
+            </a:pPr>
+            <a:r>
+              <a:rPr lang="en-US" sz="3400" b="1" dirty="0">
+                <a:solidFill>
+                  <a:srgbClr val="1F8B5F"/>
+                </a:solidFill>
+                <a:latin typeface="Cambria" pitchFamily="34" charset="0"/>
+                <a:ea typeface="Cambria" pitchFamily="34" charset="-122"/>
+                <a:cs typeface="Cambria" pitchFamily="34" charset="-120"/>
+              </a:rPr>
+              <a:t>$305,000</a:t>
+            </a:r>
+            <a:endParaRPr lang="en-US" sz="3400" dirty="0"/>
+          </a:p>
+        </p:txBody>
+      </p:sp>
+      <p:sp>
+        <p:nvSpPr>
+          <p:cNvPr id="7" name="Text 5"/>
+          <p:cNvSpPr txBox="1"/>
+          <p:nvPr/>
+        </p:nvSpPr>
+        <p:spPr>
+          <a:xfrm>
+            <a:off x="859536" y="2560320"/>
+            <a:ext cx="2167128" cy="1143000"/>
+          </a:xfrm>
+          <a:prstGeom prst="rect">
+            <a:avLst/>
+          </a:prstGeom>
+          <a:noFill/>
+          <a:ln/>
+        </p:spPr>
+        <p:txBody>
+          <a:bodyPr wrap="square" lIns="0" tIns="0" rIns="0" bIns="0" rtlCol="0" anchor="t"/>
+          <a:lstStyle/>
+          <a:p>
+            <a:pPr indent="0" marL="0">
+              <a:lnSpc>
+                <a:spcPct val="105000"/>
+              </a:lnSpc>
+              <a:buNone/>
+            </a:pPr>
+            <a:r>
+              <a:rPr lang="en-US" sz="1250" dirty="0">
+                <a:solidFill>
+                  <a:srgbClr val="5F6F66"/>
+                </a:solidFill>
+                <a:latin typeface="Calibri" pitchFamily="34" charset="0"/>
+                <a:ea typeface="Calibri" pitchFamily="34" charset="-122"/>
+                <a:cs typeface="Calibri" pitchFamily="34" charset="-120"/>
+              </a:rPr>
+              <a:t>The most one US government grant gives for a first phase, over 6 to 18 months. Up to $1.25M more after that. This money does not cost you part of the company.</a:t>
+            </a:r>
+            <a:endParaRPr lang="en-US" sz="1250" dirty="0"/>
+          </a:p>
+        </p:txBody>
+      </p:sp>
+      <p:sp>
+        <p:nvSpPr>
+          <p:cNvPr id="8" name="Shape 6"/>
+          <p:cNvSpPr/>
+          <p:nvPr/>
+        </p:nvSpPr>
+        <p:spPr>
+          <a:xfrm>
+            <a:off x="3429000" y="1645920"/>
+            <a:ext cx="2606040" cy="2240280"/>
+          </a:xfrm>
+          <a:prstGeom prst="roundRect">
+            <a:avLst>
+              <a:gd name="adj" fmla="val 4082"/>
+            </a:avLst>
+          </a:prstGeom>
+          <a:solidFill>
+            <a:srgbClr val="EDF2EE"/>
+          </a:solidFill>
+          <a:ln w="12700">
+            <a:solidFill>
+              <a:srgbClr val="EDF2EE"/>
+            </a:solidFill>
+            <a:prstDash val="solid"/>
+          </a:ln>
+        </p:spPr>
+      </p:sp>
+      <p:sp>
+        <p:nvSpPr>
+          <p:cNvPr id="9" name="Text 7"/>
+          <p:cNvSpPr txBox="1"/>
+          <p:nvPr/>
+        </p:nvSpPr>
+        <p:spPr>
+          <a:xfrm>
+            <a:off x="3648456" y="1847088"/>
+            <a:ext cx="2167128" cy="713232"/>
+          </a:xfrm>
+          <a:prstGeom prst="rect">
+            <a:avLst/>
+          </a:prstGeom>
+          <a:noFill/>
+          <a:ln/>
+        </p:spPr>
+        <p:txBody>
+          <a:bodyPr wrap="square" lIns="0" tIns="0" rIns="0" bIns="0" rtlCol="0" anchor="ctr"/>
+          <a:lstStyle/>
+          <a:p>
+            <a:pPr indent="0" marL="0">
+              <a:buNone/>
+            </a:pPr>
+            <a:r>
+              <a:rPr lang="en-US" sz="3400" b="1" dirty="0">
+                <a:solidFill>
+                  <a:srgbClr val="132018"/>
+                </a:solidFill>
+                <a:latin typeface="Cambria" pitchFamily="34" charset="0"/>
+                <a:ea typeface="Cambria" pitchFamily="34" charset="-122"/>
+                <a:cs typeface="Cambria" pitchFamily="34" charset="-120"/>
+              </a:rPr>
+              <a:t>$37,700</a:t>
+            </a:r>
+            <a:endParaRPr lang="en-US" sz="3400" dirty="0"/>
+          </a:p>
+        </p:txBody>
+      </p:sp>
+      <p:sp>
+        <p:nvSpPr>
+          <p:cNvPr id="10" name="Text 8"/>
+          <p:cNvSpPr txBox="1"/>
+          <p:nvPr/>
+        </p:nvSpPr>
+        <p:spPr>
+          <a:xfrm>
+            <a:off x="3648456" y="2560320"/>
+            <a:ext cx="2167128" cy="1143000"/>
+          </a:xfrm>
+          <a:prstGeom prst="rect">
+            <a:avLst/>
+          </a:prstGeom>
+          <a:noFill/>
+          <a:ln/>
+        </p:spPr>
+        <p:txBody>
+          <a:bodyPr wrap="square" lIns="0" tIns="0" rIns="0" bIns="0" rtlCol="0" anchor="t"/>
+          <a:lstStyle/>
+          <a:p>
+            <a:pPr indent="0" marL="0">
+              <a:lnSpc>
+                <a:spcPct val="105000"/>
+              </a:lnSpc>
+              <a:buNone/>
+            </a:pPr>
+            <a:r>
+              <a:rPr lang="en-US" sz="1250" dirty="0">
+                <a:solidFill>
+                  <a:srgbClr val="5F6F66"/>
+                </a:solidFill>
+                <a:latin typeface="Calibri" pitchFamily="34" charset="0"/>
+                <a:ea typeface="Calibri" pitchFamily="34" charset="-122"/>
+                <a:cs typeface="Calibri" pitchFamily="34" charset="-120"/>
+              </a:rPr>
+              <a:t>Total raised so far by BioCompute, a company doing almost the same thing with bacteria. This is what this stage really looks like.</a:t>
+            </a:r>
+            <a:endParaRPr lang="en-US" sz="1250" dirty="0"/>
+          </a:p>
+        </p:txBody>
+      </p:sp>
+      <p:sp>
+        <p:nvSpPr>
+          <p:cNvPr id="11" name="Shape 9"/>
+          <p:cNvSpPr/>
+          <p:nvPr/>
+        </p:nvSpPr>
+        <p:spPr>
+          <a:xfrm>
+            <a:off x="6217920" y="1645920"/>
+            <a:ext cx="2606040" cy="2240280"/>
+          </a:xfrm>
+          <a:prstGeom prst="roundRect">
+            <a:avLst>
+              <a:gd name="adj" fmla="val 4082"/>
+            </a:avLst>
+          </a:prstGeom>
+          <a:solidFill>
+            <a:srgbClr val="EDF2EE"/>
+          </a:solidFill>
+          <a:ln w="12700">
+            <a:solidFill>
+              <a:srgbClr val="EDF2EE"/>
+            </a:solidFill>
+            <a:prstDash val="solid"/>
+          </a:ln>
+        </p:spPr>
+      </p:sp>
+      <p:sp>
+        <p:nvSpPr>
+          <p:cNvPr id="12" name="Text 10"/>
+          <p:cNvSpPr txBox="1"/>
+          <p:nvPr/>
+        </p:nvSpPr>
+        <p:spPr>
+          <a:xfrm>
+            <a:off x="6437376" y="1847088"/>
+            <a:ext cx="2167128" cy="713232"/>
+          </a:xfrm>
+          <a:prstGeom prst="rect">
+            <a:avLst/>
+          </a:prstGeom>
+          <a:noFill/>
+          <a:ln/>
+        </p:spPr>
+        <p:txBody>
+          <a:bodyPr wrap="square" lIns="0" tIns="0" rIns="0" bIns="0" rtlCol="0" anchor="ctr"/>
+          <a:lstStyle/>
+          <a:p>
+            <a:pPr indent="0" marL="0">
+              <a:buNone/>
+            </a:pPr>
+            <a:r>
+              <a:rPr lang="en-US" sz="2800" b="1" dirty="0">
+                <a:solidFill>
+                  <a:srgbClr val="132018"/>
+                </a:solidFill>
+                <a:latin typeface="Cambria" pitchFamily="34" charset="0"/>
+                <a:ea typeface="Cambria" pitchFamily="34" charset="-122"/>
+                <a:cs typeface="Cambria" pitchFamily="34" charset="-120"/>
+              </a:rPr>
+              <a:t>$35 million</a:t>
+            </a:r>
+            <a:endParaRPr lang="en-US" sz="2800" dirty="0"/>
+          </a:p>
+        </p:txBody>
+      </p:sp>
+      <p:sp>
+        <p:nvSpPr>
+          <p:cNvPr id="13" name="Text 11"/>
+          <p:cNvSpPr txBox="1"/>
+          <p:nvPr/>
+        </p:nvSpPr>
+        <p:spPr>
+          <a:xfrm>
+            <a:off x="6437376" y="2560320"/>
+            <a:ext cx="2167128" cy="1143000"/>
+          </a:xfrm>
+          <a:prstGeom prst="rect">
+            <a:avLst/>
+          </a:prstGeom>
+          <a:noFill/>
+          <a:ln/>
+        </p:spPr>
+        <p:txBody>
+          <a:bodyPr wrap="square" lIns="0" tIns="0" rIns="0" bIns="0" rtlCol="0" anchor="t"/>
+          <a:lstStyle/>
+          <a:p>
+            <a:pPr indent="0" marL="0">
+              <a:lnSpc>
+                <a:spcPct val="105000"/>
+              </a:lnSpc>
+              <a:buNone/>
+            </a:pPr>
+            <a:r>
+              <a:rPr lang="en-US" sz="1250" dirty="0">
+                <a:solidFill>
+                  <a:srgbClr val="5F6F66"/>
+                </a:solidFill>
+                <a:latin typeface="Calibri" pitchFamily="34" charset="0"/>
+                <a:ea typeface="Calibri" pitchFamily="34" charset="-122"/>
+                <a:cs typeface="Calibri" pitchFamily="34" charset="-120"/>
+              </a:rPr>
+              <a:t>Raised in one round by Catalog, a DNA storage company with real machines. Roughly the ceiling of this field, after years of work.</a:t>
+            </a:r>
+            <a:endParaRPr lang="en-US" sz="1250" dirty="0"/>
+          </a:p>
+        </p:txBody>
+      </p:sp>
+      <p:sp>
+        <p:nvSpPr>
+          <p:cNvPr id="14" name="Shape 12"/>
+          <p:cNvSpPr/>
+          <p:nvPr/>
+        </p:nvSpPr>
+        <p:spPr>
+          <a:xfrm>
+            <a:off x="9006840" y="1645920"/>
+            <a:ext cx="2606040" cy="2240280"/>
+          </a:xfrm>
+          <a:prstGeom prst="roundRect">
+            <a:avLst>
+              <a:gd name="adj" fmla="val 4082"/>
+            </a:avLst>
+          </a:prstGeom>
+          <a:solidFill>
+            <a:srgbClr val="EDF2EE"/>
+          </a:solidFill>
+          <a:ln w="12700">
+            <a:solidFill>
+              <a:srgbClr val="EDF2EE"/>
+            </a:solidFill>
+            <a:prstDash val="solid"/>
+          </a:ln>
+        </p:spPr>
+      </p:sp>
+      <p:sp>
+        <p:nvSpPr>
+          <p:cNvPr id="15" name="Text 13"/>
+          <p:cNvSpPr txBox="1"/>
+          <p:nvPr/>
+        </p:nvSpPr>
+        <p:spPr>
+          <a:xfrm>
+            <a:off x="9226296" y="1847088"/>
+            <a:ext cx="2167128" cy="713232"/>
+          </a:xfrm>
+          <a:prstGeom prst="rect">
+            <a:avLst/>
+          </a:prstGeom>
+          <a:noFill/>
+          <a:ln/>
+        </p:spPr>
+        <p:txBody>
+          <a:bodyPr wrap="square" lIns="0" tIns="0" rIns="0" bIns="0" rtlCol="0" anchor="ctr"/>
+          <a:lstStyle/>
+          <a:p>
+            <a:pPr indent="0" marL="0">
+              <a:buNone/>
+            </a:pPr>
+            <a:r>
+              <a:rPr lang="en-US" sz="3400" b="1" dirty="0">
+                <a:solidFill>
+                  <a:srgbClr val="C8453C"/>
+                </a:solidFill>
+                <a:latin typeface="Cambria" pitchFamily="34" charset="0"/>
+                <a:ea typeface="Cambria" pitchFamily="34" charset="-122"/>
+                <a:cs typeface="Cambria" pitchFamily="34" charset="-120"/>
+              </a:rPr>
+              <a:t>$0</a:t>
+            </a:r>
+            <a:endParaRPr lang="en-US" sz="3400" dirty="0"/>
+          </a:p>
+        </p:txBody>
+      </p:sp>
+      <p:sp>
+        <p:nvSpPr>
+          <p:cNvPr id="16" name="Text 14"/>
+          <p:cNvSpPr txBox="1"/>
+          <p:nvPr/>
+        </p:nvSpPr>
+        <p:spPr>
+          <a:xfrm>
+            <a:off x="9226296" y="2560320"/>
+            <a:ext cx="2167128" cy="1143000"/>
+          </a:xfrm>
+          <a:prstGeom prst="rect">
+            <a:avLst/>
+          </a:prstGeom>
+          <a:noFill/>
+          <a:ln/>
+        </p:spPr>
+        <p:txBody>
+          <a:bodyPr wrap="square" lIns="0" tIns="0" rIns="0" bIns="0" rtlCol="0" anchor="t"/>
+          <a:lstStyle/>
+          <a:p>
+            <a:pPr indent="0" marL="0">
+              <a:lnSpc>
+                <a:spcPct val="105000"/>
+              </a:lnSpc>
+              <a:buNone/>
+            </a:pPr>
+            <a:r>
+              <a:rPr lang="en-US" sz="1250" dirty="0">
+                <a:solidFill>
+                  <a:srgbClr val="5F6F66"/>
+                </a:solidFill>
+                <a:latin typeface="Calibri" pitchFamily="34" charset="0"/>
+                <a:ea typeface="Calibri" pitchFamily="34" charset="-122"/>
+                <a:cs typeface="Calibri" pitchFamily="34" charset="-120"/>
+              </a:rPr>
+              <a:t>Sales in this field today, a decade after the first demonstrations. Anyone who quotes you revenue is selling you something.</a:t>
+            </a:r>
+            <a:endParaRPr lang="en-US" sz="1250" dirty="0"/>
+          </a:p>
+        </p:txBody>
+      </p:sp>
+      <p:sp>
+        <p:nvSpPr>
+          <p:cNvPr id="17" name="Shape 15"/>
+          <p:cNvSpPr/>
+          <p:nvPr/>
+        </p:nvSpPr>
+        <p:spPr>
+          <a:xfrm>
+            <a:off x="640080" y="4160520"/>
+            <a:ext cx="10881360" cy="1417320"/>
+          </a:xfrm>
+          <a:prstGeom prst="roundRect">
+            <a:avLst>
+              <a:gd name="adj" fmla="val 6452"/>
+            </a:avLst>
+          </a:prstGeom>
+          <a:solidFill>
+            <a:srgbClr val="132018"/>
+          </a:solidFill>
+          <a:ln w="12700">
+            <a:solidFill>
+              <a:srgbClr val="132018"/>
+            </a:solidFill>
+            <a:prstDash val="solid"/>
+          </a:ln>
+        </p:spPr>
+      </p:sp>
+      <p:sp>
+        <p:nvSpPr>
+          <p:cNvPr id="18" name="Text 16"/>
+          <p:cNvSpPr txBox="1"/>
+          <p:nvPr/>
+        </p:nvSpPr>
+        <p:spPr>
+          <a:xfrm>
+            <a:off x="960120" y="4343400"/>
+            <a:ext cx="10241280" cy="320040"/>
+          </a:xfrm>
+          <a:prstGeom prst="rect">
+            <a:avLst/>
+          </a:prstGeom>
+          <a:noFill/>
+          <a:ln/>
+        </p:spPr>
+        <p:txBody>
+          <a:bodyPr wrap="square" lIns="0" tIns="0" rIns="0" bIns="0" rtlCol="0" anchor="ctr"/>
+          <a:lstStyle/>
+          <a:p>
+            <a:pPr indent="0" marL="0">
+              <a:buNone/>
+            </a:pPr>
+            <a:r>
+              <a:rPr lang="en-US" sz="1100" b="1" spc="140" kern="0" dirty="0">
+                <a:solidFill>
+                  <a:srgbClr val="1F8B5F"/>
+                </a:solidFill>
+                <a:latin typeface="Calibri" pitchFamily="34" charset="0"/>
+                <a:ea typeface="Calibri" pitchFamily="34" charset="-122"/>
+                <a:cs typeface="Calibri" pitchFamily="34" charset="-120"/>
+              </a:rPr>
+              <a:t>The number to hold in your head</a:t>
+            </a:r>
+            <a:endParaRPr lang="en-US" sz="1100" dirty="0"/>
+          </a:p>
+        </p:txBody>
+      </p:sp>
+      <p:sp>
+        <p:nvSpPr>
+          <p:cNvPr id="19" name="Text 17"/>
+          <p:cNvSpPr txBox="1"/>
+          <p:nvPr/>
+        </p:nvSpPr>
+        <p:spPr>
+          <a:xfrm>
+            <a:off x="960120" y="4681728"/>
+            <a:ext cx="10241280" cy="777240"/>
+          </a:xfrm>
+          <a:prstGeom prst="rect">
+            <a:avLst/>
+          </a:prstGeom>
+          <a:noFill/>
+          <a:ln/>
+        </p:spPr>
+        <p:txBody>
+          <a:bodyPr wrap="square" lIns="0" tIns="0" rIns="0" bIns="0" rtlCol="0" anchor="ctr"/>
+          <a:lstStyle/>
+          <a:p>
+            <a:pPr indent="0" marL="0">
+              <a:lnSpc>
+                <a:spcPct val="112000"/>
+              </a:lnSpc>
+              <a:buNone/>
+            </a:pPr>
+            <a:r>
+              <a:rPr lang="en-US" sz="1400" dirty="0">
+                <a:solidFill>
+                  <a:srgbClr val="FFFFFF"/>
+                </a:solidFill>
+                <a:latin typeface="Calibri" pitchFamily="34" charset="0"/>
+                <a:ea typeface="Calibri" pitchFamily="34" charset="-122"/>
+                <a:cs typeface="Calibri" pitchFamily="34" charset="-120"/>
+              </a:rPr>
+              <a:t>Over the next two to three years, a good outcome is $300,000 to $2 million, almost all of it from grants, and nothing from sales. Millions in revenue is not on the table until the lab test comes back positive and somebody builds a real device.</a:t>
+            </a:r>
+            <a:endParaRPr lang="en-US" sz="1400" dirty="0"/>
+          </a:p>
+        </p:txBody>
+      </p:sp>
+    </p:spTree>
+  </p:cSld>
+  <p:clrMapOvr>
+    <a:masterClrMapping/>
+  </p:clrMapOvr>
+</p:sld>
+</file>
+
+<file path=ppt/slides/slide12.xml><?xml version="1.0" encoding="utf-8"?>
+<p:sld xmlns:a="http://schemas.openxmlformats.org/drawingml/2006/main" xmlns:r="http://schemas.openxmlformats.org/officeDocument/2006/relationships" xmlns:p="http://schemas.openxmlformats.org/presentationml/2006/main">
+  <p:cSld name="Slide 12">
     <p:bg>
       <p:bgPr>
         <a:solidFill>
@@ -3223,7 +3979,7 @@
                 <a:ea typeface="Cambria" pitchFamily="34" charset="-122"/>
                 <a:cs typeface="Cambria" pitchFamily="34" charset="-120"/>
               </a:rPr>
-              <a:t>What it is, and what it runs on</a:t>
+              <a:t>Acheron is one idea, in four steps</a:t>
             </a:r>
             <a:endParaRPr lang="en-US" sz="2300" dirty="0"/>
           </a:p>
@@ -3237,8 +3993,8 @@
         </p:nvSpPr>
         <p:spPr>
           <a:xfrm>
-            <a:off x="640080" y="1271016"/>
-            <a:ext cx="402336" cy="402336"/>
+            <a:off x="640080" y="1243584"/>
+            <a:ext cx="475488" cy="475488"/>
           </a:xfrm>
           <a:prstGeom prst="ellipse">
             <a:avLst/>
@@ -3262,8 +4018,8 @@
         </p:nvSpPr>
         <p:spPr>
           <a:xfrm>
-            <a:off x="640080" y="1271016"/>
-            <a:ext cx="402336" cy="402336"/>
+            <a:off x="640080" y="1243584"/>
+            <a:ext cx="475488" cy="475488"/>
           </a:xfrm>
           <a:prstGeom prst="rect">
             <a:avLst/>
@@ -3279,7 +4035,7 @@
               <a:buNone/>
             </a:pPr>
             <a:r>
-              <a:rPr lang="en-US" sz="1700" b="1" dirty="0">
+              <a:rPr lang="en-US" sz="2000" b="1" dirty="0">
                 <a:solidFill>
                   <a:srgbClr val="FFFFFF"/>
                 </a:solidFill>
@@ -3289,7 +4045,7 @@
               </a:rPr>
               <a:t>1</a:t>
             </a:r>
-            <a:endParaRPr lang="en-US" sz="1700" dirty="0"/>
+            <a:endParaRPr lang="en-US" sz="2000" dirty="0"/>
           </a:p>
         </p:txBody>
       </p:sp>
@@ -3301,8 +4057,8 @@
         </p:nvSpPr>
         <p:spPr>
           <a:xfrm>
-            <a:off x="1261872" y="1234440"/>
-            <a:ext cx="10259568" cy="219456"/>
+            <a:off x="1371600" y="1207008"/>
+            <a:ext cx="1463040" cy="274320"/>
           </a:xfrm>
           <a:prstGeom prst="rect">
             <a:avLst/>
@@ -3326,7 +4082,7 @@
                 <a:ea typeface="Calibri" pitchFamily="34" charset="-122"/>
                 <a:cs typeface="Calibri" pitchFamily="34" charset="-120"/>
               </a:rPr>
-              <a:t>WHAT IT IS</a:t>
+              <a:t>WRITE</a:t>
             </a:r>
             <a:endParaRPr lang="en-US" sz="1050" dirty="0"/>
           </a:p>
@@ -3340,50 +4096,89 @@
         </p:nvSpPr>
         <p:spPr>
           <a:xfrm>
-            <a:off x="1261872" y="1472184"/>
-            <a:ext cx="10259568" cy="1133856"/>
-          </a:xfrm>
-          <a:prstGeom prst="rect">
-            <a:avLst/>
-          </a:prstGeom>
-          <a:noFill/>
-          <a:ln/>
-        </p:spPr>
-        <p:txBody>
-          <a:bodyPr wrap="square" lIns="0" tIns="0" rIns="0" bIns="0" rtlCol="0" anchor="t"/>
+            <a:off x="1371600" y="1463040"/>
+            <a:ext cx="5577840" cy="384048"/>
+          </a:xfrm>
+          <a:prstGeom prst="rect">
+            <a:avLst/>
+          </a:prstGeom>
+          <a:noFill/>
+          <a:ln/>
+        </p:spPr>
+        <p:txBody>
+          <a:bodyPr wrap="square" lIns="0" tIns="0" rIns="0" bIns="0" rtlCol="0" anchor="ctr"/>
+          <a:lstStyle/>
+          <a:p>
+            <a:pPr indent="0" marL="0">
+              <a:buNone/>
+            </a:pPr>
+            <a:r>
+              <a:rPr lang="en-US" sz="1900" b="1" dirty="0">
+                <a:solidFill>
+                  <a:srgbClr val="132018"/>
+                </a:solidFill>
+                <a:latin typeface="Cambria" pitchFamily="34" charset="0"/>
+                <a:ea typeface="Cambria" pitchFamily="34" charset="-122"/>
+                <a:cs typeface="Cambria" pitchFamily="34" charset="-120"/>
+              </a:rPr>
+              <a:t>You write data into a living thing.</a:t>
+            </a:r>
+            <a:endParaRPr lang="en-US" sz="1900" dirty="0"/>
+          </a:p>
+        </p:txBody>
+      </p:sp>
+      <p:sp>
+        <p:nvSpPr>
+          <p:cNvPr id="8" name="Text 6"/>
+          <p:cNvSpPr txBox="1"/>
+          <p:nvPr/>
+        </p:nvSpPr>
+        <p:spPr>
+          <a:xfrm>
+            <a:off x="7132320" y="1261872"/>
+            <a:ext cx="4389120" cy="685800"/>
+          </a:xfrm>
+          <a:prstGeom prst="rect">
+            <a:avLst/>
+          </a:prstGeom>
+          <a:noFill/>
+          <a:ln/>
+        </p:spPr>
+        <p:txBody>
+          <a:bodyPr wrap="square" lIns="0" tIns="0" rIns="0" bIns="0" rtlCol="0" anchor="ctr"/>
           <a:lstStyle/>
           <a:p>
             <a:pPr indent="0" marL="0">
               <a:lnSpc>
-                <a:spcPct val="108000"/>
+                <a:spcPct val="110000"/>
               </a:lnSpc>
               <a:buNone/>
             </a:pPr>
             <a:r>
-              <a:rPr lang="en-US" sz="1600" dirty="0">
-                <a:solidFill>
-                  <a:srgbClr val="132018"/>
+              <a:rPr lang="en-US" sz="1300" dirty="0">
+                <a:solidFill>
+                  <a:srgbClr val="5F6F66"/>
                 </a:solidFill>
                 <a:latin typeface="Calibri" pitchFamily="34" charset="0"/>
                 <a:ea typeface="Calibri" pitchFamily="34" charset="-122"/>
                 <a:cs typeface="Calibri" pitchFamily="34" charset="-120"/>
               </a:rPr>
-              <a:t>Dayana is trying to store computer files inside living cells, so the file repairs itself instead of slowly rotting like paper or a hard drive.</a:t>
-            </a:r>
-            <a:endParaRPr lang="en-US" sz="1600" dirty="0"/>
-          </a:p>
-        </p:txBody>
-      </p:sp>
-      <p:sp>
-        <p:nvSpPr>
-          <p:cNvPr id="8" name="Shape 6"/>
+              <a:t>A tiny switch inside each cell. Flipped one way it is a 0, the other way a 1.</a:t>
+            </a:r>
+            <a:endParaRPr lang="en-US" sz="1300" dirty="0"/>
+          </a:p>
+        </p:txBody>
+      </p:sp>
+      <p:sp>
+        <p:nvSpPr>
+          <p:cNvPr id="9" name="Shape 7"/>
           <p:cNvSpPr/>
           <p:nvPr/>
         </p:nvSpPr>
         <p:spPr>
           <a:xfrm>
-            <a:off x="640080" y="2825496"/>
-            <a:ext cx="402336" cy="402336"/>
+            <a:off x="640080" y="2267712"/>
+            <a:ext cx="475488" cy="475488"/>
           </a:xfrm>
           <a:prstGeom prst="ellipse">
             <a:avLst/>
@@ -3401,14 +4196,14 @@
       </p:sp>
       <p:sp>
         <p:nvSpPr>
-          <p:cNvPr id="9" name="Text 7"/>
-          <p:cNvSpPr txBox="1"/>
-          <p:nvPr/>
-        </p:nvSpPr>
-        <p:spPr>
-          <a:xfrm>
-            <a:off x="640080" y="2825496"/>
-            <a:ext cx="402336" cy="402336"/>
+          <p:cNvPr id="10" name="Text 8"/>
+          <p:cNvSpPr txBox="1"/>
+          <p:nvPr/>
+        </p:nvSpPr>
+        <p:spPr>
+          <a:xfrm>
+            <a:off x="640080" y="2267712"/>
+            <a:ext cx="475488" cy="475488"/>
           </a:xfrm>
           <a:prstGeom prst="rect">
             <a:avLst/>
@@ -3424,7 +4219,7 @@
               <a:buNone/>
             </a:pPr>
             <a:r>
-              <a:rPr lang="en-US" sz="1700" b="1" dirty="0">
+              <a:rPr lang="en-US" sz="2000" b="1" dirty="0">
                 <a:solidFill>
                   <a:srgbClr val="FFFFFF"/>
                 </a:solidFill>
@@ -3434,20 +4229,20 @@
               </a:rPr>
               <a:t>2</a:t>
             </a:r>
-            <a:endParaRPr lang="en-US" sz="1700" dirty="0"/>
-          </a:p>
-        </p:txBody>
-      </p:sp>
-      <p:sp>
-        <p:nvSpPr>
-          <p:cNvPr id="10" name="Text 8"/>
-          <p:cNvSpPr txBox="1"/>
-          <p:nvPr/>
-        </p:nvSpPr>
-        <p:spPr>
-          <a:xfrm>
-            <a:off x="1261872" y="2788920"/>
-            <a:ext cx="10259568" cy="219456"/>
+            <a:endParaRPr lang="en-US" sz="2000" dirty="0"/>
+          </a:p>
+        </p:txBody>
+      </p:sp>
+      <p:sp>
+        <p:nvSpPr>
+          <p:cNvPr id="11" name="Text 9"/>
+          <p:cNvSpPr txBox="1"/>
+          <p:nvPr/>
+        </p:nvSpPr>
+        <p:spPr>
+          <a:xfrm>
+            <a:off x="1371600" y="2231136"/>
+            <a:ext cx="1463040" cy="274320"/>
           </a:xfrm>
           <a:prstGeom prst="rect">
             <a:avLst/>
@@ -3471,7 +4266,7 @@
                 <a:ea typeface="Calibri" pitchFamily="34" charset="-122"/>
                 <a:cs typeface="Calibri" pitchFamily="34" charset="-120"/>
               </a:rPr>
-              <a:t>THE ORGANISM NOW</a:t>
+              <a:t>DAMAGE</a:t>
             </a:r>
             <a:endParaRPr lang="en-US" sz="1050" dirty="0"/>
           </a:p>
@@ -3479,56 +4274,95 @@
       </p:sp>
       <p:sp>
         <p:nvSpPr>
-          <p:cNvPr id="11" name="Text 9"/>
-          <p:cNvSpPr txBox="1"/>
-          <p:nvPr/>
-        </p:nvSpPr>
-        <p:spPr>
-          <a:xfrm>
-            <a:off x="1261872" y="3026664"/>
-            <a:ext cx="10259568" cy="1133856"/>
-          </a:xfrm>
-          <a:prstGeom prst="rect">
-            <a:avLst/>
-          </a:prstGeom>
-          <a:noFill/>
-          <a:ln/>
-        </p:spPr>
-        <p:txBody>
-          <a:bodyPr wrap="square" lIns="0" tIns="0" rIns="0" bIns="0" rtlCol="0" anchor="t"/>
+          <p:cNvPr id="12" name="Text 10"/>
+          <p:cNvSpPr txBox="1"/>
+          <p:nvPr/>
+        </p:nvSpPr>
+        <p:spPr>
+          <a:xfrm>
+            <a:off x="1371600" y="2487168"/>
+            <a:ext cx="5577840" cy="384048"/>
+          </a:xfrm>
+          <a:prstGeom prst="rect">
+            <a:avLst/>
+          </a:prstGeom>
+          <a:noFill/>
+          <a:ln/>
+        </p:spPr>
+        <p:txBody>
+          <a:bodyPr wrap="square" lIns="0" tIns="0" rIns="0" bIns="0" rtlCol="0" anchor="ctr"/>
+          <a:lstStyle/>
+          <a:p>
+            <a:pPr indent="0" marL="0">
+              <a:buNone/>
+            </a:pPr>
+            <a:r>
+              <a:rPr lang="en-US" sz="1900" b="1" dirty="0">
+                <a:solidFill>
+                  <a:srgbClr val="132018"/>
+                </a:solidFill>
+                <a:latin typeface="Cambria" pitchFamily="34" charset="0"/>
+                <a:ea typeface="Cambria" pitchFamily="34" charset="-122"/>
+                <a:cs typeface="Cambria" pitchFamily="34" charset="-120"/>
+              </a:rPr>
+              <a:t>Something damages it.</a:t>
+            </a:r>
+            <a:endParaRPr lang="en-US" sz="1900" dirty="0"/>
+          </a:p>
+        </p:txBody>
+      </p:sp>
+      <p:sp>
+        <p:nvSpPr>
+          <p:cNvPr id="13" name="Text 11"/>
+          <p:cNvSpPr txBox="1"/>
+          <p:nvPr/>
+        </p:nvSpPr>
+        <p:spPr>
+          <a:xfrm>
+            <a:off x="7132320" y="2286000"/>
+            <a:ext cx="4389120" cy="685800"/>
+          </a:xfrm>
+          <a:prstGeom prst="rect">
+            <a:avLst/>
+          </a:prstGeom>
+          <a:noFill/>
+          <a:ln/>
+        </p:spPr>
+        <p:txBody>
+          <a:bodyPr wrap="square" lIns="0" tIns="0" rIns="0" bIns="0" rtlCol="0" anchor="ctr"/>
           <a:lstStyle/>
           <a:p>
             <a:pPr indent="0" marL="0">
               <a:lnSpc>
-                <a:spcPct val="108000"/>
+                <a:spcPct val="110000"/>
               </a:lnSpc>
               <a:buNone/>
             </a:pPr>
             <a:r>
-              <a:rPr lang="en-US" sz="1600" dirty="0">
-                <a:solidFill>
-                  <a:srgbClr val="132018"/>
+              <a:rPr lang="en-US" sz="1300" dirty="0">
+                <a:solidFill>
+                  <a:srgbClr val="5F6F66"/>
                 </a:solidFill>
                 <a:latin typeface="Calibri" pitchFamily="34" charset="0"/>
                 <a:ea typeface="Calibri" pitchFamily="34" charset="-122"/>
                 <a:cs typeface="Calibri" pitchFamily="34" charset="-120"/>
               </a:rPr>
-              <a:t>She uses a harmless soil germ called Bacillus subtilis, because it is the easiest living thing to rewire and it copies itself every half hour.</a:t>
-            </a:r>
-            <a:endParaRPr lang="en-US" sz="1600" dirty="0"/>
-          </a:p>
-        </p:txBody>
-      </p:sp>
-      <p:sp>
-        <p:nvSpPr>
-          <p:cNvPr id="12" name="Shape 10"/>
+              <a:t>Cut it, dry it out, blast it with radiation. Most of it dies.</a:t>
+            </a:r>
+            <a:endParaRPr lang="en-US" sz="1300" dirty="0"/>
+          </a:p>
+        </p:txBody>
+      </p:sp>
+      <p:sp>
+        <p:nvSpPr>
+          <p:cNvPr id="14" name="Shape 12"/>
           <p:cNvSpPr/>
           <p:nvPr/>
         </p:nvSpPr>
         <p:spPr>
           <a:xfrm>
-            <a:off x="640080" y="4379976"/>
-            <a:ext cx="402336" cy="402336"/>
+            <a:off x="640080" y="3291840"/>
+            <a:ext cx="475488" cy="475488"/>
           </a:xfrm>
           <a:prstGeom prst="ellipse">
             <a:avLst/>
@@ -3546,14 +4380,14 @@
       </p:sp>
       <p:sp>
         <p:nvSpPr>
-          <p:cNvPr id="13" name="Text 11"/>
-          <p:cNvSpPr txBox="1"/>
-          <p:nvPr/>
-        </p:nvSpPr>
-        <p:spPr>
-          <a:xfrm>
-            <a:off x="640080" y="4379976"/>
-            <a:ext cx="402336" cy="402336"/>
+          <p:cNvPr id="15" name="Text 13"/>
+          <p:cNvSpPr txBox="1"/>
+          <p:nvPr/>
+        </p:nvSpPr>
+        <p:spPr>
+          <a:xfrm>
+            <a:off x="640080" y="3291840"/>
+            <a:ext cx="475488" cy="475488"/>
           </a:xfrm>
           <a:prstGeom prst="rect">
             <a:avLst/>
@@ -3569,7 +4403,7 @@
               <a:buNone/>
             </a:pPr>
             <a:r>
-              <a:rPr lang="en-US" sz="1700" b="1" dirty="0">
+              <a:rPr lang="en-US" sz="2000" b="1" dirty="0">
                 <a:solidFill>
                   <a:srgbClr val="FFFFFF"/>
                 </a:solidFill>
@@ -3579,20 +4413,20 @@
               </a:rPr>
               <a:t>3</a:t>
             </a:r>
-            <a:endParaRPr lang="en-US" sz="1700" dirty="0"/>
-          </a:p>
-        </p:txBody>
-      </p:sp>
-      <p:sp>
-        <p:nvSpPr>
-          <p:cNvPr id="14" name="Text 12"/>
-          <p:cNvSpPr txBox="1"/>
-          <p:nvPr/>
-        </p:nvSpPr>
-        <p:spPr>
-          <a:xfrm>
-            <a:off x="1261872" y="4343400"/>
-            <a:ext cx="10259568" cy="219456"/>
+            <a:endParaRPr lang="en-US" sz="2000" dirty="0"/>
+          </a:p>
+        </p:txBody>
+      </p:sp>
+      <p:sp>
+        <p:nvSpPr>
+          <p:cNvPr id="16" name="Text 14"/>
+          <p:cNvSpPr txBox="1"/>
+          <p:nvPr/>
+        </p:nvSpPr>
+        <p:spPr>
+          <a:xfrm>
+            <a:off x="1371600" y="3255264"/>
+            <a:ext cx="1463040" cy="274320"/>
           </a:xfrm>
           <a:prstGeom prst="rect">
             <a:avLst/>
@@ -3616,7 +4450,7 @@
                 <a:ea typeface="Calibri" pitchFamily="34" charset="-122"/>
                 <a:cs typeface="Calibri" pitchFamily="34" charset="-120"/>
               </a:rPr>
-              <a:t>THE ORGANISM FIRST</a:t>
+              <a:t>NOTICE</a:t>
             </a:r>
             <a:endParaRPr lang="en-US" sz="1050" dirty="0"/>
           </a:p>
@@ -3624,43 +4458,332 @@
       </p:sp>
       <p:sp>
         <p:nvSpPr>
-          <p:cNvPr id="15" name="Text 13"/>
-          <p:cNvSpPr txBox="1"/>
-          <p:nvPr/>
-        </p:nvSpPr>
-        <p:spPr>
-          <a:xfrm>
-            <a:off x="1261872" y="4581144"/>
-            <a:ext cx="10259568" cy="1316736"/>
-          </a:xfrm>
-          <a:prstGeom prst="rect">
-            <a:avLst/>
-          </a:prstGeom>
-          <a:noFill/>
-          <a:ln/>
-        </p:spPr>
-        <p:txBody>
-          <a:bodyPr wrap="square" lIns="0" tIns="0" rIns="0" bIns="0" rtlCol="0" anchor="t"/>
+          <p:cNvPr id="17" name="Text 15"/>
+          <p:cNvSpPr txBox="1"/>
+          <p:nvPr/>
+        </p:nvSpPr>
+        <p:spPr>
+          <a:xfrm>
+            <a:off x="1371600" y="3511296"/>
+            <a:ext cx="5577840" cy="384048"/>
+          </a:xfrm>
+          <a:prstGeom prst="rect">
+            <a:avLst/>
+          </a:prstGeom>
+          <a:noFill/>
+          <a:ln/>
+        </p:spPr>
+        <p:txBody>
+          <a:bodyPr wrap="square" lIns="0" tIns="0" rIns="0" bIns="0" rtlCol="0" anchor="ctr"/>
+          <a:lstStyle/>
+          <a:p>
+            <a:pPr indent="0" marL="0">
+              <a:buNone/>
+            </a:pPr>
+            <a:r>
+              <a:rPr lang="en-US" sz="1900" b="1" dirty="0">
+                <a:solidFill>
+                  <a:srgbClr val="132018"/>
+                </a:solidFill>
+                <a:latin typeface="Cambria" pitchFamily="34" charset="0"/>
+                <a:ea typeface="Cambria" pitchFamily="34" charset="-122"/>
+                <a:cs typeface="Cambria" pitchFamily="34" charset="-120"/>
+              </a:rPr>
+              <a:t>It notices the damage by itself.</a:t>
+            </a:r>
+            <a:endParaRPr lang="en-US" sz="1900" dirty="0"/>
+          </a:p>
+        </p:txBody>
+      </p:sp>
+      <p:sp>
+        <p:nvSpPr>
+          <p:cNvPr id="18" name="Text 16"/>
+          <p:cNvSpPr txBox="1"/>
+          <p:nvPr/>
+        </p:nvSpPr>
+        <p:spPr>
+          <a:xfrm>
+            <a:off x="7132320" y="3310128"/>
+            <a:ext cx="4389120" cy="685800"/>
+          </a:xfrm>
+          <a:prstGeom prst="rect">
+            <a:avLst/>
+          </a:prstGeom>
+          <a:noFill/>
+          <a:ln/>
+        </p:spPr>
+        <p:txBody>
+          <a:bodyPr wrap="square" lIns="0" tIns="0" rIns="0" bIns="0" rtlCol="0" anchor="ctr"/>
           <a:lstStyle/>
           <a:p>
             <a:pPr indent="0" marL="0">
               <a:lnSpc>
-                <a:spcPct val="108000"/>
+                <a:spcPct val="110000"/>
               </a:lnSpc>
               <a:buNone/>
             </a:pPr>
             <a:r>
-              <a:rPr lang="en-US" sz="1600" dirty="0">
-                <a:solidFill>
-                  <a:srgbClr val="132018"/>
+              <a:rPr lang="en-US" sz="1300" dirty="0">
+                <a:solidFill>
+                  <a:srgbClr val="5F6F66"/>
                 </a:solidFill>
                 <a:latin typeface="Calibri" pitchFamily="34" charset="0"/>
                 <a:ea typeface="Calibri" pitchFamily="34" charset="-122"/>
                 <a:cs typeface="Calibri" pitchFamily="34" charset="-120"/>
               </a:rPr>
-              <a:t>She started with flatworms instead, because you can cut one into pieces and every piece grows back into a whole worm, which sounded perfect for a file that heals.</a:t>
-            </a:r>
-            <a:endParaRPr lang="en-US" sz="1600" dirty="0"/>
+              <a:t>No machine watching it, nobody pressing a button. The organism senses the injury.</a:t>
+            </a:r>
+            <a:endParaRPr lang="en-US" sz="1300" dirty="0"/>
+          </a:p>
+        </p:txBody>
+      </p:sp>
+      <p:sp>
+        <p:nvSpPr>
+          <p:cNvPr id="19" name="Shape 17"/>
+          <p:cNvSpPr/>
+          <p:nvPr/>
+        </p:nvSpPr>
+        <p:spPr>
+          <a:xfrm>
+            <a:off x="640080" y="4315968"/>
+            <a:ext cx="475488" cy="475488"/>
+          </a:xfrm>
+          <a:prstGeom prst="ellipse">
+            <a:avLst/>
+          </a:prstGeom>
+          <a:solidFill>
+            <a:srgbClr val="C8453C"/>
+          </a:solidFill>
+          <a:ln w="12700">
+            <a:solidFill>
+              <a:srgbClr val="C8453C"/>
+            </a:solidFill>
+            <a:prstDash val="solid"/>
+          </a:ln>
+        </p:spPr>
+      </p:sp>
+      <p:sp>
+        <p:nvSpPr>
+          <p:cNvPr id="20" name="Text 18"/>
+          <p:cNvSpPr txBox="1"/>
+          <p:nvPr/>
+        </p:nvSpPr>
+        <p:spPr>
+          <a:xfrm>
+            <a:off x="640080" y="4315968"/>
+            <a:ext cx="475488" cy="475488"/>
+          </a:xfrm>
+          <a:prstGeom prst="rect">
+            <a:avLst/>
+          </a:prstGeom>
+          <a:noFill/>
+          <a:ln/>
+        </p:spPr>
+        <p:txBody>
+          <a:bodyPr wrap="square" lIns="0" tIns="0" rIns="0" bIns="0" rtlCol="0" anchor="ctr"/>
+          <a:lstStyle/>
+          <a:p>
+            <a:pPr algn="ctr" indent="0" marL="0">
+              <a:buNone/>
+            </a:pPr>
+            <a:r>
+              <a:rPr lang="en-US" sz="2000" b="1" dirty="0">
+                <a:solidFill>
+                  <a:srgbClr val="FFFFFF"/>
+                </a:solidFill>
+                <a:latin typeface="Cambria" pitchFamily="34" charset="0"/>
+                <a:ea typeface="Cambria" pitchFamily="34" charset="-122"/>
+                <a:cs typeface="Cambria" pitchFamily="34" charset="-120"/>
+              </a:rPr>
+              <a:t>4</a:t>
+            </a:r>
+            <a:endParaRPr lang="en-US" sz="2000" dirty="0"/>
+          </a:p>
+        </p:txBody>
+      </p:sp>
+      <p:sp>
+        <p:nvSpPr>
+          <p:cNvPr id="21" name="Text 19"/>
+          <p:cNvSpPr txBox="1"/>
+          <p:nvPr/>
+        </p:nvSpPr>
+        <p:spPr>
+          <a:xfrm>
+            <a:off x="1371600" y="4279392"/>
+            <a:ext cx="1463040" cy="274320"/>
+          </a:xfrm>
+          <a:prstGeom prst="rect">
+            <a:avLst/>
+          </a:prstGeom>
+          <a:noFill/>
+          <a:ln/>
+        </p:spPr>
+        <p:txBody>
+          <a:bodyPr wrap="square" lIns="0" tIns="0" rIns="0" bIns="0" rtlCol="0" anchor="ctr"/>
+          <a:lstStyle/>
+          <a:p>
+            <a:pPr indent="0" marL="0">
+              <a:buNone/>
+            </a:pPr>
+            <a:r>
+              <a:rPr lang="en-US" sz="1050" b="1" spc="140" kern="0" dirty="0">
+                <a:solidFill>
+                  <a:srgbClr val="5F6F66"/>
+                </a:solidFill>
+                <a:latin typeface="Calibri" pitchFamily="34" charset="0"/>
+                <a:ea typeface="Calibri" pitchFamily="34" charset="-122"/>
+                <a:cs typeface="Calibri" pitchFamily="34" charset="-120"/>
+              </a:rPr>
+              <a:t>REGROW</a:t>
+            </a:r>
+            <a:endParaRPr lang="en-US" sz="1050" dirty="0"/>
+          </a:p>
+        </p:txBody>
+      </p:sp>
+      <p:sp>
+        <p:nvSpPr>
+          <p:cNvPr id="22" name="Text 20"/>
+          <p:cNvSpPr txBox="1"/>
+          <p:nvPr/>
+        </p:nvSpPr>
+        <p:spPr>
+          <a:xfrm>
+            <a:off x="1371600" y="4535424"/>
+            <a:ext cx="5577840" cy="384048"/>
+          </a:xfrm>
+          <a:prstGeom prst="rect">
+            <a:avLst/>
+          </a:prstGeom>
+          <a:noFill/>
+          <a:ln/>
+        </p:spPr>
+        <p:txBody>
+          <a:bodyPr wrap="square" lIns="0" tIns="0" rIns="0" bIns="0" rtlCol="0" anchor="ctr"/>
+          <a:lstStyle/>
+          <a:p>
+            <a:pPr indent="0" marL="0">
+              <a:buNone/>
+            </a:pPr>
+            <a:r>
+              <a:rPr lang="en-US" sz="1900" b="1" dirty="0">
+                <a:solidFill>
+                  <a:srgbClr val="132018"/>
+                </a:solidFill>
+                <a:latin typeface="Cambria" pitchFamily="34" charset="0"/>
+                <a:ea typeface="Cambria" pitchFamily="34" charset="-122"/>
+                <a:cs typeface="Cambria" pitchFamily="34" charset="-120"/>
+              </a:rPr>
+              <a:t>It regrows, and hands the data to the new cells.</a:t>
+            </a:r>
+            <a:endParaRPr lang="en-US" sz="1900" dirty="0"/>
+          </a:p>
+        </p:txBody>
+      </p:sp>
+      <p:sp>
+        <p:nvSpPr>
+          <p:cNvPr id="23" name="Text 21"/>
+          <p:cNvSpPr txBox="1"/>
+          <p:nvPr/>
+        </p:nvSpPr>
+        <p:spPr>
+          <a:xfrm>
+            <a:off x="7132320" y="4334256"/>
+            <a:ext cx="4389120" cy="685800"/>
+          </a:xfrm>
+          <a:prstGeom prst="rect">
+            <a:avLst/>
+          </a:prstGeom>
+          <a:noFill/>
+          <a:ln/>
+        </p:spPr>
+        <p:txBody>
+          <a:bodyPr wrap="square" lIns="0" tIns="0" rIns="0" bIns="0" rtlCol="0" anchor="ctr"/>
+          <a:lstStyle/>
+          <a:p>
+            <a:pPr indent="0" marL="0">
+              <a:lnSpc>
+                <a:spcPct val="110000"/>
+              </a:lnSpc>
+              <a:buNone/>
+            </a:pPr>
+            <a:r>
+              <a:rPr lang="en-US" sz="1300" dirty="0">
+                <a:solidFill>
+                  <a:srgbClr val="5F6F66"/>
+                </a:solidFill>
+                <a:latin typeface="Calibri" pitchFamily="34" charset="0"/>
+                <a:ea typeface="Calibri" pitchFamily="34" charset="-122"/>
+                <a:cs typeface="Calibri" pitchFamily="34" charset="-120"/>
+              </a:rPr>
+              <a:t>The survivors rebuild the whole thing, and the data is still there. Nothing is lost.</a:t>
+            </a:r>
+            <a:endParaRPr lang="en-US" sz="1300" dirty="0"/>
+          </a:p>
+        </p:txBody>
+      </p:sp>
+      <p:sp>
+        <p:nvSpPr>
+          <p:cNvPr id="24" name="Shape 22"/>
+          <p:cNvSpPr/>
+          <p:nvPr/>
+        </p:nvSpPr>
+        <p:spPr>
+          <a:xfrm>
+            <a:off x="640080" y="5440680"/>
+            <a:ext cx="10881360" cy="868680"/>
+          </a:xfrm>
+          <a:prstGeom prst="roundRect">
+            <a:avLst>
+              <a:gd name="adj" fmla="val 10526"/>
+            </a:avLst>
+          </a:prstGeom>
+          <a:solidFill>
+            <a:srgbClr val="132018"/>
+          </a:solidFill>
+          <a:ln w="12700">
+            <a:solidFill>
+              <a:srgbClr val="132018"/>
+            </a:solidFill>
+            <a:prstDash val="solid"/>
+          </a:ln>
+        </p:spPr>
+      </p:sp>
+      <p:sp>
+        <p:nvSpPr>
+          <p:cNvPr id="25" name="Text 23"/>
+          <p:cNvSpPr txBox="1"/>
+          <p:nvPr/>
+        </p:nvSpPr>
+        <p:spPr>
+          <a:xfrm>
+            <a:off x="960120" y="5577840"/>
+            <a:ext cx="10241280" cy="594360"/>
+          </a:xfrm>
+          <a:prstGeom prst="rect">
+            <a:avLst/>
+          </a:prstGeom>
+          <a:noFill/>
+          <a:ln/>
+        </p:spPr>
+        <p:txBody>
+          <a:bodyPr wrap="square" lIns="0" tIns="0" rIns="0" bIns="0" rtlCol="0" anchor="ctr"/>
+          <a:lstStyle/>
+          <a:p>
+            <a:pPr indent="0" marL="0">
+              <a:buNone/>
+            </a:pPr>
+            <a:r>
+              <a:rPr lang="en-US" sz="1800" b="1" dirty="0">
+                <a:solidFill>
+                  <a:srgbClr val="FFFFFF"/>
+                </a:solidFill>
+                <a:latin typeface="Cambria" pitchFamily="34" charset="0"/>
+                <a:ea typeface="Cambria" pitchFamily="34" charset="-122"/>
+                <a:cs typeface="Cambria" pitchFamily="34" charset="-120"/>
+              </a:rPr>
+              <a:t>That is Acheron. A file that repairs itself, because the thing holding it is alive.</a:t>
+            </a:r>
+            <a:endParaRPr lang="en-US" sz="1800" dirty="0"/>
           </a:p>
         </p:txBody>
       </p:sp>
@@ -3754,7 +4877,7 @@
                 <a:ea typeface="Cambria" pitchFamily="34" charset="-122"/>
                 <a:cs typeface="Cambria" pitchFamily="34" charset="-120"/>
               </a:rPr>
-              <a:t>What is proven, and what is not</a:t>
+              <a:t>The same thing in nine sentences</a:t>
             </a:r>
             <a:endParaRPr lang="en-US" sz="2300" dirty="0"/>
           </a:p>
@@ -3818,7 +4941,7 @@
                 <a:ea typeface="Cambria" pitchFamily="34" charset="-122"/>
                 <a:cs typeface="Cambria" pitchFamily="34" charset="-120"/>
               </a:rPr>
-              <a:t>4</a:t>
+              <a:t>1</a:t>
             </a:r>
             <a:endParaRPr lang="en-US" sz="1700" dirty="0"/>
           </a:p>
@@ -3857,7 +4980,7 @@
                 <a:ea typeface="Calibri" pitchFamily="34" charset="-122"/>
                 <a:cs typeface="Calibri" pitchFamily="34" charset="-120"/>
               </a:rPr>
-              <a:t>PROVED IN SIMULATION</a:t>
+              <a:t>THE IDEA</a:t>
             </a:r>
             <a:endParaRPr lang="en-US" sz="1050" dirty="0"/>
           </a:p>
@@ -3899,7 +5022,7 @@
                 <a:ea typeface="Calibri" pitchFamily="34" charset="-122"/>
                 <a:cs typeface="Calibri" pitchFamily="34" charset="-120"/>
               </a:rPr>
-              <a:t>On the computer, the stored bit survives having almost the entire colony wiped out, coming back correctly from as few as 2 germs out of 100.</a:t>
+              <a:t>Acheron is one hypothesis: write data into a living thing, and when it gets hurt, it heals and keeps the data.</a:t>
             </a:r>
             <a:endParaRPr lang="en-US" sz="1600" dirty="0"/>
           </a:p>
@@ -3963,7 +5086,7 @@
                 <a:ea typeface="Cambria" pitchFamily="34" charset="-122"/>
                 <a:cs typeface="Cambria" pitchFamily="34" charset="-120"/>
               </a:rPr>
-              <a:t>5</a:t>
+              <a:t>2</a:t>
             </a:r>
             <a:endParaRPr lang="en-US" sz="1700" dirty="0"/>
           </a:p>
@@ -4002,7 +5125,7 @@
                 <a:ea typeface="Calibri" pitchFamily="34" charset="-122"/>
                 <a:cs typeface="Calibri" pitchFamily="34" charset="-120"/>
               </a:rPr>
-              <a:t>STILL UNPROVEN</a:t>
+              <a:t>WRITING</a:t>
             </a:r>
             <a:endParaRPr lang="en-US" sz="1050" dirty="0"/>
           </a:p>
@@ -4044,7 +5167,7 @@
                 <a:ea typeface="Calibri" pitchFamily="34" charset="-122"/>
                 <a:cs typeface="Calibri" pitchFamily="34" charset="-120"/>
               </a:rPr>
-              <a:t>Whether that actually happens in real living cells, which nobody on Earth has ever tested, in any organism.</a:t>
+              <a:t>The data goes in as a tiny switch built out of genes, sitting inside every cell, one switch for each 0 or 1.</a:t>
             </a:r>
             <a:endParaRPr lang="en-US" sz="1600" dirty="0"/>
           </a:p>
@@ -4108,7 +5231,7 @@
                 <a:ea typeface="Cambria" pitchFamily="34" charset="-122"/>
                 <a:cs typeface="Cambria" pitchFamily="34" charset="-120"/>
               </a:rPr>
-              <a:t>6</a:t>
+              <a:t>3</a:t>
             </a:r>
             <a:endParaRPr lang="en-US" sz="1700" dirty="0"/>
           </a:p>
@@ -4147,7 +5270,7 @@
                 <a:ea typeface="Calibri" pitchFamily="34" charset="-122"/>
                 <a:cs typeface="Calibri" pitchFamily="34" charset="-120"/>
               </a:rPr>
-              <a:t>THE FIRST REAL TEST</a:t>
+              <a:t>DAMAGE</a:t>
             </a:r>
             <a:endParaRPr lang="en-US" sz="1050" dirty="0"/>
           </a:p>
@@ -4189,7 +5312,7 @@
                 <a:ea typeface="Calibri" pitchFamily="34" charset="-122"/>
                 <a:cs typeface="Calibri" pitchFamily="34" charset="-120"/>
               </a:rPr>
-              <a:t>The first lab test costs roughly $2,000 to $5,000 and takes months, not years, and it only has to answer one question: does the switch really hold two positions inside a real germ.</a:t>
+              <a:t>Then something wrecks it and most of the cells die, which is the situation every other kind of storage simply does not survive.</a:t>
             </a:r>
             <a:endParaRPr lang="en-US" sz="1600" dirty="0"/>
           </a:p>
@@ -4285,7 +5408,7 @@
                 <a:ea typeface="Cambria" pitchFamily="34" charset="-122"/>
                 <a:cs typeface="Cambria" pitchFamily="34" charset="-120"/>
               </a:rPr>
-              <a:t>Why it matters, and where the money comes from</a:t>
+              <a:t>How it survives, and in what</a:t>
             </a:r>
             <a:endParaRPr lang="en-US" sz="2300" dirty="0"/>
           </a:p>
@@ -4349,7 +5472,7 @@
                 <a:ea typeface="Cambria" pitchFamily="34" charset="-122"/>
                 <a:cs typeface="Cambria" pitchFamily="34" charset="-120"/>
               </a:rPr>
-              <a:t>7</a:t>
+              <a:t>4</a:t>
             </a:r>
             <a:endParaRPr lang="en-US" sz="1700" dirty="0"/>
           </a:p>
@@ -4388,7 +5511,7 @@
                 <a:ea typeface="Calibri" pitchFamily="34" charset="-122"/>
                 <a:cs typeface="Calibri" pitchFamily="34" charset="-120"/>
               </a:rPr>
-              <a:t>IF IT WORKS</a:t>
+              <a:t>SELF-DETECTION</a:t>
             </a:r>
             <a:endParaRPr lang="en-US" sz="1050" dirty="0"/>
           </a:p>
@@ -4430,7 +5553,7 @@
                 <a:ea typeface="Calibri" pitchFamily="34" charset="-122"/>
                 <a:cs typeface="Calibri" pitchFamily="34" charset="-120"/>
               </a:rPr>
-              <a:t>She would own the first evidence that a memory can survive being almost destroyed and rebuild itself, which is the one thing nobody else in this field has.</a:t>
+              <a:t>The organism notices the injury on its own, with no machine watching it and nobody pressing a button.</a:t>
             </a:r>
             <a:endParaRPr lang="en-US" sz="1600" dirty="0"/>
           </a:p>
@@ -4494,7 +5617,7 @@
                 <a:ea typeface="Cambria" pitchFamily="34" charset="-122"/>
                 <a:cs typeface="Cambria" pitchFamily="34" charset="-120"/>
               </a:rPr>
-              <a:t>8</a:t>
+              <a:t>5</a:t>
             </a:r>
             <a:endParaRPr lang="en-US" sz="1700" dirty="0"/>
           </a:p>
@@ -4533,7 +5656,7 @@
                 <a:ea typeface="Calibri" pitchFamily="34" charset="-122"/>
                 <a:cs typeface="Calibri" pitchFamily="34" charset="-120"/>
               </a:rPr>
-              <a:t>WHY IT IS NEW</a:t>
+              <a:t>REGROWTH</a:t>
             </a:r>
             <a:endParaRPr lang="en-US" sz="1050" dirty="0"/>
           </a:p>
@@ -4575,7 +5698,7 @@
                 <a:ea typeface="Calibri" pitchFamily="34" charset="-122"/>
                 <a:cs typeface="Calibri" pitchFamily="34" charset="-120"/>
               </a:rPr>
-              <a:t>Other labs have already put data into cells, so the new part is not storing it, it is whether the memory lives through the cells being mostly killed and regrown.</a:t>
+              <a:t>It rebuilds itself from the survivors, and every new cell is handed the same switch position, so the data comes through intact.</a:t>
             </a:r>
             <a:endParaRPr lang="en-US" sz="1600" dirty="0"/>
           </a:p>
@@ -4639,7 +5762,7 @@
                 <a:ea typeface="Cambria" pitchFamily="34" charset="-122"/>
                 <a:cs typeface="Cambria" pitchFamily="34" charset="-120"/>
               </a:rPr>
-              <a:t>9</a:t>
+              <a:t>6</a:t>
             </a:r>
             <a:endParaRPr lang="en-US" sz="1700" dirty="0"/>
           </a:p>
@@ -4678,7 +5801,7 @@
                 <a:ea typeface="Calibri" pitchFamily="34" charset="-122"/>
                 <a:cs typeface="Calibri" pitchFamily="34" charset="-120"/>
               </a:rPr>
-              <a:t>THE MONEY, HONESTLY</a:t>
+              <a:t>WHICH CREATURE</a:t>
             </a:r>
             <a:endParaRPr lang="en-US" sz="1050" dirty="0"/>
           </a:p>
@@ -4720,7 +5843,7 @@
                 <a:ea typeface="Calibri" pitchFamily="34" charset="-122"/>
                 <a:cs typeface="Calibri" pitchFamily="34" charset="-120"/>
               </a:rPr>
-              <a:t>The money comes from research grants first, up to about $305,000 from one US government programme, and not from selling anything, because nothing in this field sells yet.</a:t>
+              <a:t>The creature is interchangeable, and germs are being tested first only because they are cheap and fast, while flatworms came first because they already regrow a whole body from one piece.</a:t>
             </a:r>
             <a:endParaRPr lang="en-US" sz="1600" dirty="0"/>
           </a:p>
@@ -4816,7 +5939,7 @@
                 <a:ea typeface="Cambria" pitchFamily="34" charset="-122"/>
                 <a:cs typeface="Cambria" pitchFamily="34" charset="-120"/>
               </a:rPr>
-              <a:t>The whole alphabet is two colours</a:t>
+              <a:t>What is proven, and where the money comes from</a:t>
             </a:r>
             <a:endParaRPr lang="en-US" sz="2300" dirty="0"/>
           </a:p>
@@ -4824,98 +5947,14 @@
       </p:sp>
       <p:sp>
         <p:nvSpPr>
-          <p:cNvPr id="4" name="Text 2"/>
-          <p:cNvSpPr txBox="1"/>
-          <p:nvPr/>
-        </p:nvSpPr>
-        <p:spPr>
-          <a:xfrm>
-            <a:off x="640080" y="1143000"/>
-            <a:ext cx="6035040" cy="1737360"/>
-          </a:xfrm>
-          <a:prstGeom prst="rect">
-            <a:avLst/>
-          </a:prstGeom>
-          <a:noFill/>
-          <a:ln/>
-        </p:spPr>
-        <p:txBody>
-          <a:bodyPr wrap="square" lIns="0" tIns="0" rIns="0" bIns="0" rtlCol="0" anchor="ctr"/>
-          <a:lstStyle/>
-          <a:p>
-            <a:pPr indent="0" marL="0">
-              <a:lnSpc>
-                <a:spcPct val="115000"/>
-              </a:lnSpc>
-              <a:buNone/>
-            </a:pPr>
-            <a:r>
-              <a:rPr lang="en-US" sz="1600" dirty="0">
-                <a:solidFill>
-                  <a:srgbClr val="132018"/>
-                </a:solidFill>
-                <a:latin typeface="Calibri" pitchFamily="34" charset="0"/>
-                <a:ea typeface="Calibri" pitchFamily="34" charset="-122"/>
-                <a:cs typeface="Calibri" pitchFamily="34" charset="-120"/>
-              </a:rPr>
-              <a:t>Inside each germ sits a tiny switch built out of genes: two genes that each tell the other to be quiet. Whichever one is winning keeps winning, so the switch stays where you leave it. One position makes the germ glow green, the other makes it glow red.</a:t>
-            </a:r>
-            <a:endParaRPr lang="en-US" sz="1600" dirty="0"/>
-          </a:p>
-        </p:txBody>
-      </p:sp>
-      <p:sp>
-        <p:nvSpPr>
-          <p:cNvPr id="5" name="Text 3"/>
-          <p:cNvSpPr txBox="1"/>
-          <p:nvPr/>
-        </p:nvSpPr>
-        <p:spPr>
-          <a:xfrm>
-            <a:off x="640080" y="3017520"/>
-            <a:ext cx="6035040" cy="914400"/>
-          </a:xfrm>
-          <a:prstGeom prst="rect">
-            <a:avLst/>
-          </a:prstGeom>
-          <a:noFill/>
-          <a:ln/>
-        </p:spPr>
-        <p:txBody>
-          <a:bodyPr wrap="square" lIns="0" tIns="0" rIns="0" bIns="0" rtlCol="0" anchor="ctr"/>
-          <a:lstStyle/>
-          <a:p>
-            <a:pPr indent="0" marL="0">
-              <a:lnSpc>
-                <a:spcPct val="115000"/>
-              </a:lnSpc>
-              <a:buNone/>
-            </a:pPr>
-            <a:r>
-              <a:rPr lang="en-US" sz="1600" i="1" dirty="0">
-                <a:solidFill>
-                  <a:srgbClr val="5F6F66"/>
-                </a:solidFill>
-                <a:latin typeface="Calibri" pitchFamily="34" charset="0"/>
-                <a:ea typeface="Calibri" pitchFamily="34" charset="-122"/>
-                <a:cs typeface="Calibri" pitchFamily="34" charset="-120"/>
-              </a:rPr>
-              <a:t>Reading it does not kill anything, so the same dish can be read again and again.</a:t>
-            </a:r>
-            <a:endParaRPr lang="en-US" sz="1600" dirty="0"/>
-          </a:p>
-        </p:txBody>
-      </p:sp>
-      <p:sp>
-        <p:nvSpPr>
-          <p:cNvPr id="6" name="Shape 4"/>
+          <p:cNvPr id="4" name="Shape 2"/>
           <p:cNvSpPr/>
           <p:nvPr/>
         </p:nvSpPr>
         <p:spPr>
           <a:xfrm>
-            <a:off x="7498080" y="1417320"/>
-            <a:ext cx="1737360" cy="1737360"/>
+            <a:off x="640080" y="1271016"/>
+            <a:ext cx="402336" cy="402336"/>
           </a:xfrm>
           <a:prstGeom prst="ellipse">
             <a:avLst/>
@@ -4933,14 +5972,14 @@
       </p:sp>
       <p:sp>
         <p:nvSpPr>
-          <p:cNvPr id="7" name="Text 5"/>
-          <p:cNvSpPr txBox="1"/>
-          <p:nvPr/>
-        </p:nvSpPr>
-        <p:spPr>
-          <a:xfrm>
-            <a:off x="7498080" y="1417320"/>
-            <a:ext cx="1737360" cy="1737360"/>
+          <p:cNvPr id="5" name="Text 3"/>
+          <p:cNvSpPr txBox="1"/>
+          <p:nvPr/>
+        </p:nvSpPr>
+        <p:spPr>
+          <a:xfrm>
+            <a:off x="640080" y="1271016"/>
+            <a:ext cx="402336" cy="402336"/>
           </a:xfrm>
           <a:prstGeom prst="rect">
             <a:avLst/>
@@ -4956,7 +5995,7 @@
               <a:buNone/>
             </a:pPr>
             <a:r>
-              <a:rPr lang="en-US" sz="6000" b="1" dirty="0">
+              <a:rPr lang="en-US" sz="1700" b="1" dirty="0">
                 <a:solidFill>
                   <a:srgbClr val="FFFFFF"/>
                 </a:solidFill>
@@ -4964,38 +6003,38 @@
                 <a:ea typeface="Cambria" pitchFamily="34" charset="-122"/>
                 <a:cs typeface="Cambria" pitchFamily="34" charset="-120"/>
               </a:rPr>
-              <a:t>0</a:t>
-            </a:r>
-            <a:endParaRPr lang="en-US" sz="6000" dirty="0"/>
-          </a:p>
-        </p:txBody>
-      </p:sp>
-      <p:sp>
-        <p:nvSpPr>
-          <p:cNvPr id="8" name="Text 6"/>
-          <p:cNvSpPr txBox="1"/>
-          <p:nvPr/>
-        </p:nvSpPr>
-        <p:spPr>
-          <a:xfrm>
-            <a:off x="7498080" y="3291840"/>
-            <a:ext cx="1737360" cy="320040"/>
-          </a:xfrm>
-          <a:prstGeom prst="rect">
-            <a:avLst/>
-          </a:prstGeom>
-          <a:noFill/>
-          <a:ln/>
-        </p:spPr>
-        <p:txBody>
-          <a:bodyPr wrap="square" lIns="0" tIns="0" rIns="0" bIns="0" rtlCol="0" anchor="ctr"/>
-          <a:lstStyle/>
-          <a:p>
-            <a:pPr algn="ctr" indent="0" marL="0">
-              <a:buNone/>
-            </a:pPr>
-            <a:r>
-              <a:rPr lang="en-US" sz="1250" dirty="0">
+              <a:t>7</a:t>
+            </a:r>
+            <a:endParaRPr lang="en-US" sz="1700" dirty="0"/>
+          </a:p>
+        </p:txBody>
+      </p:sp>
+      <p:sp>
+        <p:nvSpPr>
+          <p:cNvPr id="6" name="Text 4"/>
+          <p:cNvSpPr txBox="1"/>
+          <p:nvPr/>
+        </p:nvSpPr>
+        <p:spPr>
+          <a:xfrm>
+            <a:off x="1261872" y="1234440"/>
+            <a:ext cx="10259568" cy="219456"/>
+          </a:xfrm>
+          <a:prstGeom prst="rect">
+            <a:avLst/>
+          </a:prstGeom>
+          <a:noFill/>
+          <a:ln/>
+        </p:spPr>
+        <p:txBody>
+          <a:bodyPr wrap="square" lIns="0" tIns="0" rIns="0" bIns="0" rtlCol="0" anchor="ctr"/>
+          <a:lstStyle/>
+          <a:p>
+            <a:pPr indent="0" marL="0">
+              <a:buNone/>
+            </a:pPr>
+            <a:r>
+              <a:rPr lang="en-US" sz="1050" b="1" spc="140" kern="0" dirty="0">
                 <a:solidFill>
                   <a:srgbClr val="5F6F66"/>
                 </a:solidFill>
@@ -5003,32 +6042,74 @@
                 <a:ea typeface="Calibri" pitchFamily="34" charset="-122"/>
                 <a:cs typeface="Calibri" pitchFamily="34" charset="-120"/>
               </a:rPr>
-              <a:t>glows green</a:t>
-            </a:r>
-            <a:endParaRPr lang="en-US" sz="1250" dirty="0"/>
-          </a:p>
-        </p:txBody>
-      </p:sp>
-      <p:sp>
-        <p:nvSpPr>
-          <p:cNvPr id="9" name="Shape 7"/>
+              <a:t>PROVED IN SIMULATION</a:t>
+            </a:r>
+            <a:endParaRPr lang="en-US" sz="1050" dirty="0"/>
+          </a:p>
+        </p:txBody>
+      </p:sp>
+      <p:sp>
+        <p:nvSpPr>
+          <p:cNvPr id="7" name="Text 5"/>
+          <p:cNvSpPr txBox="1"/>
+          <p:nvPr/>
+        </p:nvSpPr>
+        <p:spPr>
+          <a:xfrm>
+            <a:off x="1261872" y="1472184"/>
+            <a:ext cx="10259568" cy="1133856"/>
+          </a:xfrm>
+          <a:prstGeom prst="rect">
+            <a:avLst/>
+          </a:prstGeom>
+          <a:noFill/>
+          <a:ln/>
+        </p:spPr>
+        <p:txBody>
+          <a:bodyPr wrap="square" lIns="0" tIns="0" rIns="0" bIns="0" rtlCol="0" anchor="t"/>
+          <a:lstStyle/>
+          <a:p>
+            <a:pPr indent="0" marL="0">
+              <a:lnSpc>
+                <a:spcPct val="108000"/>
+              </a:lnSpc>
+              <a:buNone/>
+            </a:pPr>
+            <a:r>
+              <a:rPr lang="en-US" sz="1600" dirty="0">
+                <a:solidFill>
+                  <a:srgbClr val="132018"/>
+                </a:solidFill>
+                <a:latin typeface="Calibri" pitchFamily="34" charset="0"/>
+                <a:ea typeface="Calibri" pitchFamily="34" charset="-122"/>
+                <a:cs typeface="Calibri" pitchFamily="34" charset="-120"/>
+              </a:rPr>
+              <a:t>On the computer it works, with the data coming back perfectly from as few as 2 cells out of 100 surviving.</a:t>
+            </a:r>
+            <a:endParaRPr lang="en-US" sz="1600" dirty="0"/>
+          </a:p>
+        </p:txBody>
+      </p:sp>
+      <p:sp>
+        <p:nvSpPr>
+          <p:cNvPr id="8" name="Shape 6"/>
           <p:cNvSpPr/>
           <p:nvPr/>
         </p:nvSpPr>
         <p:spPr>
           <a:xfrm>
-            <a:off x="9784080" y="1417320"/>
-            <a:ext cx="1737360" cy="1737360"/>
+            <a:off x="640080" y="2825496"/>
+            <a:ext cx="402336" cy="402336"/>
           </a:xfrm>
           <a:prstGeom prst="ellipse">
             <a:avLst/>
           </a:prstGeom>
           <a:solidFill>
-            <a:srgbClr val="C8453C"/>
+            <a:srgbClr val="1F8B5F"/>
           </a:solidFill>
           <a:ln w="12700">
             <a:solidFill>
-              <a:srgbClr val="C8453C"/>
+              <a:srgbClr val="1F8B5F"/>
             </a:solidFill>
             <a:prstDash val="solid"/>
           </a:ln>
@@ -5036,14 +6117,14 @@
       </p:sp>
       <p:sp>
         <p:nvSpPr>
-          <p:cNvPr id="10" name="Text 8"/>
-          <p:cNvSpPr txBox="1"/>
-          <p:nvPr/>
-        </p:nvSpPr>
-        <p:spPr>
-          <a:xfrm>
-            <a:off x="9784080" y="1417320"/>
-            <a:ext cx="1737360" cy="1737360"/>
+          <p:cNvPr id="9" name="Text 7"/>
+          <p:cNvSpPr txBox="1"/>
+          <p:nvPr/>
+        </p:nvSpPr>
+        <p:spPr>
+          <a:xfrm>
+            <a:off x="640080" y="2825496"/>
+            <a:ext cx="402336" cy="402336"/>
           </a:xfrm>
           <a:prstGeom prst="rect">
             <a:avLst/>
@@ -5059,7 +6140,7 @@
               <a:buNone/>
             </a:pPr>
             <a:r>
-              <a:rPr lang="en-US" sz="6000" b="1" dirty="0">
+              <a:rPr lang="en-US" sz="1700" b="1" dirty="0">
                 <a:solidFill>
                   <a:srgbClr val="FFFFFF"/>
                 </a:solidFill>
@@ -5067,38 +6148,38 @@
                 <a:ea typeface="Cambria" pitchFamily="34" charset="-122"/>
                 <a:cs typeface="Cambria" pitchFamily="34" charset="-120"/>
               </a:rPr>
-              <a:t>1</a:t>
-            </a:r>
-            <a:endParaRPr lang="en-US" sz="6000" dirty="0"/>
-          </a:p>
-        </p:txBody>
-      </p:sp>
-      <p:sp>
-        <p:nvSpPr>
-          <p:cNvPr id="11" name="Text 9"/>
-          <p:cNvSpPr txBox="1"/>
-          <p:nvPr/>
-        </p:nvSpPr>
-        <p:spPr>
-          <a:xfrm>
-            <a:off x="9784080" y="3291840"/>
-            <a:ext cx="1737360" cy="320040"/>
-          </a:xfrm>
-          <a:prstGeom prst="rect">
-            <a:avLst/>
-          </a:prstGeom>
-          <a:noFill/>
-          <a:ln/>
-        </p:spPr>
-        <p:txBody>
-          <a:bodyPr wrap="square" lIns="0" tIns="0" rIns="0" bIns="0" rtlCol="0" anchor="ctr"/>
-          <a:lstStyle/>
-          <a:p>
-            <a:pPr algn="ctr" indent="0" marL="0">
-              <a:buNone/>
-            </a:pPr>
-            <a:r>
-              <a:rPr lang="en-US" sz="1250" dirty="0">
+              <a:t>8</a:t>
+            </a:r>
+            <a:endParaRPr lang="en-US" sz="1700" dirty="0"/>
+          </a:p>
+        </p:txBody>
+      </p:sp>
+      <p:sp>
+        <p:nvSpPr>
+          <p:cNvPr id="10" name="Text 8"/>
+          <p:cNvSpPr txBox="1"/>
+          <p:nvPr/>
+        </p:nvSpPr>
+        <p:spPr>
+          <a:xfrm>
+            <a:off x="1261872" y="2788920"/>
+            <a:ext cx="10259568" cy="219456"/>
+          </a:xfrm>
+          <a:prstGeom prst="rect">
+            <a:avLst/>
+          </a:prstGeom>
+          <a:noFill/>
+          <a:ln/>
+        </p:spPr>
+        <p:txBody>
+          <a:bodyPr wrap="square" lIns="0" tIns="0" rIns="0" bIns="0" rtlCol="0" anchor="ctr"/>
+          <a:lstStyle/>
+          <a:p>
+            <a:pPr indent="0" marL="0">
+              <a:buNone/>
+            </a:pPr>
+            <a:r>
+              <a:rPr lang="en-US" sz="1050" b="1" spc="140" kern="0" dirty="0">
                 <a:solidFill>
                   <a:srgbClr val="5F6F66"/>
                 </a:solidFill>
@@ -5106,9 +6187,196 @@
                 <a:ea typeface="Calibri" pitchFamily="34" charset="-122"/>
                 <a:cs typeface="Calibri" pitchFamily="34" charset="-120"/>
               </a:rPr>
-              <a:t>glows red</a:t>
-            </a:r>
-            <a:endParaRPr lang="en-US" sz="1250" dirty="0"/>
+              <a:t>STILL UNPROVEN</a:t>
+            </a:r>
+            <a:endParaRPr lang="en-US" sz="1050" dirty="0"/>
+          </a:p>
+        </p:txBody>
+      </p:sp>
+      <p:sp>
+        <p:nvSpPr>
+          <p:cNvPr id="11" name="Text 9"/>
+          <p:cNvSpPr txBox="1"/>
+          <p:nvPr/>
+        </p:nvSpPr>
+        <p:spPr>
+          <a:xfrm>
+            <a:off x="1261872" y="3026664"/>
+            <a:ext cx="10259568" cy="1133856"/>
+          </a:xfrm>
+          <a:prstGeom prst="rect">
+            <a:avLst/>
+          </a:prstGeom>
+          <a:noFill/>
+          <a:ln/>
+        </p:spPr>
+        <p:txBody>
+          <a:bodyPr wrap="square" lIns="0" tIns="0" rIns="0" bIns="0" rtlCol="0" anchor="t"/>
+          <a:lstStyle/>
+          <a:p>
+            <a:pPr indent="0" marL="0">
+              <a:lnSpc>
+                <a:spcPct val="108000"/>
+              </a:lnSpc>
+              <a:buNone/>
+            </a:pPr>
+            <a:r>
+              <a:rPr lang="en-US" sz="1600" dirty="0">
+                <a:solidFill>
+                  <a:srgbClr val="132018"/>
+                </a:solidFill>
+                <a:latin typeface="Calibri" pitchFamily="34" charset="0"/>
+                <a:ea typeface="Calibri" pitchFamily="34" charset="-122"/>
+                <a:cs typeface="Calibri" pitchFamily="34" charset="-120"/>
+              </a:rPr>
+              <a:t>In a real laboratory nobody has ever tested it, in any organism, and that first test costs roughly $2,000 to $5,000.</a:t>
+            </a:r>
+            <a:endParaRPr lang="en-US" sz="1600" dirty="0"/>
+          </a:p>
+        </p:txBody>
+      </p:sp>
+      <p:sp>
+        <p:nvSpPr>
+          <p:cNvPr id="12" name="Shape 10"/>
+          <p:cNvSpPr/>
+          <p:nvPr/>
+        </p:nvSpPr>
+        <p:spPr>
+          <a:xfrm>
+            <a:off x="640080" y="4379976"/>
+            <a:ext cx="402336" cy="402336"/>
+          </a:xfrm>
+          <a:prstGeom prst="ellipse">
+            <a:avLst/>
+          </a:prstGeom>
+          <a:solidFill>
+            <a:srgbClr val="1F8B5F"/>
+          </a:solidFill>
+          <a:ln w="12700">
+            <a:solidFill>
+              <a:srgbClr val="1F8B5F"/>
+            </a:solidFill>
+            <a:prstDash val="solid"/>
+          </a:ln>
+        </p:spPr>
+      </p:sp>
+      <p:sp>
+        <p:nvSpPr>
+          <p:cNvPr id="13" name="Text 11"/>
+          <p:cNvSpPr txBox="1"/>
+          <p:nvPr/>
+        </p:nvSpPr>
+        <p:spPr>
+          <a:xfrm>
+            <a:off x="640080" y="4379976"/>
+            <a:ext cx="402336" cy="402336"/>
+          </a:xfrm>
+          <a:prstGeom prst="rect">
+            <a:avLst/>
+          </a:prstGeom>
+          <a:noFill/>
+          <a:ln/>
+        </p:spPr>
+        <p:txBody>
+          <a:bodyPr wrap="square" lIns="0" tIns="0" rIns="0" bIns="0" rtlCol="0" anchor="ctr"/>
+          <a:lstStyle/>
+          <a:p>
+            <a:pPr algn="ctr" indent="0" marL="0">
+              <a:buNone/>
+            </a:pPr>
+            <a:r>
+              <a:rPr lang="en-US" sz="1700" b="1" dirty="0">
+                <a:solidFill>
+                  <a:srgbClr val="FFFFFF"/>
+                </a:solidFill>
+                <a:latin typeface="Cambria" pitchFamily="34" charset="0"/>
+                <a:ea typeface="Cambria" pitchFamily="34" charset="-122"/>
+                <a:cs typeface="Cambria" pitchFamily="34" charset="-120"/>
+              </a:rPr>
+              <a:t>9</a:t>
+            </a:r>
+            <a:endParaRPr lang="en-US" sz="1700" dirty="0"/>
+          </a:p>
+        </p:txBody>
+      </p:sp>
+      <p:sp>
+        <p:nvSpPr>
+          <p:cNvPr id="14" name="Text 12"/>
+          <p:cNvSpPr txBox="1"/>
+          <p:nvPr/>
+        </p:nvSpPr>
+        <p:spPr>
+          <a:xfrm>
+            <a:off x="1261872" y="4343400"/>
+            <a:ext cx="10259568" cy="219456"/>
+          </a:xfrm>
+          <a:prstGeom prst="rect">
+            <a:avLst/>
+          </a:prstGeom>
+          <a:noFill/>
+          <a:ln/>
+        </p:spPr>
+        <p:txBody>
+          <a:bodyPr wrap="square" lIns="0" tIns="0" rIns="0" bIns="0" rtlCol="0" anchor="ctr"/>
+          <a:lstStyle/>
+          <a:p>
+            <a:pPr indent="0" marL="0">
+              <a:buNone/>
+            </a:pPr>
+            <a:r>
+              <a:rPr lang="en-US" sz="1050" b="1" spc="140" kern="0" dirty="0">
+                <a:solidFill>
+                  <a:srgbClr val="5F6F66"/>
+                </a:solidFill>
+                <a:latin typeface="Calibri" pitchFamily="34" charset="0"/>
+                <a:ea typeface="Calibri" pitchFamily="34" charset="-122"/>
+                <a:cs typeface="Calibri" pitchFamily="34" charset="-120"/>
+              </a:rPr>
+              <a:t>THE MONEY, HONESTLY</a:t>
+            </a:r>
+            <a:endParaRPr lang="en-US" sz="1050" dirty="0"/>
+          </a:p>
+        </p:txBody>
+      </p:sp>
+      <p:sp>
+        <p:nvSpPr>
+          <p:cNvPr id="15" name="Text 13"/>
+          <p:cNvSpPr txBox="1"/>
+          <p:nvPr/>
+        </p:nvSpPr>
+        <p:spPr>
+          <a:xfrm>
+            <a:off x="1261872" y="4581144"/>
+            <a:ext cx="10259568" cy="1316736"/>
+          </a:xfrm>
+          <a:prstGeom prst="rect">
+            <a:avLst/>
+          </a:prstGeom>
+          <a:noFill/>
+          <a:ln/>
+        </p:spPr>
+        <p:txBody>
+          <a:bodyPr wrap="square" lIns="0" tIns="0" rIns="0" bIns="0" rtlCol="0" anchor="t"/>
+          <a:lstStyle/>
+          <a:p>
+            <a:pPr indent="0" marL="0">
+              <a:lnSpc>
+                <a:spcPct val="108000"/>
+              </a:lnSpc>
+              <a:buNone/>
+            </a:pPr>
+            <a:r>
+              <a:rPr lang="en-US" sz="1600" dirty="0">
+                <a:solidFill>
+                  <a:srgbClr val="132018"/>
+                </a:solidFill>
+                <a:latin typeface="Calibri" pitchFamily="34" charset="0"/>
+                <a:ea typeface="Calibri" pitchFamily="34" charset="-122"/>
+                <a:cs typeface="Calibri" pitchFamily="34" charset="-120"/>
+              </a:rPr>
+              <a:t>The money comes from research grants first, up to about $305,000 from one US government programme, and not from selling anything, because nothing in this field sells yet.</a:t>
+            </a:r>
+            <a:endParaRPr lang="en-US" sz="1600" dirty="0"/>
           </a:p>
         </p:txBody>
       </p:sp>
@@ -5202,7 +6470,7 @@
                 <a:ea typeface="Cambria" pitchFamily="34" charset="-122"/>
                 <a:cs typeface="Cambria" pitchFamily="34" charset="-120"/>
               </a:rPr>
-              <a:t>Why splitting in half is the whole trick</a:t>
+              <a:t>The whole alphabet is two colours</a:t>
             </a:r>
             <a:endParaRPr lang="en-US" sz="2300" dirty="0"/>
           </a:p>
@@ -5217,7 +6485,7 @@
         <p:spPr>
           <a:xfrm>
             <a:off x="640080" y="1143000"/>
-            <a:ext cx="10881360" cy="868680"/>
+            <a:ext cx="6035040" cy="1737360"/>
           </a:xfrm>
           <a:prstGeom prst="rect">
             <a:avLst/>
@@ -5244,7 +6512,7 @@
                 <a:ea typeface="Calibri" pitchFamily="34" charset="-122"/>
                 <a:cs typeface="Calibri" pitchFamily="34" charset="-120"/>
               </a:rPr>
-              <a:t>When a germ divides, both halves keep the switch in the same position. So the memory copies itself, for free, every half hour. Nobody has to back it up.</a:t>
+              <a:t>Inside each cell sits a tiny switch built out of genes: two genes that each tell the other to be quiet. Whichever one is winning keeps winning, so the switch stays where you leave it. One position makes the cell glow green, the other makes it glow red.</a:t>
             </a:r>
             <a:endParaRPr lang="en-US" sz="1600" dirty="0"/>
           </a:p>
@@ -5258,34 +6526,37 @@
         </p:nvSpPr>
         <p:spPr>
           <a:xfrm>
-            <a:off x="640080" y="2313432"/>
-            <a:ext cx="1371600" cy="365760"/>
-          </a:xfrm>
-          <a:prstGeom prst="rect">
-            <a:avLst/>
-          </a:prstGeom>
-          <a:noFill/>
-          <a:ln/>
-        </p:spPr>
-        <p:txBody>
-          <a:bodyPr wrap="square" lIns="0" tIns="0" rIns="0" bIns="0" rtlCol="0" anchor="ctr"/>
-          <a:lstStyle/>
-          <a:p>
-            <a:pPr indent="0" marL="0">
-              <a:buNone/>
-            </a:pPr>
-            <a:r>
-              <a:rPr lang="en-US" sz="1300" b="1" dirty="0">
-                <a:solidFill>
-                  <a:srgbClr val="C8453C"/>
+            <a:off x="640080" y="3017520"/>
+            <a:ext cx="6035040" cy="914400"/>
+          </a:xfrm>
+          <a:prstGeom prst="rect">
+            <a:avLst/>
+          </a:prstGeom>
+          <a:noFill/>
+          <a:ln/>
+        </p:spPr>
+        <p:txBody>
+          <a:bodyPr wrap="square" lIns="0" tIns="0" rIns="0" bIns="0" rtlCol="0" anchor="ctr"/>
+          <a:lstStyle/>
+          <a:p>
+            <a:pPr indent="0" marL="0">
+              <a:lnSpc>
+                <a:spcPct val="115000"/>
+              </a:lnSpc>
+              <a:buNone/>
+            </a:pPr>
+            <a:r>
+              <a:rPr lang="en-US" sz="1600" i="1" dirty="0">
+                <a:solidFill>
+                  <a:srgbClr val="5F6F66"/>
                 </a:solidFill>
                 <a:latin typeface="Calibri" pitchFamily="34" charset="0"/>
                 <a:ea typeface="Calibri" pitchFamily="34" charset="-122"/>
                 <a:cs typeface="Calibri" pitchFamily="34" charset="-120"/>
               </a:rPr>
-              <a:t>1 survivor</a:t>
-            </a:r>
-            <a:endParaRPr lang="en-US" sz="1300" dirty="0"/>
+              <a:t>Reading it does not kill anything, so the same dish can be read again and again.</a:t>
+            </a:r>
+            <a:endParaRPr lang="en-US" sz="1600" dirty="0"/>
           </a:p>
         </p:txBody>
       </p:sp>
@@ -5297,8 +6568,8 @@
         </p:nvSpPr>
         <p:spPr>
           <a:xfrm>
-            <a:off x="2148840" y="2331720"/>
-            <a:ext cx="310896" cy="310896"/>
+            <a:off x="7498080" y="1417320"/>
+            <a:ext cx="1737360" cy="1737360"/>
           </a:xfrm>
           <a:prstGeom prst="ellipse">
             <a:avLst/>
@@ -5322,24 +6593,63 @@
         </p:nvSpPr>
         <p:spPr>
           <a:xfrm>
-            <a:off x="5852160" y="2313432"/>
-            <a:ext cx="5669280" cy="365760"/>
-          </a:xfrm>
-          <a:prstGeom prst="rect">
-            <a:avLst/>
-          </a:prstGeom>
-          <a:noFill/>
-          <a:ln/>
-        </p:spPr>
-        <p:txBody>
-          <a:bodyPr wrap="square" lIns="0" tIns="0" rIns="0" bIns="0" rtlCol="0" anchor="ctr"/>
-          <a:lstStyle/>
-          <a:p>
-            <a:pPr indent="0" marL="0">
-              <a:buNone/>
-            </a:pPr>
-            <a:r>
-              <a:rPr lang="en-US" sz="1250" i="1" dirty="0">
+            <a:off x="7498080" y="1417320"/>
+            <a:ext cx="1737360" cy="1737360"/>
+          </a:xfrm>
+          <a:prstGeom prst="rect">
+            <a:avLst/>
+          </a:prstGeom>
+          <a:noFill/>
+          <a:ln/>
+        </p:spPr>
+        <p:txBody>
+          <a:bodyPr wrap="square" lIns="0" tIns="0" rIns="0" bIns="0" rtlCol="0" anchor="ctr"/>
+          <a:lstStyle/>
+          <a:p>
+            <a:pPr algn="ctr" indent="0" marL="0">
+              <a:buNone/>
+            </a:pPr>
+            <a:r>
+              <a:rPr lang="en-US" sz="6000" b="1" dirty="0">
+                <a:solidFill>
+                  <a:srgbClr val="FFFFFF"/>
+                </a:solidFill>
+                <a:latin typeface="Cambria" pitchFamily="34" charset="0"/>
+                <a:ea typeface="Cambria" pitchFamily="34" charset="-122"/>
+                <a:cs typeface="Cambria" pitchFamily="34" charset="-120"/>
+              </a:rPr>
+              <a:t>0</a:t>
+            </a:r>
+            <a:endParaRPr lang="en-US" sz="6000" dirty="0"/>
+          </a:p>
+        </p:txBody>
+      </p:sp>
+      <p:sp>
+        <p:nvSpPr>
+          <p:cNvPr id="8" name="Text 6"/>
+          <p:cNvSpPr txBox="1"/>
+          <p:nvPr/>
+        </p:nvSpPr>
+        <p:spPr>
+          <a:xfrm>
+            <a:off x="7498080" y="3291840"/>
+            <a:ext cx="1737360" cy="320040"/>
+          </a:xfrm>
+          <a:prstGeom prst="rect">
+            <a:avLst/>
+          </a:prstGeom>
+          <a:noFill/>
+          <a:ln/>
+        </p:spPr>
+        <p:txBody>
+          <a:bodyPr wrap="square" lIns="0" tIns="0" rIns="0" bIns="0" rtlCol="0" anchor="ctr"/>
+          <a:lstStyle/>
+          <a:p>
+            <a:pPr algn="ctr" indent="0" marL="0">
+              <a:buNone/>
+            </a:pPr>
+            <a:r>
+              <a:rPr lang="en-US" sz="1250" dirty="0">
                 <a:solidFill>
                   <a:srgbClr val="5F6F66"/>
                 </a:solidFill>
@@ -5347,7 +6657,7 @@
                 <a:ea typeface="Calibri" pitchFamily="34" charset="-122"/>
                 <a:cs typeface="Calibri" pitchFamily="34" charset="-120"/>
               </a:rPr>
-              <a:t>the dish gets wiped out, one germ lives</a:t>
+              <a:t>glows green</a:t>
             </a:r>
             <a:endParaRPr lang="en-US" sz="1250" dirty="0"/>
           </a:p>
@@ -5355,30 +6665,94 @@
       </p:sp>
       <p:sp>
         <p:nvSpPr>
-          <p:cNvPr id="8" name="Text 6"/>
-          <p:cNvSpPr txBox="1"/>
-          <p:nvPr/>
-        </p:nvSpPr>
-        <p:spPr>
-          <a:xfrm>
-            <a:off x="640080" y="3026664"/>
-            <a:ext cx="1371600" cy="365760"/>
-          </a:xfrm>
-          <a:prstGeom prst="rect">
-            <a:avLst/>
-          </a:prstGeom>
-          <a:noFill/>
-          <a:ln/>
-        </p:spPr>
-        <p:txBody>
-          <a:bodyPr wrap="square" lIns="0" tIns="0" rIns="0" bIns="0" rtlCol="0" anchor="ctr"/>
-          <a:lstStyle/>
-          <a:p>
-            <a:pPr indent="0" marL="0">
-              <a:buNone/>
-            </a:pPr>
-            <a:r>
-              <a:rPr lang="en-US" sz="1300" dirty="0">
+          <p:cNvPr id="9" name="Shape 7"/>
+          <p:cNvSpPr/>
+          <p:nvPr/>
+        </p:nvSpPr>
+        <p:spPr>
+          <a:xfrm>
+            <a:off x="9784080" y="1417320"/>
+            <a:ext cx="1737360" cy="1737360"/>
+          </a:xfrm>
+          <a:prstGeom prst="ellipse">
+            <a:avLst/>
+          </a:prstGeom>
+          <a:solidFill>
+            <a:srgbClr val="C8453C"/>
+          </a:solidFill>
+          <a:ln w="12700">
+            <a:solidFill>
+              <a:srgbClr val="C8453C"/>
+            </a:solidFill>
+            <a:prstDash val="solid"/>
+          </a:ln>
+        </p:spPr>
+      </p:sp>
+      <p:sp>
+        <p:nvSpPr>
+          <p:cNvPr id="10" name="Text 8"/>
+          <p:cNvSpPr txBox="1"/>
+          <p:nvPr/>
+        </p:nvSpPr>
+        <p:spPr>
+          <a:xfrm>
+            <a:off x="9784080" y="1417320"/>
+            <a:ext cx="1737360" cy="1737360"/>
+          </a:xfrm>
+          <a:prstGeom prst="rect">
+            <a:avLst/>
+          </a:prstGeom>
+          <a:noFill/>
+          <a:ln/>
+        </p:spPr>
+        <p:txBody>
+          <a:bodyPr wrap="square" lIns="0" tIns="0" rIns="0" bIns="0" rtlCol="0" anchor="ctr"/>
+          <a:lstStyle/>
+          <a:p>
+            <a:pPr algn="ctr" indent="0" marL="0">
+              <a:buNone/>
+            </a:pPr>
+            <a:r>
+              <a:rPr lang="en-US" sz="6000" b="1" dirty="0">
+                <a:solidFill>
+                  <a:srgbClr val="FFFFFF"/>
+                </a:solidFill>
+                <a:latin typeface="Cambria" pitchFamily="34" charset="0"/>
+                <a:ea typeface="Cambria" pitchFamily="34" charset="-122"/>
+                <a:cs typeface="Cambria" pitchFamily="34" charset="-120"/>
+              </a:rPr>
+              <a:t>1</a:t>
+            </a:r>
+            <a:endParaRPr lang="en-US" sz="6000" dirty="0"/>
+          </a:p>
+        </p:txBody>
+      </p:sp>
+      <p:sp>
+        <p:nvSpPr>
+          <p:cNvPr id="11" name="Text 9"/>
+          <p:cNvSpPr txBox="1"/>
+          <p:nvPr/>
+        </p:nvSpPr>
+        <p:spPr>
+          <a:xfrm>
+            <a:off x="9784080" y="3291840"/>
+            <a:ext cx="1737360" cy="320040"/>
+          </a:xfrm>
+          <a:prstGeom prst="rect">
+            <a:avLst/>
+          </a:prstGeom>
+          <a:noFill/>
+          <a:ln/>
+        </p:spPr>
+        <p:txBody>
+          <a:bodyPr wrap="square" lIns="0" tIns="0" rIns="0" bIns="0" rtlCol="0" anchor="ctr"/>
+          <a:lstStyle/>
+          <a:p>
+            <a:pPr algn="ctr" indent="0" marL="0">
+              <a:buNone/>
+            </a:pPr>
+            <a:r>
+              <a:rPr lang="en-US" sz="1250" dirty="0">
                 <a:solidFill>
                   <a:srgbClr val="5F6F66"/>
                 </a:solidFill>
@@ -5386,552 +6760,7 @@
                 <a:ea typeface="Calibri" pitchFamily="34" charset="-122"/>
                 <a:cs typeface="Calibri" pitchFamily="34" charset="-120"/>
               </a:rPr>
-              <a:t>2 germs</a:t>
-            </a:r>
-            <a:endParaRPr lang="en-US" sz="1300" dirty="0"/>
-          </a:p>
-        </p:txBody>
-      </p:sp>
-      <p:sp>
-        <p:nvSpPr>
-          <p:cNvPr id="9" name="Shape 7"/>
-          <p:cNvSpPr/>
-          <p:nvPr/>
-        </p:nvSpPr>
-        <p:spPr>
-          <a:xfrm>
-            <a:off x="2148840" y="3044952"/>
-            <a:ext cx="310896" cy="310896"/>
-          </a:xfrm>
-          <a:prstGeom prst="ellipse">
-            <a:avLst/>
-          </a:prstGeom>
-          <a:solidFill>
-            <a:srgbClr val="1F8B5F"/>
-          </a:solidFill>
-          <a:ln w="12700">
-            <a:solidFill>
-              <a:srgbClr val="1F8B5F"/>
-            </a:solidFill>
-            <a:prstDash val="solid"/>
-          </a:ln>
-        </p:spPr>
-      </p:sp>
-      <p:sp>
-        <p:nvSpPr>
-          <p:cNvPr id="10" name="Shape 8"/>
-          <p:cNvSpPr/>
-          <p:nvPr/>
-        </p:nvSpPr>
-        <p:spPr>
-          <a:xfrm>
-            <a:off x="2569464" y="3044952"/>
-            <a:ext cx="310896" cy="310896"/>
-          </a:xfrm>
-          <a:prstGeom prst="ellipse">
-            <a:avLst/>
-          </a:prstGeom>
-          <a:solidFill>
-            <a:srgbClr val="1F8B5F"/>
-          </a:solidFill>
-          <a:ln w="12700">
-            <a:solidFill>
-              <a:srgbClr val="1F8B5F"/>
-            </a:solidFill>
-            <a:prstDash val="solid"/>
-          </a:ln>
-        </p:spPr>
-      </p:sp>
-      <p:sp>
-        <p:nvSpPr>
-          <p:cNvPr id="11" name="Text 9"/>
-          <p:cNvSpPr txBox="1"/>
-          <p:nvPr/>
-        </p:nvSpPr>
-        <p:spPr>
-          <a:xfrm>
-            <a:off x="5852160" y="3026664"/>
-            <a:ext cx="5669280" cy="365760"/>
-          </a:xfrm>
-          <a:prstGeom prst="rect">
-            <a:avLst/>
-          </a:prstGeom>
-          <a:noFill/>
-          <a:ln/>
-        </p:spPr>
-        <p:txBody>
-          <a:bodyPr wrap="square" lIns="0" tIns="0" rIns="0" bIns="0" rtlCol="0" anchor="ctr"/>
-          <a:lstStyle/>
-          <a:p>
-            <a:pPr indent="0" marL="0">
-              <a:buNone/>
-            </a:pPr>
-            <a:r>
-              <a:rPr lang="en-US" sz="1250" i="1" dirty="0">
-                <a:solidFill>
-                  <a:srgbClr val="5F6F66"/>
-                </a:solidFill>
-                <a:latin typeface="Calibri" pitchFamily="34" charset="0"/>
-                <a:ea typeface="Calibri" pitchFamily="34" charset="-122"/>
-                <a:cs typeface="Calibri" pitchFamily="34" charset="-120"/>
-              </a:rPr>
-              <a:t>half an hour later, it has split, and both halves agree</a:t>
-            </a:r>
-            <a:endParaRPr lang="en-US" sz="1250" dirty="0"/>
-          </a:p>
-        </p:txBody>
-      </p:sp>
-      <p:sp>
-        <p:nvSpPr>
-          <p:cNvPr id="12" name="Text 10"/>
-          <p:cNvSpPr txBox="1"/>
-          <p:nvPr/>
-        </p:nvSpPr>
-        <p:spPr>
-          <a:xfrm>
-            <a:off x="640080" y="3739896"/>
-            <a:ext cx="1371600" cy="365760"/>
-          </a:xfrm>
-          <a:prstGeom prst="rect">
-            <a:avLst/>
-          </a:prstGeom>
-          <a:noFill/>
-          <a:ln/>
-        </p:spPr>
-        <p:txBody>
-          <a:bodyPr wrap="square" lIns="0" tIns="0" rIns="0" bIns="0" rtlCol="0" anchor="ctr"/>
-          <a:lstStyle/>
-          <a:p>
-            <a:pPr indent="0" marL="0">
-              <a:buNone/>
-            </a:pPr>
-            <a:r>
-              <a:rPr lang="en-US" sz="1300" dirty="0">
-                <a:solidFill>
-                  <a:srgbClr val="5F6F66"/>
-                </a:solidFill>
-                <a:latin typeface="Calibri" pitchFamily="34" charset="0"/>
-                <a:ea typeface="Calibri" pitchFamily="34" charset="-122"/>
-                <a:cs typeface="Calibri" pitchFamily="34" charset="-120"/>
-              </a:rPr>
-              <a:t>4 germs</a:t>
-            </a:r>
-            <a:endParaRPr lang="en-US" sz="1300" dirty="0"/>
-          </a:p>
-        </p:txBody>
-      </p:sp>
-      <p:sp>
-        <p:nvSpPr>
-          <p:cNvPr id="13" name="Shape 11"/>
-          <p:cNvSpPr/>
-          <p:nvPr/>
-        </p:nvSpPr>
-        <p:spPr>
-          <a:xfrm>
-            <a:off x="2148840" y="3758184"/>
-            <a:ext cx="310896" cy="310896"/>
-          </a:xfrm>
-          <a:prstGeom prst="ellipse">
-            <a:avLst/>
-          </a:prstGeom>
-          <a:solidFill>
-            <a:srgbClr val="1F8B5F"/>
-          </a:solidFill>
-          <a:ln w="12700">
-            <a:solidFill>
-              <a:srgbClr val="1F8B5F"/>
-            </a:solidFill>
-            <a:prstDash val="solid"/>
-          </a:ln>
-        </p:spPr>
-      </p:sp>
-      <p:sp>
-        <p:nvSpPr>
-          <p:cNvPr id="14" name="Shape 12"/>
-          <p:cNvSpPr/>
-          <p:nvPr/>
-        </p:nvSpPr>
-        <p:spPr>
-          <a:xfrm>
-            <a:off x="2569464" y="3758184"/>
-            <a:ext cx="310896" cy="310896"/>
-          </a:xfrm>
-          <a:prstGeom prst="ellipse">
-            <a:avLst/>
-          </a:prstGeom>
-          <a:solidFill>
-            <a:srgbClr val="1F8B5F"/>
-          </a:solidFill>
-          <a:ln w="12700">
-            <a:solidFill>
-              <a:srgbClr val="1F8B5F"/>
-            </a:solidFill>
-            <a:prstDash val="solid"/>
-          </a:ln>
-        </p:spPr>
-      </p:sp>
-      <p:sp>
-        <p:nvSpPr>
-          <p:cNvPr id="15" name="Shape 13"/>
-          <p:cNvSpPr/>
-          <p:nvPr/>
-        </p:nvSpPr>
-        <p:spPr>
-          <a:xfrm>
-            <a:off x="2990088" y="3758184"/>
-            <a:ext cx="310896" cy="310896"/>
-          </a:xfrm>
-          <a:prstGeom prst="ellipse">
-            <a:avLst/>
-          </a:prstGeom>
-          <a:solidFill>
-            <a:srgbClr val="1F8B5F"/>
-          </a:solidFill>
-          <a:ln w="12700">
-            <a:solidFill>
-              <a:srgbClr val="1F8B5F"/>
-            </a:solidFill>
-            <a:prstDash val="solid"/>
-          </a:ln>
-        </p:spPr>
-      </p:sp>
-      <p:sp>
-        <p:nvSpPr>
-          <p:cNvPr id="16" name="Shape 14"/>
-          <p:cNvSpPr/>
-          <p:nvPr/>
-        </p:nvSpPr>
-        <p:spPr>
-          <a:xfrm>
-            <a:off x="3410712" y="3758184"/>
-            <a:ext cx="310896" cy="310896"/>
-          </a:xfrm>
-          <a:prstGeom prst="ellipse">
-            <a:avLst/>
-          </a:prstGeom>
-          <a:solidFill>
-            <a:srgbClr val="1F8B5F"/>
-          </a:solidFill>
-          <a:ln w="12700">
-            <a:solidFill>
-              <a:srgbClr val="1F8B5F"/>
-            </a:solidFill>
-            <a:prstDash val="solid"/>
-          </a:ln>
-        </p:spPr>
-      </p:sp>
-      <p:sp>
-        <p:nvSpPr>
-          <p:cNvPr id="17" name="Text 15"/>
-          <p:cNvSpPr txBox="1"/>
-          <p:nvPr/>
-        </p:nvSpPr>
-        <p:spPr>
-          <a:xfrm>
-            <a:off x="5852160" y="3739896"/>
-            <a:ext cx="5669280" cy="365760"/>
-          </a:xfrm>
-          <a:prstGeom prst="rect">
-            <a:avLst/>
-          </a:prstGeom>
-          <a:noFill/>
-          <a:ln/>
-        </p:spPr>
-        <p:txBody>
-          <a:bodyPr wrap="square" lIns="0" tIns="0" rIns="0" bIns="0" rtlCol="0" anchor="ctr"/>
-          <a:lstStyle/>
-          <a:p>
-            <a:pPr indent="0" marL="0">
-              <a:buNone/>
-            </a:pPr>
-            <a:r>
-              <a:rPr lang="en-US" sz="1250" i="1" dirty="0">
-                <a:solidFill>
-                  <a:srgbClr val="5F6F66"/>
-                </a:solidFill>
-                <a:latin typeface="Calibri" pitchFamily="34" charset="0"/>
-                <a:ea typeface="Calibri" pitchFamily="34" charset="-122"/>
-                <a:cs typeface="Calibri" pitchFamily="34" charset="-120"/>
-              </a:rPr>
-              <a:t>an hour later</a:t>
-            </a:r>
-            <a:endParaRPr lang="en-US" sz="1250" dirty="0"/>
-          </a:p>
-        </p:txBody>
-      </p:sp>
-      <p:sp>
-        <p:nvSpPr>
-          <p:cNvPr id="18" name="Text 16"/>
-          <p:cNvSpPr txBox="1"/>
-          <p:nvPr/>
-        </p:nvSpPr>
-        <p:spPr>
-          <a:xfrm>
-            <a:off x="640080" y="4453128"/>
-            <a:ext cx="1371600" cy="365760"/>
-          </a:xfrm>
-          <a:prstGeom prst="rect">
-            <a:avLst/>
-          </a:prstGeom>
-          <a:noFill/>
-          <a:ln/>
-        </p:spPr>
-        <p:txBody>
-          <a:bodyPr wrap="square" lIns="0" tIns="0" rIns="0" bIns="0" rtlCol="0" anchor="ctr"/>
-          <a:lstStyle/>
-          <a:p>
-            <a:pPr indent="0" marL="0">
-              <a:buNone/>
-            </a:pPr>
-            <a:r>
-              <a:rPr lang="en-US" sz="1300" dirty="0">
-                <a:solidFill>
-                  <a:srgbClr val="5F6F66"/>
-                </a:solidFill>
-                <a:latin typeface="Calibri" pitchFamily="34" charset="0"/>
-                <a:ea typeface="Calibri" pitchFamily="34" charset="-122"/>
-                <a:cs typeface="Calibri" pitchFamily="34" charset="-120"/>
-              </a:rPr>
-              <a:t>8 germs</a:t>
-            </a:r>
-            <a:endParaRPr lang="en-US" sz="1300" dirty="0"/>
-          </a:p>
-        </p:txBody>
-      </p:sp>
-      <p:sp>
-        <p:nvSpPr>
-          <p:cNvPr id="19" name="Shape 17"/>
-          <p:cNvSpPr/>
-          <p:nvPr/>
-        </p:nvSpPr>
-        <p:spPr>
-          <a:xfrm>
-            <a:off x="2148840" y="4471416"/>
-            <a:ext cx="310896" cy="310896"/>
-          </a:xfrm>
-          <a:prstGeom prst="ellipse">
-            <a:avLst/>
-          </a:prstGeom>
-          <a:solidFill>
-            <a:srgbClr val="1F8B5F"/>
-          </a:solidFill>
-          <a:ln w="12700">
-            <a:solidFill>
-              <a:srgbClr val="1F8B5F"/>
-            </a:solidFill>
-            <a:prstDash val="solid"/>
-          </a:ln>
-        </p:spPr>
-      </p:sp>
-      <p:sp>
-        <p:nvSpPr>
-          <p:cNvPr id="20" name="Shape 18"/>
-          <p:cNvSpPr/>
-          <p:nvPr/>
-        </p:nvSpPr>
-        <p:spPr>
-          <a:xfrm>
-            <a:off x="2569464" y="4471416"/>
-            <a:ext cx="310896" cy="310896"/>
-          </a:xfrm>
-          <a:prstGeom prst="ellipse">
-            <a:avLst/>
-          </a:prstGeom>
-          <a:solidFill>
-            <a:srgbClr val="1F8B5F"/>
-          </a:solidFill>
-          <a:ln w="12700">
-            <a:solidFill>
-              <a:srgbClr val="1F8B5F"/>
-            </a:solidFill>
-            <a:prstDash val="solid"/>
-          </a:ln>
-        </p:spPr>
-      </p:sp>
-      <p:sp>
-        <p:nvSpPr>
-          <p:cNvPr id="21" name="Shape 19"/>
-          <p:cNvSpPr/>
-          <p:nvPr/>
-        </p:nvSpPr>
-        <p:spPr>
-          <a:xfrm>
-            <a:off x="2990088" y="4471416"/>
-            <a:ext cx="310896" cy="310896"/>
-          </a:xfrm>
-          <a:prstGeom prst="ellipse">
-            <a:avLst/>
-          </a:prstGeom>
-          <a:solidFill>
-            <a:srgbClr val="1F8B5F"/>
-          </a:solidFill>
-          <a:ln w="12700">
-            <a:solidFill>
-              <a:srgbClr val="1F8B5F"/>
-            </a:solidFill>
-            <a:prstDash val="solid"/>
-          </a:ln>
-        </p:spPr>
-      </p:sp>
-      <p:sp>
-        <p:nvSpPr>
-          <p:cNvPr id="22" name="Shape 20"/>
-          <p:cNvSpPr/>
-          <p:nvPr/>
-        </p:nvSpPr>
-        <p:spPr>
-          <a:xfrm>
-            <a:off x="3410712" y="4471416"/>
-            <a:ext cx="310896" cy="310896"/>
-          </a:xfrm>
-          <a:prstGeom prst="ellipse">
-            <a:avLst/>
-          </a:prstGeom>
-          <a:solidFill>
-            <a:srgbClr val="1F8B5F"/>
-          </a:solidFill>
-          <a:ln w="12700">
-            <a:solidFill>
-              <a:srgbClr val="1F8B5F"/>
-            </a:solidFill>
-            <a:prstDash val="solid"/>
-          </a:ln>
-        </p:spPr>
-      </p:sp>
-      <p:sp>
-        <p:nvSpPr>
-          <p:cNvPr id="23" name="Shape 21"/>
-          <p:cNvSpPr/>
-          <p:nvPr/>
-        </p:nvSpPr>
-        <p:spPr>
-          <a:xfrm>
-            <a:off x="3831336" y="4471416"/>
-            <a:ext cx="310896" cy="310896"/>
-          </a:xfrm>
-          <a:prstGeom prst="ellipse">
-            <a:avLst/>
-          </a:prstGeom>
-          <a:solidFill>
-            <a:srgbClr val="1F8B5F"/>
-          </a:solidFill>
-          <a:ln w="12700">
-            <a:solidFill>
-              <a:srgbClr val="1F8B5F"/>
-            </a:solidFill>
-            <a:prstDash val="solid"/>
-          </a:ln>
-        </p:spPr>
-      </p:sp>
-      <p:sp>
-        <p:nvSpPr>
-          <p:cNvPr id="24" name="Shape 22"/>
-          <p:cNvSpPr/>
-          <p:nvPr/>
-        </p:nvSpPr>
-        <p:spPr>
-          <a:xfrm>
-            <a:off x="4251960" y="4471416"/>
-            <a:ext cx="310896" cy="310896"/>
-          </a:xfrm>
-          <a:prstGeom prst="ellipse">
-            <a:avLst/>
-          </a:prstGeom>
-          <a:solidFill>
-            <a:srgbClr val="1F8B5F"/>
-          </a:solidFill>
-          <a:ln w="12700">
-            <a:solidFill>
-              <a:srgbClr val="1F8B5F"/>
-            </a:solidFill>
-            <a:prstDash val="solid"/>
-          </a:ln>
-        </p:spPr>
-      </p:sp>
-      <p:sp>
-        <p:nvSpPr>
-          <p:cNvPr id="25" name="Shape 23"/>
-          <p:cNvSpPr/>
-          <p:nvPr/>
-        </p:nvSpPr>
-        <p:spPr>
-          <a:xfrm>
-            <a:off x="4672584" y="4471416"/>
-            <a:ext cx="310896" cy="310896"/>
-          </a:xfrm>
-          <a:prstGeom prst="ellipse">
-            <a:avLst/>
-          </a:prstGeom>
-          <a:solidFill>
-            <a:srgbClr val="1F8B5F"/>
-          </a:solidFill>
-          <a:ln w="12700">
-            <a:solidFill>
-              <a:srgbClr val="1F8B5F"/>
-            </a:solidFill>
-            <a:prstDash val="solid"/>
-          </a:ln>
-        </p:spPr>
-      </p:sp>
-      <p:sp>
-        <p:nvSpPr>
-          <p:cNvPr id="26" name="Shape 24"/>
-          <p:cNvSpPr/>
-          <p:nvPr/>
-        </p:nvSpPr>
-        <p:spPr>
-          <a:xfrm>
-            <a:off x="5093208" y="4471416"/>
-            <a:ext cx="310896" cy="310896"/>
-          </a:xfrm>
-          <a:prstGeom prst="ellipse">
-            <a:avLst/>
-          </a:prstGeom>
-          <a:solidFill>
-            <a:srgbClr val="1F8B5F"/>
-          </a:solidFill>
-          <a:ln w="12700">
-            <a:solidFill>
-              <a:srgbClr val="1F8B5F"/>
-            </a:solidFill>
-            <a:prstDash val="solid"/>
-          </a:ln>
-        </p:spPr>
-      </p:sp>
-      <p:sp>
-        <p:nvSpPr>
-          <p:cNvPr id="27" name="Text 25"/>
-          <p:cNvSpPr txBox="1"/>
-          <p:nvPr/>
-        </p:nvSpPr>
-        <p:spPr>
-          <a:xfrm>
-            <a:off x="5852160" y="4453128"/>
-            <a:ext cx="5669280" cy="365760"/>
-          </a:xfrm>
-          <a:prstGeom prst="rect">
-            <a:avLst/>
-          </a:prstGeom>
-          <a:noFill/>
-          <a:ln/>
-        </p:spPr>
-        <p:txBody>
-          <a:bodyPr wrap="square" lIns="0" tIns="0" rIns="0" bIns="0" rtlCol="0" anchor="ctr"/>
-          <a:lstStyle/>
-          <a:p>
-            <a:pPr indent="0" marL="0">
-              <a:buNone/>
-            </a:pPr>
-            <a:r>
-              <a:rPr lang="en-US" sz="1250" i="1" dirty="0">
-                <a:solidFill>
-                  <a:srgbClr val="5F6F66"/>
-                </a:solidFill>
-                <a:latin typeface="Calibri" pitchFamily="34" charset="0"/>
-                <a:ea typeface="Calibri" pitchFamily="34" charset="-122"/>
-                <a:cs typeface="Calibri" pitchFamily="34" charset="-120"/>
-              </a:rPr>
-              <a:t>ninety minutes later, and the message is still the message</a:t>
+              <a:t>glows red</a:t>
             </a:r>
             <a:endParaRPr lang="en-US" sz="1250" dirty="0"/>
           </a:p>
@@ -5948,6 +6777,831 @@
 <file path=ppt/slides/slide7.xml><?xml version="1.0" encoding="utf-8"?>
 <p:sld xmlns:a="http://schemas.openxmlformats.org/drawingml/2006/main" xmlns:r="http://schemas.openxmlformats.org/officeDocument/2006/relationships" xmlns:p="http://schemas.openxmlformats.org/presentationml/2006/main">
   <p:cSld name="Slide 7">
+    <p:bg>
+      <p:bgPr>
+        <a:solidFill>
+          <a:srgbClr val="FFFFFF"/>
+        </a:solidFill>
+      </p:bgPr>
+    </p:bg>
+    <p:spTree>
+      <p:nvGrpSpPr>
+        <p:cNvPr id="1" name=""/>
+        <p:cNvGrpSpPr/>
+        <p:nvPr/>
+      </p:nvGrpSpPr>
+      <p:grpSpPr>
+        <a:xfrm>
+          <a:off x="0" y="0"/>
+          <a:ext cx="0" cy="0"/>
+          <a:chOff x="0" y="0"/>
+          <a:chExt cx="0" cy="0"/>
+        </a:xfrm>
+      </p:grpSpPr>
+      <p:sp>
+        <p:nvSpPr>
+          <p:cNvPr id="2" name="Shape 0"/>
+          <p:cNvSpPr/>
+          <p:nvPr/>
+        </p:nvSpPr>
+        <p:spPr>
+          <a:xfrm>
+            <a:off x="640080" y="603504"/>
+            <a:ext cx="155448" cy="155448"/>
+          </a:xfrm>
+          <a:prstGeom prst="ellipse">
+            <a:avLst/>
+          </a:prstGeom>
+          <a:solidFill>
+            <a:srgbClr val="1F8B5F"/>
+          </a:solidFill>
+          <a:ln w="12700">
+            <a:solidFill>
+              <a:srgbClr val="1F8B5F"/>
+            </a:solidFill>
+            <a:prstDash val="solid"/>
+          </a:ln>
+        </p:spPr>
+      </p:sp>
+      <p:sp>
+        <p:nvSpPr>
+          <p:cNvPr id="3" name="Text 1"/>
+          <p:cNvSpPr txBox="1"/>
+          <p:nvPr/>
+        </p:nvSpPr>
+        <p:spPr>
+          <a:xfrm>
+            <a:off x="932688" y="502920"/>
+            <a:ext cx="10588752" cy="384048"/>
+          </a:xfrm>
+          <a:prstGeom prst="rect">
+            <a:avLst/>
+          </a:prstGeom>
+          <a:noFill/>
+          <a:ln/>
+        </p:spPr>
+        <p:txBody>
+          <a:bodyPr wrap="square" lIns="0" tIns="0" rIns="0" bIns="0" rtlCol="0" anchor="ctr"/>
+          <a:lstStyle/>
+          <a:p>
+            <a:pPr indent="0" marL="0">
+              <a:buNone/>
+            </a:pPr>
+            <a:r>
+              <a:rPr lang="en-US" sz="2300" b="1" dirty="0">
+                <a:solidFill>
+                  <a:srgbClr val="132018"/>
+                </a:solidFill>
+                <a:latin typeface="Cambria" pitchFamily="34" charset="0"/>
+                <a:ea typeface="Cambria" pitchFamily="34" charset="-122"/>
+                <a:cs typeface="Cambria" pitchFamily="34" charset="-120"/>
+              </a:rPr>
+              <a:t>Why splitting in half is the whole trick</a:t>
+            </a:r>
+            <a:endParaRPr lang="en-US" sz="2300" dirty="0"/>
+          </a:p>
+        </p:txBody>
+      </p:sp>
+      <p:sp>
+        <p:nvSpPr>
+          <p:cNvPr id="4" name="Text 2"/>
+          <p:cNvSpPr txBox="1"/>
+          <p:nvPr/>
+        </p:nvSpPr>
+        <p:spPr>
+          <a:xfrm>
+            <a:off x="640080" y="1143000"/>
+            <a:ext cx="10881360" cy="868680"/>
+          </a:xfrm>
+          <a:prstGeom prst="rect">
+            <a:avLst/>
+          </a:prstGeom>
+          <a:noFill/>
+          <a:ln/>
+        </p:spPr>
+        <p:txBody>
+          <a:bodyPr wrap="square" lIns="0" tIns="0" rIns="0" bIns="0" rtlCol="0" anchor="ctr"/>
+          <a:lstStyle/>
+          <a:p>
+            <a:pPr indent="0" marL="0">
+              <a:lnSpc>
+                <a:spcPct val="115000"/>
+              </a:lnSpc>
+              <a:buNone/>
+            </a:pPr>
+            <a:r>
+              <a:rPr lang="en-US" sz="1600" dirty="0">
+                <a:solidFill>
+                  <a:srgbClr val="132018"/>
+                </a:solidFill>
+                <a:latin typeface="Calibri" pitchFamily="34" charset="0"/>
+                <a:ea typeface="Calibri" pitchFamily="34" charset="-122"/>
+                <a:cs typeface="Calibri" pitchFamily="34" charset="-120"/>
+              </a:rPr>
+              <a:t>When a cell divides, both halves keep the switch in the same position. So the data copies itself, for free, every time the organism grows. Nobody has to back it up.</a:t>
+            </a:r>
+            <a:endParaRPr lang="en-US" sz="1600" dirty="0"/>
+          </a:p>
+        </p:txBody>
+      </p:sp>
+      <p:sp>
+        <p:nvSpPr>
+          <p:cNvPr id="5" name="Text 3"/>
+          <p:cNvSpPr txBox="1"/>
+          <p:nvPr/>
+        </p:nvSpPr>
+        <p:spPr>
+          <a:xfrm>
+            <a:off x="640080" y="2313432"/>
+            <a:ext cx="1371600" cy="365760"/>
+          </a:xfrm>
+          <a:prstGeom prst="rect">
+            <a:avLst/>
+          </a:prstGeom>
+          <a:noFill/>
+          <a:ln/>
+        </p:spPr>
+        <p:txBody>
+          <a:bodyPr wrap="square" lIns="0" tIns="0" rIns="0" bIns="0" rtlCol="0" anchor="ctr"/>
+          <a:lstStyle/>
+          <a:p>
+            <a:pPr indent="0" marL="0">
+              <a:buNone/>
+            </a:pPr>
+            <a:r>
+              <a:rPr lang="en-US" sz="1300" b="1" dirty="0">
+                <a:solidFill>
+                  <a:srgbClr val="C8453C"/>
+                </a:solidFill>
+                <a:latin typeface="Calibri" pitchFamily="34" charset="0"/>
+                <a:ea typeface="Calibri" pitchFamily="34" charset="-122"/>
+                <a:cs typeface="Calibri" pitchFamily="34" charset="-120"/>
+              </a:rPr>
+              <a:t>1 survivor</a:t>
+            </a:r>
+            <a:endParaRPr lang="en-US" sz="1300" dirty="0"/>
+          </a:p>
+        </p:txBody>
+      </p:sp>
+      <p:sp>
+        <p:nvSpPr>
+          <p:cNvPr id="6" name="Shape 4"/>
+          <p:cNvSpPr/>
+          <p:nvPr/>
+        </p:nvSpPr>
+        <p:spPr>
+          <a:xfrm>
+            <a:off x="2148840" y="2331720"/>
+            <a:ext cx="310896" cy="310896"/>
+          </a:xfrm>
+          <a:prstGeom prst="ellipse">
+            <a:avLst/>
+          </a:prstGeom>
+          <a:solidFill>
+            <a:srgbClr val="1F8B5F"/>
+          </a:solidFill>
+          <a:ln w="12700">
+            <a:solidFill>
+              <a:srgbClr val="1F8B5F"/>
+            </a:solidFill>
+            <a:prstDash val="solid"/>
+          </a:ln>
+        </p:spPr>
+      </p:sp>
+      <p:sp>
+        <p:nvSpPr>
+          <p:cNvPr id="7" name="Text 5"/>
+          <p:cNvSpPr txBox="1"/>
+          <p:nvPr/>
+        </p:nvSpPr>
+        <p:spPr>
+          <a:xfrm>
+            <a:off x="5852160" y="2313432"/>
+            <a:ext cx="5669280" cy="365760"/>
+          </a:xfrm>
+          <a:prstGeom prst="rect">
+            <a:avLst/>
+          </a:prstGeom>
+          <a:noFill/>
+          <a:ln/>
+        </p:spPr>
+        <p:txBody>
+          <a:bodyPr wrap="square" lIns="0" tIns="0" rIns="0" bIns="0" rtlCol="0" anchor="ctr"/>
+          <a:lstStyle/>
+          <a:p>
+            <a:pPr indent="0" marL="0">
+              <a:buNone/>
+            </a:pPr>
+            <a:r>
+              <a:rPr lang="en-US" sz="1250" i="1" dirty="0">
+                <a:solidFill>
+                  <a:srgbClr val="5F6F66"/>
+                </a:solidFill>
+                <a:latin typeface="Calibri" pitchFamily="34" charset="0"/>
+                <a:ea typeface="Calibri" pitchFamily="34" charset="-122"/>
+                <a:cs typeface="Calibri" pitchFamily="34" charset="-120"/>
+              </a:rPr>
+              <a:t>the damage happens, one cell lives</a:t>
+            </a:r>
+            <a:endParaRPr lang="en-US" sz="1250" dirty="0"/>
+          </a:p>
+        </p:txBody>
+      </p:sp>
+      <p:sp>
+        <p:nvSpPr>
+          <p:cNvPr id="8" name="Text 6"/>
+          <p:cNvSpPr txBox="1"/>
+          <p:nvPr/>
+        </p:nvSpPr>
+        <p:spPr>
+          <a:xfrm>
+            <a:off x="640080" y="3026664"/>
+            <a:ext cx="1371600" cy="365760"/>
+          </a:xfrm>
+          <a:prstGeom prst="rect">
+            <a:avLst/>
+          </a:prstGeom>
+          <a:noFill/>
+          <a:ln/>
+        </p:spPr>
+        <p:txBody>
+          <a:bodyPr wrap="square" lIns="0" tIns="0" rIns="0" bIns="0" rtlCol="0" anchor="ctr"/>
+          <a:lstStyle/>
+          <a:p>
+            <a:pPr indent="0" marL="0">
+              <a:buNone/>
+            </a:pPr>
+            <a:r>
+              <a:rPr lang="en-US" sz="1300" dirty="0">
+                <a:solidFill>
+                  <a:srgbClr val="5F6F66"/>
+                </a:solidFill>
+                <a:latin typeface="Calibri" pitchFamily="34" charset="0"/>
+                <a:ea typeface="Calibri" pitchFamily="34" charset="-122"/>
+                <a:cs typeface="Calibri" pitchFamily="34" charset="-120"/>
+              </a:rPr>
+              <a:t>2 cells</a:t>
+            </a:r>
+            <a:endParaRPr lang="en-US" sz="1300" dirty="0"/>
+          </a:p>
+        </p:txBody>
+      </p:sp>
+      <p:sp>
+        <p:nvSpPr>
+          <p:cNvPr id="9" name="Shape 7"/>
+          <p:cNvSpPr/>
+          <p:nvPr/>
+        </p:nvSpPr>
+        <p:spPr>
+          <a:xfrm>
+            <a:off x="2148840" y="3044952"/>
+            <a:ext cx="310896" cy="310896"/>
+          </a:xfrm>
+          <a:prstGeom prst="ellipse">
+            <a:avLst/>
+          </a:prstGeom>
+          <a:solidFill>
+            <a:srgbClr val="1F8B5F"/>
+          </a:solidFill>
+          <a:ln w="12700">
+            <a:solidFill>
+              <a:srgbClr val="1F8B5F"/>
+            </a:solidFill>
+            <a:prstDash val="solid"/>
+          </a:ln>
+        </p:spPr>
+      </p:sp>
+      <p:sp>
+        <p:nvSpPr>
+          <p:cNvPr id="10" name="Shape 8"/>
+          <p:cNvSpPr/>
+          <p:nvPr/>
+        </p:nvSpPr>
+        <p:spPr>
+          <a:xfrm>
+            <a:off x="2569464" y="3044952"/>
+            <a:ext cx="310896" cy="310896"/>
+          </a:xfrm>
+          <a:prstGeom prst="ellipse">
+            <a:avLst/>
+          </a:prstGeom>
+          <a:solidFill>
+            <a:srgbClr val="1F8B5F"/>
+          </a:solidFill>
+          <a:ln w="12700">
+            <a:solidFill>
+              <a:srgbClr val="1F8B5F"/>
+            </a:solidFill>
+            <a:prstDash val="solid"/>
+          </a:ln>
+        </p:spPr>
+      </p:sp>
+      <p:sp>
+        <p:nvSpPr>
+          <p:cNvPr id="11" name="Text 9"/>
+          <p:cNvSpPr txBox="1"/>
+          <p:nvPr/>
+        </p:nvSpPr>
+        <p:spPr>
+          <a:xfrm>
+            <a:off x="5852160" y="3026664"/>
+            <a:ext cx="5669280" cy="365760"/>
+          </a:xfrm>
+          <a:prstGeom prst="rect">
+            <a:avLst/>
+          </a:prstGeom>
+          <a:noFill/>
+          <a:ln/>
+        </p:spPr>
+        <p:txBody>
+          <a:bodyPr wrap="square" lIns="0" tIns="0" rIns="0" bIns="0" rtlCol="0" anchor="ctr"/>
+          <a:lstStyle/>
+          <a:p>
+            <a:pPr indent="0" marL="0">
+              <a:buNone/>
+            </a:pPr>
+            <a:r>
+              <a:rPr lang="en-US" sz="1250" i="1" dirty="0">
+                <a:solidFill>
+                  <a:srgbClr val="5F6F66"/>
+                </a:solidFill>
+                <a:latin typeface="Calibri" pitchFamily="34" charset="0"/>
+                <a:ea typeface="Calibri" pitchFamily="34" charset="-122"/>
+                <a:cs typeface="Calibri" pitchFamily="34" charset="-120"/>
+              </a:rPr>
+              <a:t>it splits, and both halves agree</a:t>
+            </a:r>
+            <a:endParaRPr lang="en-US" sz="1250" dirty="0"/>
+          </a:p>
+        </p:txBody>
+      </p:sp>
+      <p:sp>
+        <p:nvSpPr>
+          <p:cNvPr id="12" name="Text 10"/>
+          <p:cNvSpPr txBox="1"/>
+          <p:nvPr/>
+        </p:nvSpPr>
+        <p:spPr>
+          <a:xfrm>
+            <a:off x="640080" y="3739896"/>
+            <a:ext cx="1371600" cy="365760"/>
+          </a:xfrm>
+          <a:prstGeom prst="rect">
+            <a:avLst/>
+          </a:prstGeom>
+          <a:noFill/>
+          <a:ln/>
+        </p:spPr>
+        <p:txBody>
+          <a:bodyPr wrap="square" lIns="0" tIns="0" rIns="0" bIns="0" rtlCol="0" anchor="ctr"/>
+          <a:lstStyle/>
+          <a:p>
+            <a:pPr indent="0" marL="0">
+              <a:buNone/>
+            </a:pPr>
+            <a:r>
+              <a:rPr lang="en-US" sz="1300" dirty="0">
+                <a:solidFill>
+                  <a:srgbClr val="5F6F66"/>
+                </a:solidFill>
+                <a:latin typeface="Calibri" pitchFamily="34" charset="0"/>
+                <a:ea typeface="Calibri" pitchFamily="34" charset="-122"/>
+                <a:cs typeface="Calibri" pitchFamily="34" charset="-120"/>
+              </a:rPr>
+              <a:t>4 cells</a:t>
+            </a:r>
+            <a:endParaRPr lang="en-US" sz="1300" dirty="0"/>
+          </a:p>
+        </p:txBody>
+      </p:sp>
+      <p:sp>
+        <p:nvSpPr>
+          <p:cNvPr id="13" name="Shape 11"/>
+          <p:cNvSpPr/>
+          <p:nvPr/>
+        </p:nvSpPr>
+        <p:spPr>
+          <a:xfrm>
+            <a:off x="2148840" y="3758184"/>
+            <a:ext cx="310896" cy="310896"/>
+          </a:xfrm>
+          <a:prstGeom prst="ellipse">
+            <a:avLst/>
+          </a:prstGeom>
+          <a:solidFill>
+            <a:srgbClr val="1F8B5F"/>
+          </a:solidFill>
+          <a:ln w="12700">
+            <a:solidFill>
+              <a:srgbClr val="1F8B5F"/>
+            </a:solidFill>
+            <a:prstDash val="solid"/>
+          </a:ln>
+        </p:spPr>
+      </p:sp>
+      <p:sp>
+        <p:nvSpPr>
+          <p:cNvPr id="14" name="Shape 12"/>
+          <p:cNvSpPr/>
+          <p:nvPr/>
+        </p:nvSpPr>
+        <p:spPr>
+          <a:xfrm>
+            <a:off x="2569464" y="3758184"/>
+            <a:ext cx="310896" cy="310896"/>
+          </a:xfrm>
+          <a:prstGeom prst="ellipse">
+            <a:avLst/>
+          </a:prstGeom>
+          <a:solidFill>
+            <a:srgbClr val="1F8B5F"/>
+          </a:solidFill>
+          <a:ln w="12700">
+            <a:solidFill>
+              <a:srgbClr val="1F8B5F"/>
+            </a:solidFill>
+            <a:prstDash val="solid"/>
+          </a:ln>
+        </p:spPr>
+      </p:sp>
+      <p:sp>
+        <p:nvSpPr>
+          <p:cNvPr id="15" name="Shape 13"/>
+          <p:cNvSpPr/>
+          <p:nvPr/>
+        </p:nvSpPr>
+        <p:spPr>
+          <a:xfrm>
+            <a:off x="2990088" y="3758184"/>
+            <a:ext cx="310896" cy="310896"/>
+          </a:xfrm>
+          <a:prstGeom prst="ellipse">
+            <a:avLst/>
+          </a:prstGeom>
+          <a:solidFill>
+            <a:srgbClr val="1F8B5F"/>
+          </a:solidFill>
+          <a:ln w="12700">
+            <a:solidFill>
+              <a:srgbClr val="1F8B5F"/>
+            </a:solidFill>
+            <a:prstDash val="solid"/>
+          </a:ln>
+        </p:spPr>
+      </p:sp>
+      <p:sp>
+        <p:nvSpPr>
+          <p:cNvPr id="16" name="Shape 14"/>
+          <p:cNvSpPr/>
+          <p:nvPr/>
+        </p:nvSpPr>
+        <p:spPr>
+          <a:xfrm>
+            <a:off x="3410712" y="3758184"/>
+            <a:ext cx="310896" cy="310896"/>
+          </a:xfrm>
+          <a:prstGeom prst="ellipse">
+            <a:avLst/>
+          </a:prstGeom>
+          <a:solidFill>
+            <a:srgbClr val="1F8B5F"/>
+          </a:solidFill>
+          <a:ln w="12700">
+            <a:solidFill>
+              <a:srgbClr val="1F8B5F"/>
+            </a:solidFill>
+            <a:prstDash val="solid"/>
+          </a:ln>
+        </p:spPr>
+      </p:sp>
+      <p:sp>
+        <p:nvSpPr>
+          <p:cNvPr id="17" name="Text 15"/>
+          <p:cNvSpPr txBox="1"/>
+          <p:nvPr/>
+        </p:nvSpPr>
+        <p:spPr>
+          <a:xfrm>
+            <a:off x="5852160" y="3739896"/>
+            <a:ext cx="5669280" cy="365760"/>
+          </a:xfrm>
+          <a:prstGeom prst="rect">
+            <a:avLst/>
+          </a:prstGeom>
+          <a:noFill/>
+          <a:ln/>
+        </p:spPr>
+        <p:txBody>
+          <a:bodyPr wrap="square" lIns="0" tIns="0" rIns="0" bIns="0" rtlCol="0" anchor="ctr"/>
+          <a:lstStyle/>
+          <a:p>
+            <a:pPr indent="0" marL="0">
+              <a:buNone/>
+            </a:pPr>
+            <a:r>
+              <a:rPr lang="en-US" sz="1250" i="1" dirty="0">
+                <a:solidFill>
+                  <a:srgbClr val="5F6F66"/>
+                </a:solidFill>
+                <a:latin typeface="Calibri" pitchFamily="34" charset="0"/>
+                <a:ea typeface="Calibri" pitchFamily="34" charset="-122"/>
+                <a:cs typeface="Calibri" pitchFamily="34" charset="-120"/>
+              </a:rPr>
+              <a:t>an hour later</a:t>
+            </a:r>
+            <a:endParaRPr lang="en-US" sz="1250" dirty="0"/>
+          </a:p>
+        </p:txBody>
+      </p:sp>
+      <p:sp>
+        <p:nvSpPr>
+          <p:cNvPr id="18" name="Text 16"/>
+          <p:cNvSpPr txBox="1"/>
+          <p:nvPr/>
+        </p:nvSpPr>
+        <p:spPr>
+          <a:xfrm>
+            <a:off x="640080" y="4453128"/>
+            <a:ext cx="1371600" cy="365760"/>
+          </a:xfrm>
+          <a:prstGeom prst="rect">
+            <a:avLst/>
+          </a:prstGeom>
+          <a:noFill/>
+          <a:ln/>
+        </p:spPr>
+        <p:txBody>
+          <a:bodyPr wrap="square" lIns="0" tIns="0" rIns="0" bIns="0" rtlCol="0" anchor="ctr"/>
+          <a:lstStyle/>
+          <a:p>
+            <a:pPr indent="0" marL="0">
+              <a:buNone/>
+            </a:pPr>
+            <a:r>
+              <a:rPr lang="en-US" sz="1300" dirty="0">
+                <a:solidFill>
+                  <a:srgbClr val="5F6F66"/>
+                </a:solidFill>
+                <a:latin typeface="Calibri" pitchFamily="34" charset="0"/>
+                <a:ea typeface="Calibri" pitchFamily="34" charset="-122"/>
+                <a:cs typeface="Calibri" pitchFamily="34" charset="-120"/>
+              </a:rPr>
+              <a:t>8 cells</a:t>
+            </a:r>
+            <a:endParaRPr lang="en-US" sz="1300" dirty="0"/>
+          </a:p>
+        </p:txBody>
+      </p:sp>
+      <p:sp>
+        <p:nvSpPr>
+          <p:cNvPr id="19" name="Shape 17"/>
+          <p:cNvSpPr/>
+          <p:nvPr/>
+        </p:nvSpPr>
+        <p:spPr>
+          <a:xfrm>
+            <a:off x="2148840" y="4471416"/>
+            <a:ext cx="310896" cy="310896"/>
+          </a:xfrm>
+          <a:prstGeom prst="ellipse">
+            <a:avLst/>
+          </a:prstGeom>
+          <a:solidFill>
+            <a:srgbClr val="1F8B5F"/>
+          </a:solidFill>
+          <a:ln w="12700">
+            <a:solidFill>
+              <a:srgbClr val="1F8B5F"/>
+            </a:solidFill>
+            <a:prstDash val="solid"/>
+          </a:ln>
+        </p:spPr>
+      </p:sp>
+      <p:sp>
+        <p:nvSpPr>
+          <p:cNvPr id="20" name="Shape 18"/>
+          <p:cNvSpPr/>
+          <p:nvPr/>
+        </p:nvSpPr>
+        <p:spPr>
+          <a:xfrm>
+            <a:off x="2569464" y="4471416"/>
+            <a:ext cx="310896" cy="310896"/>
+          </a:xfrm>
+          <a:prstGeom prst="ellipse">
+            <a:avLst/>
+          </a:prstGeom>
+          <a:solidFill>
+            <a:srgbClr val="1F8B5F"/>
+          </a:solidFill>
+          <a:ln w="12700">
+            <a:solidFill>
+              <a:srgbClr val="1F8B5F"/>
+            </a:solidFill>
+            <a:prstDash val="solid"/>
+          </a:ln>
+        </p:spPr>
+      </p:sp>
+      <p:sp>
+        <p:nvSpPr>
+          <p:cNvPr id="21" name="Shape 19"/>
+          <p:cNvSpPr/>
+          <p:nvPr/>
+        </p:nvSpPr>
+        <p:spPr>
+          <a:xfrm>
+            <a:off x="2990088" y="4471416"/>
+            <a:ext cx="310896" cy="310896"/>
+          </a:xfrm>
+          <a:prstGeom prst="ellipse">
+            <a:avLst/>
+          </a:prstGeom>
+          <a:solidFill>
+            <a:srgbClr val="1F8B5F"/>
+          </a:solidFill>
+          <a:ln w="12700">
+            <a:solidFill>
+              <a:srgbClr val="1F8B5F"/>
+            </a:solidFill>
+            <a:prstDash val="solid"/>
+          </a:ln>
+        </p:spPr>
+      </p:sp>
+      <p:sp>
+        <p:nvSpPr>
+          <p:cNvPr id="22" name="Shape 20"/>
+          <p:cNvSpPr/>
+          <p:nvPr/>
+        </p:nvSpPr>
+        <p:spPr>
+          <a:xfrm>
+            <a:off x="3410712" y="4471416"/>
+            <a:ext cx="310896" cy="310896"/>
+          </a:xfrm>
+          <a:prstGeom prst="ellipse">
+            <a:avLst/>
+          </a:prstGeom>
+          <a:solidFill>
+            <a:srgbClr val="1F8B5F"/>
+          </a:solidFill>
+          <a:ln w="12700">
+            <a:solidFill>
+              <a:srgbClr val="1F8B5F"/>
+            </a:solidFill>
+            <a:prstDash val="solid"/>
+          </a:ln>
+        </p:spPr>
+      </p:sp>
+      <p:sp>
+        <p:nvSpPr>
+          <p:cNvPr id="23" name="Shape 21"/>
+          <p:cNvSpPr/>
+          <p:nvPr/>
+        </p:nvSpPr>
+        <p:spPr>
+          <a:xfrm>
+            <a:off x="3831336" y="4471416"/>
+            <a:ext cx="310896" cy="310896"/>
+          </a:xfrm>
+          <a:prstGeom prst="ellipse">
+            <a:avLst/>
+          </a:prstGeom>
+          <a:solidFill>
+            <a:srgbClr val="1F8B5F"/>
+          </a:solidFill>
+          <a:ln w="12700">
+            <a:solidFill>
+              <a:srgbClr val="1F8B5F"/>
+            </a:solidFill>
+            <a:prstDash val="solid"/>
+          </a:ln>
+        </p:spPr>
+      </p:sp>
+      <p:sp>
+        <p:nvSpPr>
+          <p:cNvPr id="24" name="Shape 22"/>
+          <p:cNvSpPr/>
+          <p:nvPr/>
+        </p:nvSpPr>
+        <p:spPr>
+          <a:xfrm>
+            <a:off x="4251960" y="4471416"/>
+            <a:ext cx="310896" cy="310896"/>
+          </a:xfrm>
+          <a:prstGeom prst="ellipse">
+            <a:avLst/>
+          </a:prstGeom>
+          <a:solidFill>
+            <a:srgbClr val="1F8B5F"/>
+          </a:solidFill>
+          <a:ln w="12700">
+            <a:solidFill>
+              <a:srgbClr val="1F8B5F"/>
+            </a:solidFill>
+            <a:prstDash val="solid"/>
+          </a:ln>
+        </p:spPr>
+      </p:sp>
+      <p:sp>
+        <p:nvSpPr>
+          <p:cNvPr id="25" name="Shape 23"/>
+          <p:cNvSpPr/>
+          <p:nvPr/>
+        </p:nvSpPr>
+        <p:spPr>
+          <a:xfrm>
+            <a:off x="4672584" y="4471416"/>
+            <a:ext cx="310896" cy="310896"/>
+          </a:xfrm>
+          <a:prstGeom prst="ellipse">
+            <a:avLst/>
+          </a:prstGeom>
+          <a:solidFill>
+            <a:srgbClr val="1F8B5F"/>
+          </a:solidFill>
+          <a:ln w="12700">
+            <a:solidFill>
+              <a:srgbClr val="1F8B5F"/>
+            </a:solidFill>
+            <a:prstDash val="solid"/>
+          </a:ln>
+        </p:spPr>
+      </p:sp>
+      <p:sp>
+        <p:nvSpPr>
+          <p:cNvPr id="26" name="Shape 24"/>
+          <p:cNvSpPr/>
+          <p:nvPr/>
+        </p:nvSpPr>
+        <p:spPr>
+          <a:xfrm>
+            <a:off x="5093208" y="4471416"/>
+            <a:ext cx="310896" cy="310896"/>
+          </a:xfrm>
+          <a:prstGeom prst="ellipse">
+            <a:avLst/>
+          </a:prstGeom>
+          <a:solidFill>
+            <a:srgbClr val="1F8B5F"/>
+          </a:solidFill>
+          <a:ln w="12700">
+            <a:solidFill>
+              <a:srgbClr val="1F8B5F"/>
+            </a:solidFill>
+            <a:prstDash val="solid"/>
+          </a:ln>
+        </p:spPr>
+      </p:sp>
+      <p:sp>
+        <p:nvSpPr>
+          <p:cNvPr id="27" name="Text 25"/>
+          <p:cNvSpPr txBox="1"/>
+          <p:nvPr/>
+        </p:nvSpPr>
+        <p:spPr>
+          <a:xfrm>
+            <a:off x="5852160" y="4453128"/>
+            <a:ext cx="5669280" cy="365760"/>
+          </a:xfrm>
+          <a:prstGeom prst="rect">
+            <a:avLst/>
+          </a:prstGeom>
+          <a:noFill/>
+          <a:ln/>
+        </p:spPr>
+        <p:txBody>
+          <a:bodyPr wrap="square" lIns="0" tIns="0" rIns="0" bIns="0" rtlCol="0" anchor="ctr"/>
+          <a:lstStyle/>
+          <a:p>
+            <a:pPr indent="0" marL="0">
+              <a:buNone/>
+            </a:pPr>
+            <a:r>
+              <a:rPr lang="en-US" sz="1250" i="1" dirty="0">
+                <a:solidFill>
+                  <a:srgbClr val="5F6F66"/>
+                </a:solidFill>
+                <a:latin typeface="Calibri" pitchFamily="34" charset="0"/>
+                <a:ea typeface="Calibri" pitchFamily="34" charset="-122"/>
+                <a:cs typeface="Calibri" pitchFamily="34" charset="-120"/>
+              </a:rPr>
+              <a:t>and on, until the data is whole again</a:t>
+            </a:r>
+            <a:endParaRPr lang="en-US" sz="1250" dirty="0"/>
+          </a:p>
+        </p:txBody>
+      </p:sp>
+    </p:spTree>
+  </p:cSld>
+  <p:clrMapOvr>
+    <a:masterClrMapping/>
+  </p:clrMapOvr>
+</p:sld>
+</file>
+
+<file path=ppt/slides/slide8.xml><?xml version="1.0" encoding="utf-8"?>
+<p:sld xmlns:a="http://schemas.openxmlformats.org/drawingml/2006/main" xmlns:r="http://schemas.openxmlformats.org/officeDocument/2006/relationships" xmlns:p="http://schemas.openxmlformats.org/presentationml/2006/main">
+  <p:cSld name="Slide 8">
     <p:bg>
       <p:bgPr>
         <a:solidFill>
@@ -6319,389 +7973,6 @@
               <a:t>The honest sentence is "it survived every level we tested, down to 2 percent."</a:t>
             </a:r>
             <a:endParaRPr lang="en-US" sz="1300" dirty="0"/>
-          </a:p>
-        </p:txBody>
-      </p:sp>
-    </p:spTree>
-  </p:cSld>
-  <p:clrMapOvr>
-    <a:masterClrMapping/>
-  </p:clrMapOvr>
-</p:sld>
-</file>
-
-<file path=ppt/slides/slide8.xml><?xml version="1.0" encoding="utf-8"?>
-<p:sld xmlns:a="http://schemas.openxmlformats.org/drawingml/2006/main" xmlns:r="http://schemas.openxmlformats.org/officeDocument/2006/relationships" xmlns:p="http://schemas.openxmlformats.org/presentationml/2006/main">
-  <p:cSld name="Slide 8">
-    <p:bg>
-      <p:bgPr>
-        <a:solidFill>
-          <a:srgbClr val="FFFFFF"/>
-        </a:solidFill>
-      </p:bgPr>
-    </p:bg>
-    <p:spTree>
-      <p:nvGrpSpPr>
-        <p:cNvPr id="1" name=""/>
-        <p:cNvGrpSpPr/>
-        <p:nvPr/>
-      </p:nvGrpSpPr>
-      <p:grpSpPr>
-        <a:xfrm>
-          <a:off x="0" y="0"/>
-          <a:ext cx="0" cy="0"/>
-          <a:chOff x="0" y="0"/>
-          <a:chExt cx="0" cy="0"/>
-        </a:xfrm>
-      </p:grpSpPr>
-      <p:sp>
-        <p:nvSpPr>
-          <p:cNvPr id="2" name="Shape 0"/>
-          <p:cNvSpPr/>
-          <p:nvPr/>
-        </p:nvSpPr>
-        <p:spPr>
-          <a:xfrm>
-            <a:off x="640080" y="603504"/>
-            <a:ext cx="155448" cy="155448"/>
-          </a:xfrm>
-          <a:prstGeom prst="ellipse">
-            <a:avLst/>
-          </a:prstGeom>
-          <a:solidFill>
-            <a:srgbClr val="1F8B5F"/>
-          </a:solidFill>
-          <a:ln w="12700">
-            <a:solidFill>
-              <a:srgbClr val="1F8B5F"/>
-            </a:solidFill>
-            <a:prstDash val="solid"/>
-          </a:ln>
-        </p:spPr>
-      </p:sp>
-      <p:sp>
-        <p:nvSpPr>
-          <p:cNvPr id="3" name="Text 1"/>
-          <p:cNvSpPr txBox="1"/>
-          <p:nvPr/>
-        </p:nvSpPr>
-        <p:spPr>
-          <a:xfrm>
-            <a:off x="932688" y="502920"/>
-            <a:ext cx="10588752" cy="384048"/>
-          </a:xfrm>
-          <a:prstGeom prst="rect">
-            <a:avLst/>
-          </a:prstGeom>
-          <a:noFill/>
-          <a:ln/>
-        </p:spPr>
-        <p:txBody>
-          <a:bodyPr wrap="square" lIns="0" tIns="0" rIns="0" bIns="0" rtlCol="0" anchor="ctr"/>
-          <a:lstStyle/>
-          <a:p>
-            <a:pPr indent="0" marL="0">
-              <a:buNone/>
-            </a:pPr>
-            <a:r>
-              <a:rPr lang="en-US" sz="2300" b="1" dirty="0">
-                <a:solidFill>
-                  <a:srgbClr val="132018"/>
-                </a:solidFill>
-                <a:latin typeface="Cambria" pitchFamily="34" charset="0"/>
-                <a:ea typeface="Cambria" pitchFamily="34" charset="-122"/>
-                <a:cs typeface="Cambria" pitchFamily="34" charset="-120"/>
-              </a:rPr>
-              <a:t>The worms, and the famous scientist</a:t>
-            </a:r>
-            <a:endParaRPr lang="en-US" sz="2300" dirty="0"/>
-          </a:p>
-        </p:txBody>
-      </p:sp>
-      <p:sp>
-        <p:nvSpPr>
-          <p:cNvPr id="4" name="Text 2"/>
-          <p:cNvSpPr txBox="1"/>
-          <p:nvPr/>
-        </p:nvSpPr>
-        <p:spPr>
-          <a:xfrm>
-            <a:off x="640080" y="1188720"/>
-            <a:ext cx="5486400" cy="3108960"/>
-          </a:xfrm>
-          <a:prstGeom prst="rect">
-            <a:avLst/>
-          </a:prstGeom>
-          <a:noFill/>
-          <a:ln/>
-        </p:spPr>
-        <p:txBody>
-          <a:bodyPr wrap="square" lIns="0" tIns="0" rIns="0" bIns="0" rtlCol="0" anchor="ctr"/>
-          <a:lstStyle/>
-          <a:p>
-            <a:pPr indent="0" marL="0">
-              <a:lnSpc>
-                <a:spcPct val="115000"/>
-              </a:lnSpc>
-              <a:buNone/>
-            </a:pPr>
-            <a:r>
-              <a:rPr lang="en-US" sz="1500" dirty="0">
-                <a:solidFill>
-                  <a:srgbClr val="132018"/>
-                </a:solidFill>
-                <a:latin typeface="Calibri" pitchFamily="34" charset="0"/>
-                <a:ea typeface="Calibri" pitchFamily="34" charset="-122"/>
-                <a:cs typeface="Calibri" pitchFamily="34" charset="-120"/>
-              </a:rPr>
-              <a:t>Dayana picked flatworms on her own reasoning, before she had heard of Michael Levin. She found his lab afterwards.</a:t>
-            </a:r>
-            <a:endParaRPr lang="en-US" sz="1500" dirty="0"/>
-          </a:p>
-          <a:p>
-            <a:pPr indent="0" marL="0">
-              <a:lnSpc>
-                <a:spcPct val="115000"/>
-              </a:lnSpc>
-              <a:buNone/>
-            </a:pPr>
-            <a:endParaRPr lang="en-US" sz="1500" dirty="0"/>
-          </a:p>
-          <a:p>
-            <a:pPr indent="0" marL="0">
-              <a:lnSpc>
-                <a:spcPct val="115000"/>
-              </a:lnSpc>
-              <a:buNone/>
-            </a:pPr>
-            <a:r>
-              <a:rPr lang="en-US" sz="1500" dirty="0">
-                <a:solidFill>
-                  <a:srgbClr val="132018"/>
-                </a:solidFill>
-                <a:latin typeface="Calibri" pitchFamily="34" charset="0"/>
-                <a:ea typeface="Calibri" pitchFamily="34" charset="-122"/>
-                <a:cs typeface="Calibri" pitchFamily="34" charset="-120"/>
-              </a:rPr>
-              <a:t>His lab at Tufts showed something genuinely strange. A flatworm's body plan is partly stored as electricity across its cells. Interfere with that electricity and the worm regrows with two heads, and it keeps regrowing two-headed afterwards with no further interference. The instructions were changed, not the genes.</a:t>
-            </a:r>
-            <a:endParaRPr lang="en-US" sz="1500" dirty="0"/>
-          </a:p>
-        </p:txBody>
-      </p:sp>
-      <p:sp>
-        <p:nvSpPr>
-          <p:cNvPr id="5" name="Shape 3"/>
-          <p:cNvSpPr/>
-          <p:nvPr/>
-        </p:nvSpPr>
-        <p:spPr>
-          <a:xfrm>
-            <a:off x="6583680" y="1188720"/>
-            <a:ext cx="4937760" cy="1920240"/>
-          </a:xfrm>
-          <a:prstGeom prst="roundRect">
-            <a:avLst>
-              <a:gd name="adj" fmla="val 4762"/>
-            </a:avLst>
-          </a:prstGeom>
-          <a:solidFill>
-            <a:srgbClr val="EDF2EE"/>
-          </a:solidFill>
-          <a:ln w="12700">
-            <a:solidFill>
-              <a:srgbClr val="EDF2EE"/>
-            </a:solidFill>
-            <a:prstDash val="solid"/>
-          </a:ln>
-        </p:spPr>
-      </p:sp>
-      <p:sp>
-        <p:nvSpPr>
-          <p:cNvPr id="6" name="Text 4"/>
-          <p:cNvSpPr txBox="1"/>
-          <p:nvPr/>
-        </p:nvSpPr>
-        <p:spPr>
-          <a:xfrm>
-            <a:off x="6858000" y="1371600"/>
-            <a:ext cx="4389120" cy="320040"/>
-          </a:xfrm>
-          <a:prstGeom prst="rect">
-            <a:avLst/>
-          </a:prstGeom>
-          <a:noFill/>
-          <a:ln/>
-        </p:spPr>
-        <p:txBody>
-          <a:bodyPr wrap="square" lIns="0" tIns="0" rIns="0" bIns="0" rtlCol="0" anchor="ctr"/>
-          <a:lstStyle/>
-          <a:p>
-            <a:pPr indent="0" marL="0">
-              <a:buNone/>
-            </a:pPr>
-            <a:r>
-              <a:rPr lang="en-US" sz="1100" b="1" spc="140" kern="0" dirty="0">
-                <a:solidFill>
-                  <a:srgbClr val="1F8B5F"/>
-                </a:solidFill>
-                <a:latin typeface="Calibri" pitchFamily="34" charset="0"/>
-                <a:ea typeface="Calibri" pitchFamily="34" charset="-122"/>
-                <a:cs typeface="Calibri" pitchFamily="34" charset="-120"/>
-              </a:rPr>
-              <a:t>What it proves</a:t>
-            </a:r>
-            <a:endParaRPr lang="en-US" sz="1100" dirty="0"/>
-          </a:p>
-        </p:txBody>
-      </p:sp>
-      <p:sp>
-        <p:nvSpPr>
-          <p:cNvPr id="7" name="Text 5"/>
-          <p:cNvSpPr txBox="1"/>
-          <p:nvPr/>
-        </p:nvSpPr>
-        <p:spPr>
-          <a:xfrm>
-            <a:off x="6858000" y="1737360"/>
-            <a:ext cx="4389120" cy="1188720"/>
-          </a:xfrm>
-          <a:prstGeom prst="rect">
-            <a:avLst/>
-          </a:prstGeom>
-          <a:noFill/>
-          <a:ln/>
-        </p:spPr>
-        <p:txBody>
-          <a:bodyPr wrap="square" lIns="0" tIns="0" rIns="0" bIns="0" rtlCol="0" anchor="ctr"/>
-          <a:lstStyle/>
-          <a:p>
-            <a:pPr indent="0" marL="0">
-              <a:lnSpc>
-                <a:spcPct val="112000"/>
-              </a:lnSpc>
-              <a:buNone/>
-            </a:pPr>
-            <a:r>
-              <a:rPr lang="en-US" sz="1350" dirty="0">
-                <a:solidFill>
-                  <a:srgbClr val="132018"/>
-                </a:solidFill>
-                <a:latin typeface="Calibri" pitchFamily="34" charset="0"/>
-                <a:ea typeface="Calibri" pitchFamily="34" charset="-122"/>
-                <a:cs typeface="Calibri" pitchFamily="34" charset="-120"/>
-              </a:rPr>
-              <a:t>A worm's own natural pattern really is stored electrically, and it really does survive the animal being cut apart.</a:t>
-            </a:r>
-            <a:endParaRPr lang="en-US" sz="1350" dirty="0"/>
-          </a:p>
-        </p:txBody>
-      </p:sp>
-      <p:sp>
-        <p:nvSpPr>
-          <p:cNvPr id="8" name="Shape 6"/>
-          <p:cNvSpPr/>
-          <p:nvPr/>
-        </p:nvSpPr>
-        <p:spPr>
-          <a:xfrm>
-            <a:off x="6583680" y="3383280"/>
-            <a:ext cx="4937760" cy="1920240"/>
-          </a:xfrm>
-          <a:prstGeom prst="roundRect">
-            <a:avLst>
-              <a:gd name="adj" fmla="val 4762"/>
-            </a:avLst>
-          </a:prstGeom>
-          <a:solidFill>
-            <a:srgbClr val="EDF2EE"/>
-          </a:solidFill>
-          <a:ln w="12700">
-            <a:solidFill>
-              <a:srgbClr val="EDF2EE"/>
-            </a:solidFill>
-            <a:prstDash val="solid"/>
-          </a:ln>
-        </p:spPr>
-      </p:sp>
-      <p:sp>
-        <p:nvSpPr>
-          <p:cNvPr id="9" name="Text 7"/>
-          <p:cNvSpPr txBox="1"/>
-          <p:nvPr/>
-        </p:nvSpPr>
-        <p:spPr>
-          <a:xfrm>
-            <a:off x="6858000" y="3566160"/>
-            <a:ext cx="4389120" cy="320040"/>
-          </a:xfrm>
-          <a:prstGeom prst="rect">
-            <a:avLst/>
-          </a:prstGeom>
-          <a:noFill/>
-          <a:ln/>
-        </p:spPr>
-        <p:txBody>
-          <a:bodyPr wrap="square" lIns="0" tIns="0" rIns="0" bIns="0" rtlCol="0" anchor="ctr"/>
-          <a:lstStyle/>
-          <a:p>
-            <a:pPr indent="0" marL="0">
-              <a:buNone/>
-            </a:pPr>
-            <a:r>
-              <a:rPr lang="en-US" sz="1100" b="1" spc="140" kern="0" dirty="0">
-                <a:solidFill>
-                  <a:srgbClr val="C8453C"/>
-                </a:solidFill>
-                <a:latin typeface="Calibri" pitchFamily="34" charset="0"/>
-                <a:ea typeface="Calibri" pitchFamily="34" charset="-122"/>
-                <a:cs typeface="Calibri" pitchFamily="34" charset="-120"/>
-              </a:rPr>
-              <a:t>What it does not prove</a:t>
-            </a:r>
-            <a:endParaRPr lang="en-US" sz="1100" dirty="0"/>
-          </a:p>
-        </p:txBody>
-      </p:sp>
-      <p:sp>
-        <p:nvSpPr>
-          <p:cNvPr id="10" name="Text 8"/>
-          <p:cNvSpPr txBox="1"/>
-          <p:nvPr/>
-        </p:nvSpPr>
-        <p:spPr>
-          <a:xfrm>
-            <a:off x="6858000" y="3931920"/>
-            <a:ext cx="4389120" cy="1188720"/>
-          </a:xfrm>
-          <a:prstGeom prst="rect">
-            <a:avLst/>
-          </a:prstGeom>
-          <a:noFill/>
-          <a:ln/>
-        </p:spPr>
-        <p:txBody>
-          <a:bodyPr wrap="square" lIns="0" tIns="0" rIns="0" bIns="0" rtlCol="0" anchor="ctr"/>
-          <a:lstStyle/>
-          <a:p>
-            <a:pPr indent="0" marL="0">
-              <a:lnSpc>
-                <a:spcPct val="112000"/>
-              </a:lnSpc>
-              <a:buNone/>
-            </a:pPr>
-            <a:r>
-              <a:rPr lang="en-US" sz="1350" dirty="0">
-                <a:solidFill>
-                  <a:srgbClr val="132018"/>
-                </a:solidFill>
-                <a:latin typeface="Calibri" pitchFamily="34" charset="0"/>
-                <a:ea typeface="Calibri" pitchFamily="34" charset="-122"/>
-                <a:cs typeface="Calibri" pitchFamily="34" charset="-120"/>
-              </a:rPr>
-              <a:t>That a made-up pattern, a file Dayana invents, behaves the same way. Nobody has shown that, and it is why the project moved to germs.</a:t>
-            </a:r>
-            <a:endParaRPr lang="en-US" sz="1350" dirty="0"/>
           </a:p>
         </p:txBody>
       </p:sp>
@@ -6795,7 +8066,7 @@
                 <a:ea typeface="Cambria" pitchFamily="34" charset="-122"/>
                 <a:cs typeface="Cambria" pitchFamily="34" charset="-120"/>
               </a:rPr>
-              <a:t>Where it could be used, if it works</a:t>
+              <a:t>Why it does not matter which creature</a:t>
             </a:r>
             <a:endParaRPr lang="en-US" sz="2300" dirty="0"/>
           </a:p>
@@ -6809,34 +8080,37 @@
         </p:nvSpPr>
         <p:spPr>
           <a:xfrm>
-            <a:off x="640080" y="1097280"/>
-            <a:ext cx="10881360" cy="365760"/>
-          </a:xfrm>
-          <a:prstGeom prst="rect">
-            <a:avLst/>
-          </a:prstGeom>
-          <a:noFill/>
-          <a:ln/>
-        </p:spPr>
-        <p:txBody>
-          <a:bodyPr wrap="square" lIns="0" tIns="0" rIns="0" bIns="0" rtlCol="0" anchor="ctr"/>
-          <a:lstStyle/>
-          <a:p>
-            <a:pPr indent="0" marL="0">
-              <a:buNone/>
-            </a:pPr>
-            <a:r>
-              <a:rPr lang="en-US" sz="1400" i="1" dirty="0">
-                <a:solidFill>
-                  <a:srgbClr val="5F6F66"/>
+            <a:off x="640080" y="1143000"/>
+            <a:ext cx="10881360" cy="685800"/>
+          </a:xfrm>
+          <a:prstGeom prst="rect">
+            <a:avLst/>
+          </a:prstGeom>
+          <a:noFill/>
+          <a:ln/>
+        </p:spPr>
+        <p:txBody>
+          <a:bodyPr wrap="square" lIns="0" tIns="0" rIns="0" bIns="0" rtlCol="0" anchor="ctr"/>
+          <a:lstStyle/>
+          <a:p>
+            <a:pPr indent="0" marL="0">
+              <a:lnSpc>
+                <a:spcPct val="115000"/>
+              </a:lnSpc>
+              <a:buNone/>
+            </a:pPr>
+            <a:r>
+              <a:rPr lang="en-US" sz="1550" dirty="0">
+                <a:solidFill>
+                  <a:srgbClr val="132018"/>
                 </a:solidFill>
                 <a:latin typeface="Calibri" pitchFamily="34" charset="0"/>
                 <a:ea typeface="Calibri" pitchFamily="34" charset="-122"/>
                 <a:cs typeface="Calibri" pitchFamily="34" charset="-120"/>
               </a:rPr>
-              <a:t>Places people would plausibly want this. None of them is a customer, a deal, or a promise.</a:t>
-            </a:r>
-            <a:endParaRPr lang="en-US" sz="1400" dirty="0"/>
+              <a:t>Acheron is the idea, not the animal. Any living thing that regrows from a piece of itself could carry it, and the plan is to test more than one over time.</a:t>
+            </a:r>
+            <a:endParaRPr lang="en-US" sz="1550" dirty="0"/>
           </a:p>
         </p:txBody>
       </p:sp>
@@ -6848,12 +8122,12 @@
         </p:nvSpPr>
         <p:spPr>
           <a:xfrm>
-            <a:off x="640080" y="1691640"/>
-            <a:ext cx="5349240" cy="1691640"/>
+            <a:off x="640080" y="1965960"/>
+            <a:ext cx="5349240" cy="1783080"/>
           </a:xfrm>
           <a:prstGeom prst="roundRect">
             <a:avLst>
-              <a:gd name="adj" fmla="val 5405"/>
+              <a:gd name="adj" fmla="val 5128"/>
             </a:avLst>
           </a:prstGeom>
           <a:solidFill>
@@ -6875,7 +8149,7 @@
         </p:nvSpPr>
         <p:spPr>
           <a:xfrm>
-            <a:off x="914400" y="1984248"/>
+            <a:off x="914400" y="2267712"/>
             <a:ext cx="146304" cy="146304"/>
           </a:xfrm>
           <a:prstGeom prst="ellipse">
@@ -6900,7 +8174,7 @@
         </p:nvSpPr>
         <p:spPr>
           <a:xfrm>
-            <a:off x="1188720" y="1892808"/>
+            <a:off x="1188720" y="2176272"/>
             <a:ext cx="4572000" cy="347472"/>
           </a:xfrm>
           <a:prstGeom prst="rect">
@@ -6917,7 +8191,7 @@
               <a:buNone/>
             </a:pPr>
             <a:r>
-              <a:rPr lang="en-US" sz="1700" b="1" dirty="0">
+              <a:rPr lang="en-US" sz="1650" b="1" dirty="0">
                 <a:solidFill>
                   <a:srgbClr val="132018"/>
                 </a:solidFill>
@@ -6925,9 +8199,9 @@
                 <a:ea typeface="Cambria" pitchFamily="34" charset="-122"/>
                 <a:cs typeface="Cambria" pitchFamily="34" charset="-120"/>
               </a:rPr>
-              <a:t>Long-term archives</a:t>
-            </a:r>
-            <a:endParaRPr lang="en-US" sz="1700" dirty="0"/>
+              <a:t>Flatworms came first</a:t>
+            </a:r>
+            <a:endParaRPr lang="en-US" sz="1650" dirty="0"/>
           </a:p>
         </p:txBody>
       </p:sp>
@@ -6939,8 +8213,8 @@
         </p:nvSpPr>
         <p:spPr>
           <a:xfrm>
-            <a:off x="1188720" y="2313432"/>
-            <a:ext cx="4572000" cy="868680"/>
+            <a:off x="1188720" y="2596896"/>
+            <a:ext cx="4572000" cy="960120"/>
           </a:xfrm>
           <a:prstGeom prst="rect">
             <a:avLst/>
@@ -6959,7 +8233,7 @@
               <a:buNone/>
             </a:pPr>
             <a:r>
-              <a:rPr lang="en-US" sz="1350" dirty="0">
+              <a:rPr lang="en-US" sz="1300" dirty="0">
                 <a:solidFill>
                   <a:srgbClr val="5F6F66"/>
                 </a:solidFill>
@@ -6967,9 +8241,9 @@
                 <a:ea typeface="Calibri" pitchFamily="34" charset="-122"/>
                 <a:cs typeface="Calibri" pitchFamily="34" charset="-120"/>
               </a:rPr>
-              <a:t>Things meant to last centuries, where every storage format we have today dies first.</a:t>
-            </a:r>
-            <a:endParaRPr lang="en-US" sz="1350" dirty="0"/>
+              <a:t>Cut one into pieces and every piece grows back into a whole worm, carrying its body plan with it. That is exactly the behaviour Acheron wants, already working in nature.</a:t>
+            </a:r>
+            <a:endParaRPr lang="en-US" sz="1300" dirty="0"/>
           </a:p>
         </p:txBody>
       </p:sp>
@@ -6981,12 +8255,12 @@
         </p:nvSpPr>
         <p:spPr>
           <a:xfrm>
-            <a:off x="6172200" y="1691640"/>
-            <a:ext cx="5349240" cy="1691640"/>
+            <a:off x="6172200" y="1965960"/>
+            <a:ext cx="5349240" cy="1783080"/>
           </a:xfrm>
           <a:prstGeom prst="roundRect">
             <a:avLst>
-              <a:gd name="adj" fmla="val 5405"/>
+              <a:gd name="adj" fmla="val 5128"/>
             </a:avLst>
           </a:prstGeom>
           <a:solidFill>
@@ -7008,7 +8282,7 @@
         </p:nvSpPr>
         <p:spPr>
           <a:xfrm>
-            <a:off x="6446520" y="1984248"/>
+            <a:off x="6446520" y="2267712"/>
             <a:ext cx="146304" cy="146304"/>
           </a:xfrm>
           <a:prstGeom prst="ellipse">
@@ -7033,7 +8307,7 @@
         </p:nvSpPr>
         <p:spPr>
           <a:xfrm>
-            <a:off x="6720840" y="1892808"/>
+            <a:off x="6720840" y="2176272"/>
             <a:ext cx="4572000" cy="347472"/>
           </a:xfrm>
           <a:prstGeom prst="rect">
@@ -7050,7 +8324,7 @@
               <a:buNone/>
             </a:pPr>
             <a:r>
-              <a:rPr lang="en-US" sz="1700" b="1" dirty="0">
+              <a:rPr lang="en-US" sz="1650" b="1" dirty="0">
                 <a:solidFill>
                   <a:srgbClr val="132018"/>
                 </a:solidFill>
@@ -7058,9 +8332,9 @@
                 <a:ea typeface="Cambria" pitchFamily="34" charset="-122"/>
                 <a:cs typeface="Cambria" pitchFamily="34" charset="-120"/>
               </a:rPr>
-              <a:t>Space</a:t>
-            </a:r>
-            <a:endParaRPr lang="en-US" sz="1700" dirty="0"/>
+              <a:t>Germs are being tested first</a:t>
+            </a:r>
+            <a:endParaRPr lang="en-US" sz="1650" dirty="0"/>
           </a:p>
         </p:txBody>
       </p:sp>
@@ -7072,8 +8346,8 @@
         </p:nvSpPr>
         <p:spPr>
           <a:xfrm>
-            <a:off x="6720840" y="2313432"/>
-            <a:ext cx="4572000" cy="868680"/>
+            <a:off x="6720840" y="2596896"/>
+            <a:ext cx="4572000" cy="960120"/>
           </a:xfrm>
           <a:prstGeom prst="rect">
             <a:avLst/>
@@ -7092,7 +8366,7 @@
               <a:buNone/>
             </a:pPr>
             <a:r>
-              <a:rPr lang="en-US" sz="1350" dirty="0">
+              <a:rPr lang="en-US" sz="1300" dirty="0">
                 <a:solidFill>
                   <a:srgbClr val="5F6F66"/>
                 </a:solidFill>
@@ -7100,273 +8374,130 @@
                 <a:ea typeface="Calibri" pitchFamily="34" charset="-122"/>
                 <a:cs typeface="Calibri" pitchFamily="34" charset="-120"/>
               </a:rPr>
-              <a:t>Radiation destroys electronics. A colony that regrows from survivors behaves differently.</a:t>
-            </a:r>
-            <a:endParaRPr lang="en-US" sz="1350" dirty="0"/>
-          </a:p>
-        </p:txBody>
-      </p:sp>
-      <p:sp>
-        <p:nvSpPr>
-          <p:cNvPr id="13" name="Shape 11"/>
-          <p:cNvSpPr/>
-          <p:nvPr/>
-        </p:nvSpPr>
-        <p:spPr>
-          <a:xfrm>
-            <a:off x="640080" y="3657600"/>
-            <a:ext cx="5349240" cy="1691640"/>
-          </a:xfrm>
-          <a:prstGeom prst="roundRect">
-            <a:avLst>
-              <a:gd name="adj" fmla="val 5405"/>
-            </a:avLst>
-          </a:prstGeom>
-          <a:solidFill>
-            <a:srgbClr val="EDF2EE"/>
-          </a:solidFill>
-          <a:ln w="12700">
-            <a:solidFill>
-              <a:srgbClr val="EDF2EE"/>
-            </a:solidFill>
-            <a:prstDash val="solid"/>
-          </a:ln>
-        </p:spPr>
-      </p:sp>
-      <p:sp>
-        <p:nvSpPr>
-          <p:cNvPr id="14" name="Shape 12"/>
-          <p:cNvSpPr/>
-          <p:nvPr/>
-        </p:nvSpPr>
-        <p:spPr>
-          <a:xfrm>
-            <a:off x="914400" y="3950208"/>
-            <a:ext cx="146304" cy="146304"/>
-          </a:xfrm>
-          <a:prstGeom prst="ellipse">
-            <a:avLst/>
-          </a:prstGeom>
-          <a:solidFill>
-            <a:srgbClr val="1F8B5F"/>
-          </a:solidFill>
-          <a:ln w="12700">
-            <a:solidFill>
-              <a:srgbClr val="1F8B5F"/>
-            </a:solidFill>
-            <a:prstDash val="solid"/>
-          </a:ln>
-        </p:spPr>
-      </p:sp>
-      <p:sp>
-        <p:nvSpPr>
-          <p:cNvPr id="15" name="Text 13"/>
-          <p:cNvSpPr txBox="1"/>
-          <p:nvPr/>
-        </p:nvSpPr>
-        <p:spPr>
-          <a:xfrm>
-            <a:off x="1188720" y="3858768"/>
-            <a:ext cx="4572000" cy="347472"/>
-          </a:xfrm>
-          <a:prstGeom prst="rect">
-            <a:avLst/>
-          </a:prstGeom>
-          <a:noFill/>
-          <a:ln/>
-        </p:spPr>
-        <p:txBody>
-          <a:bodyPr wrap="square" lIns="0" tIns="0" rIns="0" bIns="0" rtlCol="0" anchor="ctr"/>
-          <a:lstStyle/>
-          <a:p>
-            <a:pPr indent="0" marL="0">
-              <a:buNone/>
-            </a:pPr>
-            <a:r>
-              <a:rPr lang="en-US" sz="1700" b="1" dirty="0">
-                <a:solidFill>
-                  <a:srgbClr val="132018"/>
-                </a:solidFill>
-                <a:latin typeface="Cambria" pitchFamily="34" charset="0"/>
-                <a:ea typeface="Cambria" pitchFamily="34" charset="-122"/>
-                <a:cs typeface="Cambria" pitchFamily="34" charset="-120"/>
-              </a:rPr>
-              <a:t>Labelling living material</a:t>
-            </a:r>
-            <a:endParaRPr lang="en-US" sz="1700" dirty="0"/>
-          </a:p>
-        </p:txBody>
-      </p:sp>
-      <p:sp>
-        <p:nvSpPr>
-          <p:cNvPr id="16" name="Text 14"/>
-          <p:cNvSpPr txBox="1"/>
-          <p:nvPr/>
-        </p:nvSpPr>
-        <p:spPr>
-          <a:xfrm>
-            <a:off x="1188720" y="4279392"/>
-            <a:ext cx="4572000" cy="868680"/>
-          </a:xfrm>
-          <a:prstGeom prst="rect">
-            <a:avLst/>
-          </a:prstGeom>
-          <a:noFill/>
-          <a:ln/>
-        </p:spPr>
-        <p:txBody>
-          <a:bodyPr wrap="square" lIns="0" tIns="0" rIns="0" bIns="0" rtlCol="0" anchor="ctr"/>
-          <a:lstStyle/>
-          <a:p>
-            <a:pPr indent="0" marL="0">
-              <a:lnSpc>
-                <a:spcPct val="110000"/>
-              </a:lnSpc>
-              <a:buNone/>
-            </a:pPr>
-            <a:r>
-              <a:rPr lang="en-US" sz="1350" dirty="0">
-                <a:solidFill>
-                  <a:srgbClr val="5F6F66"/>
+              <a:t>Not because they are better. Because they are cheap, fast and easy to rewire. A germ splits every half hour, so a test takes days instead of months.</a:t>
+            </a:r>
+            <a:endParaRPr lang="en-US" sz="1300" dirty="0"/>
+          </a:p>
+        </p:txBody>
+      </p:sp>
+      <p:sp>
+        <p:nvSpPr>
+          <p:cNvPr id="13" name="Text 11"/>
+          <p:cNvSpPr txBox="1"/>
+          <p:nvPr/>
+        </p:nvSpPr>
+        <p:spPr>
+          <a:xfrm>
+            <a:off x="640080" y="3977640"/>
+            <a:ext cx="10881360" cy="320040"/>
+          </a:xfrm>
+          <a:prstGeom prst="rect">
+            <a:avLst/>
+          </a:prstGeom>
+          <a:noFill/>
+          <a:ln/>
+        </p:spPr>
+        <p:txBody>
+          <a:bodyPr wrap="square" lIns="0" tIns="0" rIns="0" bIns="0" rtlCol="0" anchor="ctr"/>
+          <a:lstStyle/>
+          <a:p>
+            <a:pPr indent="0" marL="0">
+              <a:buNone/>
+            </a:pPr>
+            <a:r>
+              <a:rPr lang="en-US" sz="1100" b="1" spc="140" kern="0" dirty="0">
+                <a:solidFill>
+                  <a:srgbClr val="1F8B5F"/>
                 </a:solidFill>
                 <a:latin typeface="Calibri" pitchFamily="34" charset="0"/>
                 <a:ea typeface="Calibri" pitchFamily="34" charset="-122"/>
                 <a:cs typeface="Calibri" pitchFamily="34" charset="-120"/>
               </a:rPr>
-              <a:t>Seeds, cultures and samples that carry their own identity and keep it as they grow.</a:t>
-            </a:r>
-            <a:endParaRPr lang="en-US" sz="1350" dirty="0"/>
-          </a:p>
-        </p:txBody>
-      </p:sp>
-      <p:sp>
-        <p:nvSpPr>
-          <p:cNvPr id="17" name="Shape 15"/>
-          <p:cNvSpPr/>
-          <p:nvPr/>
-        </p:nvSpPr>
-        <p:spPr>
-          <a:xfrm>
-            <a:off x="6172200" y="3657600"/>
-            <a:ext cx="5349240" cy="1691640"/>
-          </a:xfrm>
-          <a:prstGeom prst="roundRect">
-            <a:avLst>
-              <a:gd name="adj" fmla="val 5405"/>
-            </a:avLst>
-          </a:prstGeom>
-          <a:solidFill>
-            <a:srgbClr val="EDF2EE"/>
-          </a:solidFill>
-          <a:ln w="12700">
-            <a:solidFill>
-              <a:srgbClr val="EDF2EE"/>
-            </a:solidFill>
-            <a:prstDash val="solid"/>
-          </a:ln>
-        </p:spPr>
-      </p:sp>
-      <p:sp>
-        <p:nvSpPr>
-          <p:cNvPr id="18" name="Shape 16"/>
-          <p:cNvSpPr/>
-          <p:nvPr/>
-        </p:nvSpPr>
-        <p:spPr>
-          <a:xfrm>
-            <a:off x="6446520" y="3950208"/>
-            <a:ext cx="146304" cy="146304"/>
-          </a:xfrm>
-          <a:prstGeom prst="ellipse">
-            <a:avLst/>
-          </a:prstGeom>
-          <a:solidFill>
-            <a:srgbClr val="1F8B5F"/>
-          </a:solidFill>
-          <a:ln w="12700">
-            <a:solidFill>
-              <a:srgbClr val="1F8B5F"/>
-            </a:solidFill>
-            <a:prstDash val="solid"/>
-          </a:ln>
-        </p:spPr>
-      </p:sp>
-      <p:sp>
-        <p:nvSpPr>
-          <p:cNvPr id="19" name="Text 17"/>
-          <p:cNvSpPr txBox="1"/>
-          <p:nvPr/>
-        </p:nvSpPr>
-        <p:spPr>
-          <a:xfrm>
-            <a:off x="6720840" y="3858768"/>
-            <a:ext cx="4572000" cy="347472"/>
-          </a:xfrm>
-          <a:prstGeom prst="rect">
-            <a:avLst/>
-          </a:prstGeom>
-          <a:noFill/>
-          <a:ln/>
-        </p:spPr>
-        <p:txBody>
-          <a:bodyPr wrap="square" lIns="0" tIns="0" rIns="0" bIns="0" rtlCol="0" anchor="ctr"/>
-          <a:lstStyle/>
-          <a:p>
-            <a:pPr indent="0" marL="0">
-              <a:buNone/>
-            </a:pPr>
-            <a:r>
-              <a:rPr lang="en-US" sz="1700" b="1" dirty="0">
+              <a:t>Michael Levin</a:t>
+            </a:r>
+            <a:endParaRPr lang="en-US" sz="1100" dirty="0"/>
+          </a:p>
+        </p:txBody>
+      </p:sp>
+      <p:sp>
+        <p:nvSpPr>
+          <p:cNvPr id="14" name="Text 12"/>
+          <p:cNvSpPr txBox="1"/>
+          <p:nvPr/>
+        </p:nvSpPr>
+        <p:spPr>
+          <a:xfrm>
+            <a:off x="640080" y="4315968"/>
+            <a:ext cx="10881360" cy="1005840"/>
+          </a:xfrm>
+          <a:prstGeom prst="rect">
+            <a:avLst/>
+          </a:prstGeom>
+          <a:noFill/>
+          <a:ln/>
+        </p:spPr>
+        <p:txBody>
+          <a:bodyPr wrap="square" lIns="0" tIns="0" rIns="0" bIns="0" rtlCol="0" anchor="ctr"/>
+          <a:lstStyle/>
+          <a:p>
+            <a:pPr indent="0" marL="0">
+              <a:lnSpc>
+                <a:spcPct val="112000"/>
+              </a:lnSpc>
+              <a:buNone/>
+            </a:pPr>
+            <a:r>
+              <a:rPr lang="en-US" sz="1350" dirty="0">
                 <a:solidFill>
                   <a:srgbClr val="132018"/>
-                </a:solidFill>
-                <a:latin typeface="Cambria" pitchFamily="34" charset="0"/>
-                <a:ea typeface="Cambria" pitchFamily="34" charset="-122"/>
-                <a:cs typeface="Cambria" pitchFamily="34" charset="-120"/>
-              </a:rPr>
-              <a:t>Anti-counterfeiting</a:t>
-            </a:r>
-            <a:endParaRPr lang="en-US" sz="1700" dirty="0"/>
-          </a:p>
-        </p:txBody>
-      </p:sp>
-      <p:sp>
-        <p:nvSpPr>
-          <p:cNvPr id="20" name="Text 18"/>
-          <p:cNvSpPr txBox="1"/>
-          <p:nvPr/>
-        </p:nvSpPr>
-        <p:spPr>
-          <a:xfrm>
-            <a:off x="6720840" y="4279392"/>
-            <a:ext cx="4572000" cy="868680"/>
-          </a:xfrm>
-          <a:prstGeom prst="rect">
-            <a:avLst/>
-          </a:prstGeom>
-          <a:noFill/>
-          <a:ln/>
-        </p:spPr>
-        <p:txBody>
-          <a:bodyPr wrap="square" lIns="0" tIns="0" rIns="0" bIns="0" rtlCol="0" anchor="ctr"/>
-          <a:lstStyle/>
-          <a:p>
-            <a:pPr indent="0" marL="0">
-              <a:lnSpc>
-                <a:spcPct val="110000"/>
-              </a:lnSpc>
-              <a:buNone/>
-            </a:pPr>
-            <a:r>
-              <a:rPr lang="en-US" sz="1350" dirty="0">
-                <a:solidFill>
-                  <a:srgbClr val="5F6F66"/>
                 </a:solidFill>
                 <a:latin typeface="Calibri" pitchFamily="34" charset="0"/>
                 <a:ea typeface="Calibri" pitchFamily="34" charset="-122"/>
                 <a:cs typeface="Calibri" pitchFamily="34" charset="-120"/>
               </a:rPr>
-              <a:t>A mark that is very hard to copy, because copying it means copying life.</a:t>
+              <a:t>Dayana picked flatworms on her own reasoning, before she had heard of him, and found his lab afterwards. His lab at Tufts showed that a flatworm's body plan is partly stored as electricity across its cells: interfere with that electricity and the worm regrows with two heads, and keeps regrowing two-headed with no further interference. The instructions changed, not the genes.</a:t>
+            </a:r>
+            <a:endParaRPr lang="en-US" sz="1350" dirty="0"/>
+          </a:p>
+        </p:txBody>
+      </p:sp>
+      <p:sp>
+        <p:nvSpPr>
+          <p:cNvPr id="15" name="Text 13"/>
+          <p:cNvSpPr txBox="1"/>
+          <p:nvPr/>
+        </p:nvSpPr>
+        <p:spPr>
+          <a:xfrm>
+            <a:off x="640080" y="5394960"/>
+            <a:ext cx="10881360" cy="822960"/>
+          </a:xfrm>
+          <a:prstGeom prst="rect">
+            <a:avLst/>
+          </a:prstGeom>
+          <a:noFill/>
+          <a:ln/>
+        </p:spPr>
+        <p:txBody>
+          <a:bodyPr wrap="square" lIns="0" tIns="0" rIns="0" bIns="0" rtlCol="0" anchor="ctr"/>
+          <a:lstStyle/>
+          <a:p>
+            <a:pPr indent="0" marL="0">
+              <a:lnSpc>
+                <a:spcPct val="112000"/>
+              </a:lnSpc>
+              <a:buNone/>
+            </a:pPr>
+            <a:r>
+              <a:rPr lang="en-US" sz="1350" i="1" dirty="0">
+                <a:solidFill>
+                  <a:srgbClr val="5F6F66"/>
+                </a:solidFill>
+                <a:latin typeface="Calibri" pitchFamily="34" charset="0"/>
+                <a:ea typeface="Calibri" pitchFamily="34" charset="-122"/>
+                <a:cs typeface="Calibri" pitchFamily="34" charset="-120"/>
+              </a:rPr>
+              <a:t>What that proves is that a worm's own natural pattern really is stored this way and really does survive being cut apart. What it does not prove is that a made-up pattern, a file Dayana invents, behaves the same way. That gap is the whole experiment.</a:t>
             </a:r>
             <a:endParaRPr lang="en-US" sz="1350" dirty="0"/>
           </a:p>
